--- a/ppt/Grade06/G06_S31_Simple_Machines_2.pptx
+++ b/ppt/Grade06/G06_S31_Simple_Machines_2.pptx
@@ -5022,7 +5022,7 @@
                 </a:solidFill>
                 <a:latin typeface="Calibri"/>
               </a:rPr>
-              <a:t>Q1 — Fixed pulley</a:t>
+              <a:t>Q1 - Fixed pulley</a:t>
             </a:r>
           </a:p>
         </p:txBody>
@@ -5318,7 +5318,7 @@
         <p:spPr>
           <a:xfrm>
             <a:off x="1508760" y="3749039"/>
-            <a:ext cx="4297680" cy="868680"/>
+            <a:ext cx="3840480" cy="868680"/>
           </a:xfrm>
           <a:prstGeom prst="rect">
             <a:avLst/>
@@ -5478,7 +5478,7 @@
         <p:spPr>
           <a:xfrm>
             <a:off x="7040880" y="3749039"/>
-            <a:ext cx="4297680" cy="868680"/>
+            <a:ext cx="3840480" cy="868680"/>
           </a:xfrm>
           <a:prstGeom prst="rect">
             <a:avLst/>
@@ -5638,7 +5638,7 @@
         <p:spPr>
           <a:xfrm>
             <a:off x="1508760" y="4782312"/>
-            <a:ext cx="4297680" cy="868680"/>
+            <a:ext cx="3840480" cy="868680"/>
           </a:xfrm>
           <a:prstGeom prst="rect">
             <a:avLst/>
@@ -5798,7 +5798,7 @@
         <p:spPr>
           <a:xfrm>
             <a:off x="7040880" y="4782312"/>
-            <a:ext cx="4297680" cy="868680"/>
+            <a:ext cx="3840480" cy="868680"/>
           </a:xfrm>
           <a:prstGeom prst="rect">
             <a:avLst/>
@@ -5865,7 +5865,7 @@
             <a:avLst/>
           </a:prstGeom>
           <a:solidFill>
-            <a:srgbClr val="2A9D8F"/>
+            <a:srgbClr val="0A9396"/>
           </a:solidFill>
           <a:ln>
             <a:noFill/>
@@ -5920,11 +5920,11 @@
             <a:r>
               <a:rPr sz="1300" b="1" i="0">
                 <a:solidFill>
-                  <a:srgbClr val="2A9D8F"/>
+                  <a:srgbClr val="0A9396"/>
                 </a:solidFill>
                 <a:latin typeface="Arial"/>
               </a:rPr>
-              <a:t>ANSWER REVEAL</a:t>
+              <a:t>QUIZ QUESTION</a:t>
             </a:r>
           </a:p>
         </p:txBody>
@@ -5959,7 +5959,7 @@
                 </a:solidFill>
                 <a:latin typeface="Calibri"/>
               </a:rPr>
-              <a:t>Q1 — Answer</a:t>
+              <a:t>Q1 - Fixed pulley</a:t>
             </a:r>
           </a:p>
         </p:txBody>
@@ -6048,166 +6048,6 @@
           <a:prstGeom prst="roundRect">
             <a:avLst>
               <a:gd name="adj" fmla="val 4000"/>
-            </a:avLst>
-          </a:prstGeom>
-          <a:solidFill>
-            <a:srgbClr val="E9F5F0"/>
-          </a:solidFill>
-          <a:ln>
-            <a:noFill/>
-          </a:ln>
-          <a:effectLst/>
-        </p:spPr>
-        <p:style>
-          <a:lnRef idx="1">
-            <a:schemeClr val="accent1"/>
-          </a:lnRef>
-          <a:fillRef idx="3">
-            <a:schemeClr val="accent1"/>
-          </a:fillRef>
-          <a:effectRef idx="2">
-            <a:schemeClr val="accent1"/>
-          </a:effectRef>
-          <a:fontRef idx="minor">
-            <a:schemeClr val="lt1"/>
-          </a:fontRef>
-        </p:style>
-        <p:txBody>
-          <a:bodyPr rtlCol="0" anchor="ctr"/>
-          <a:lstStyle/>
-          <a:p>
-            <a:pPr algn="ctr"/>
-          </a:p>
-        </p:txBody>
-      </p:sp>
-      <p:sp>
-        <p:nvSpPr>
-          <p:cNvPr id="8" name="Oval 7"/>
-          <p:cNvSpPr/>
-          <p:nvPr/>
-        </p:nvSpPr>
-        <p:spPr>
-          <a:xfrm>
-            <a:off x="1005840" y="2240280"/>
-            <a:ext cx="731520" cy="731520"/>
-          </a:xfrm>
-          <a:prstGeom prst="ellipse">
-            <a:avLst/>
-          </a:prstGeom>
-          <a:solidFill>
-            <a:srgbClr val="2A9D8F"/>
-          </a:solidFill>
-          <a:ln>
-            <a:noFill/>
-          </a:ln>
-          <a:effectLst/>
-        </p:spPr>
-        <p:style>
-          <a:lnRef idx="1">
-            <a:schemeClr val="accent1"/>
-          </a:lnRef>
-          <a:fillRef idx="3">
-            <a:schemeClr val="accent1"/>
-          </a:fillRef>
-          <a:effectRef idx="2">
-            <a:schemeClr val="accent1"/>
-          </a:effectRef>
-          <a:fontRef idx="minor">
-            <a:schemeClr val="lt1"/>
-          </a:fontRef>
-        </p:style>
-        <p:txBody>
-          <a:bodyPr rtlCol="0" anchor="ctr"/>
-          <a:lstStyle/>
-          <a:p>
-            <a:pPr algn="ctr"/>
-          </a:p>
-        </p:txBody>
-      </p:sp>
-      <p:sp>
-        <p:nvSpPr>
-          <p:cNvPr id="9" name="TextBox 8"/>
-          <p:cNvSpPr txBox="1"/>
-          <p:nvPr/>
-        </p:nvSpPr>
-        <p:spPr>
-          <a:xfrm>
-            <a:off x="1005840" y="2240280"/>
-            <a:ext cx="731520" cy="731520"/>
-          </a:xfrm>
-          <a:prstGeom prst="rect">
-            <a:avLst/>
-          </a:prstGeom>
-          <a:noFill/>
-        </p:spPr>
-        <p:txBody>
-          <a:bodyPr wrap="square" anchor="ctr" lIns="0" rIns="0" tIns="0" bIns="0">
-            <a:spAutoFit/>
-          </a:bodyPr>
-          <a:lstStyle/>
-          <a:p>
-            <a:pPr algn="ctr"/>
-            <a:r>
-              <a:rPr sz="3000" b="1" i="0">
-                <a:solidFill>
-                  <a:srgbClr val="FFFFFF"/>
-                </a:solidFill>
-                <a:latin typeface="Calibri"/>
-              </a:rPr>
-              <a:t>✓</a:t>
-            </a:r>
-          </a:p>
-        </p:txBody>
-      </p:sp>
-      <p:sp>
-        <p:nvSpPr>
-          <p:cNvPr id="10" name="TextBox 9"/>
-          <p:cNvSpPr txBox="1"/>
-          <p:nvPr/>
-        </p:nvSpPr>
-        <p:spPr>
-          <a:xfrm>
-            <a:off x="1920240" y="1828800"/>
-            <a:ext cx="9326880" cy="1554480"/>
-          </a:xfrm>
-          <a:prstGeom prst="rect">
-            <a:avLst/>
-          </a:prstGeom>
-          <a:noFill/>
-        </p:spPr>
-        <p:txBody>
-          <a:bodyPr wrap="square" anchor="ctr" lIns="0" rIns="0" tIns="0" bIns="0">
-            <a:spAutoFit/>
-          </a:bodyPr>
-          <a:lstStyle/>
-          <a:p>
-            <a:pPr algn="l"/>
-            <a:r>
-              <a:rPr sz="2200" b="1" i="0">
-                <a:solidFill>
-                  <a:srgbClr val="1D2433"/>
-                </a:solidFill>
-                <a:latin typeface="Calibri"/>
-              </a:rPr>
-              <a:t>B. Change the direction of the force</a:t>
-            </a:r>
-          </a:p>
-        </p:txBody>
-      </p:sp>
-      <p:sp>
-        <p:nvSpPr>
-          <p:cNvPr id="11" name="Rounded Rectangle 10"/>
-          <p:cNvSpPr/>
-          <p:nvPr/>
-        </p:nvSpPr>
-        <p:spPr>
-          <a:xfrm>
-            <a:off x="640080" y="3657600"/>
-            <a:ext cx="10881360" cy="2011680"/>
-          </a:xfrm>
-          <a:prstGeom prst="roundRect">
-            <a:avLst>
-              <a:gd name="adj" fmla="val 3000"/>
             </a:avLst>
           </a:prstGeom>
           <a:solidFill>
@@ -6248,68 +6088,840 @@
       </p:sp>
       <p:sp>
         <p:nvSpPr>
+          <p:cNvPr id="8" name="TextBox 7"/>
+          <p:cNvSpPr txBox="1"/>
+          <p:nvPr/>
+        </p:nvSpPr>
+        <p:spPr>
+          <a:xfrm>
+            <a:off x="1005840" y="1828800"/>
+            <a:ext cx="10149840" cy="1554480"/>
+          </a:xfrm>
+          <a:prstGeom prst="rect">
+            <a:avLst/>
+          </a:prstGeom>
+          <a:noFill/>
+        </p:spPr>
+        <p:txBody>
+          <a:bodyPr wrap="square" anchor="ctr" lIns="0" rIns="0" tIns="0" bIns="0">
+            <a:spAutoFit/>
+          </a:bodyPr>
+          <a:lstStyle/>
+          <a:p>
+            <a:pPr algn="l"/>
+            <a:r>
+              <a:rPr sz="1900" b="1" i="0">
+                <a:solidFill>
+                  <a:srgbClr val="1D2433"/>
+                </a:solidFill>
+                <a:latin typeface="Calibri"/>
+              </a:rPr>
+              <a:t>The main use of a single fixed pulley is to:</a:t>
+            </a:r>
+          </a:p>
+        </p:txBody>
+      </p:sp>
+      <p:sp>
+        <p:nvSpPr>
+          <p:cNvPr id="9" name="Rounded Rectangle 8"/>
+          <p:cNvSpPr/>
+          <p:nvPr/>
+        </p:nvSpPr>
+        <p:spPr>
+          <a:xfrm>
+            <a:off x="640080" y="3749039"/>
+            <a:ext cx="5349240" cy="868680"/>
+          </a:xfrm>
+          <a:prstGeom prst="roundRect">
+            <a:avLst>
+              <a:gd name="adj" fmla="val 12000"/>
+            </a:avLst>
+          </a:prstGeom>
+          <a:solidFill>
+            <a:srgbClr val="EAF1F4"/>
+          </a:solidFill>
+          <a:ln>
+            <a:noFill/>
+          </a:ln>
+          <a:effectLst/>
+        </p:spPr>
+        <p:style>
+          <a:lnRef idx="1">
+            <a:schemeClr val="accent1"/>
+          </a:lnRef>
+          <a:fillRef idx="3">
+            <a:schemeClr val="accent1"/>
+          </a:fillRef>
+          <a:effectRef idx="2">
+            <a:schemeClr val="accent1"/>
+          </a:effectRef>
+          <a:fontRef idx="minor">
+            <a:schemeClr val="lt1"/>
+          </a:fontRef>
+        </p:style>
+        <p:txBody>
+          <a:bodyPr rtlCol="0" anchor="ctr"/>
+          <a:lstStyle/>
+          <a:p>
+            <a:pPr algn="ctr"/>
+          </a:p>
+        </p:txBody>
+      </p:sp>
+      <p:sp>
+        <p:nvSpPr>
+          <p:cNvPr id="10" name="Oval 9"/>
+          <p:cNvSpPr/>
+          <p:nvPr/>
+        </p:nvSpPr>
+        <p:spPr>
+          <a:xfrm>
+            <a:off x="914400" y="3977639"/>
+            <a:ext cx="411480" cy="411480"/>
+          </a:xfrm>
+          <a:prstGeom prst="ellipse">
+            <a:avLst/>
+          </a:prstGeom>
+          <a:solidFill>
+            <a:srgbClr val="0A9396"/>
+          </a:solidFill>
+          <a:ln>
+            <a:noFill/>
+          </a:ln>
+          <a:effectLst/>
+        </p:spPr>
+        <p:style>
+          <a:lnRef idx="1">
+            <a:schemeClr val="accent1"/>
+          </a:lnRef>
+          <a:fillRef idx="3">
+            <a:schemeClr val="accent1"/>
+          </a:fillRef>
+          <a:effectRef idx="2">
+            <a:schemeClr val="accent1"/>
+          </a:effectRef>
+          <a:fontRef idx="minor">
+            <a:schemeClr val="lt1"/>
+          </a:fontRef>
+        </p:style>
+        <p:txBody>
+          <a:bodyPr rtlCol="0" anchor="ctr"/>
+          <a:lstStyle/>
+          <a:p>
+            <a:pPr algn="ctr"/>
+          </a:p>
+        </p:txBody>
+      </p:sp>
+      <p:sp>
+        <p:nvSpPr>
+          <p:cNvPr id="11" name="TextBox 10"/>
+          <p:cNvSpPr txBox="1"/>
+          <p:nvPr/>
+        </p:nvSpPr>
+        <p:spPr>
+          <a:xfrm>
+            <a:off x="914400" y="3977639"/>
+            <a:ext cx="411480" cy="411480"/>
+          </a:xfrm>
+          <a:prstGeom prst="rect">
+            <a:avLst/>
+          </a:prstGeom>
+          <a:noFill/>
+        </p:spPr>
+        <p:txBody>
+          <a:bodyPr wrap="square" anchor="ctr" lIns="0" rIns="0" tIns="0" bIns="0">
+            <a:spAutoFit/>
+          </a:bodyPr>
+          <a:lstStyle/>
+          <a:p>
+            <a:pPr algn="ctr"/>
+            <a:r>
+              <a:rPr sz="1400" b="1" i="0">
+                <a:solidFill>
+                  <a:srgbClr val="FFFFFF"/>
+                </a:solidFill>
+                <a:latin typeface="Calibri"/>
+              </a:rPr>
+              <a:t>A</a:t>
+            </a:r>
+          </a:p>
+        </p:txBody>
+      </p:sp>
+      <p:sp>
+        <p:nvSpPr>
           <p:cNvPr id="12" name="TextBox 11"/>
           <p:cNvSpPr txBox="1"/>
           <p:nvPr/>
         </p:nvSpPr>
         <p:spPr>
           <a:xfrm>
-            <a:off x="1005840" y="3886200"/>
-            <a:ext cx="4572000" cy="365760"/>
-          </a:xfrm>
-          <a:prstGeom prst="rect">
-            <a:avLst/>
-          </a:prstGeom>
-          <a:noFill/>
-        </p:spPr>
-        <p:txBody>
-          <a:bodyPr wrap="square" anchor="t" lIns="0" rIns="0" tIns="0" bIns="0">
+            <a:off x="1508760" y="3749039"/>
+            <a:ext cx="3840480" cy="868680"/>
+          </a:xfrm>
+          <a:prstGeom prst="rect">
+            <a:avLst/>
+          </a:prstGeom>
+          <a:noFill/>
+        </p:spPr>
+        <p:txBody>
+          <a:bodyPr wrap="square" anchor="ctr" lIns="0" rIns="0" tIns="0" bIns="0">
             <a:spAutoFit/>
           </a:bodyPr>
           <a:lstStyle/>
           <a:p>
             <a:pPr algn="l"/>
             <a:r>
+              <a:rPr sz="1450" b="0" i="0">
+                <a:solidFill>
+                  <a:srgbClr val="1D2433"/>
+                </a:solidFill>
+                <a:latin typeface="Calibri"/>
+              </a:rPr>
+              <a:t>Halve the effort</a:t>
+            </a:r>
+          </a:p>
+        </p:txBody>
+      </p:sp>
+      <p:sp>
+        <p:nvSpPr>
+          <p:cNvPr id="13" name="Rounded Rectangle 12"/>
+          <p:cNvSpPr/>
+          <p:nvPr/>
+        </p:nvSpPr>
+        <p:spPr>
+          <a:xfrm>
+            <a:off x="6172200" y="3749039"/>
+            <a:ext cx="5349240" cy="868680"/>
+          </a:xfrm>
+          <a:prstGeom prst="roundRect">
+            <a:avLst>
+              <a:gd name="adj" fmla="val 12000"/>
+            </a:avLst>
+          </a:prstGeom>
+          <a:solidFill>
+            <a:srgbClr val="E9F5F0"/>
+          </a:solidFill>
+          <a:ln w="31750">
+            <a:solidFill>
+              <a:srgbClr val="2A9D8F"/>
+            </a:solidFill>
+          </a:ln>
+          <a:effectLst/>
+        </p:spPr>
+        <p:style>
+          <a:lnRef idx="1">
+            <a:schemeClr val="accent1"/>
+          </a:lnRef>
+          <a:fillRef idx="3">
+            <a:schemeClr val="accent1"/>
+          </a:fillRef>
+          <a:effectRef idx="2">
+            <a:schemeClr val="accent1"/>
+          </a:effectRef>
+          <a:fontRef idx="minor">
+            <a:schemeClr val="lt1"/>
+          </a:fontRef>
+        </p:style>
+        <p:txBody>
+          <a:bodyPr rtlCol="0" anchor="ctr"/>
+          <a:lstStyle/>
+          <a:p>
+            <a:pPr algn="ctr"/>
+          </a:p>
+        </p:txBody>
+      </p:sp>
+      <p:sp>
+        <p:nvSpPr>
+          <p:cNvPr id="14" name="Oval 13"/>
+          <p:cNvSpPr/>
+          <p:nvPr/>
+        </p:nvSpPr>
+        <p:spPr>
+          <a:xfrm>
+            <a:off x="6446520" y="3977639"/>
+            <a:ext cx="411480" cy="411480"/>
+          </a:xfrm>
+          <a:prstGeom prst="ellipse">
+            <a:avLst/>
+          </a:prstGeom>
+          <a:solidFill>
+            <a:srgbClr val="2A9D8F"/>
+          </a:solidFill>
+          <a:ln>
+            <a:noFill/>
+          </a:ln>
+          <a:effectLst/>
+        </p:spPr>
+        <p:style>
+          <a:lnRef idx="1">
+            <a:schemeClr val="accent1"/>
+          </a:lnRef>
+          <a:fillRef idx="3">
+            <a:schemeClr val="accent1"/>
+          </a:fillRef>
+          <a:effectRef idx="2">
+            <a:schemeClr val="accent1"/>
+          </a:effectRef>
+          <a:fontRef idx="minor">
+            <a:schemeClr val="lt1"/>
+          </a:fontRef>
+        </p:style>
+        <p:txBody>
+          <a:bodyPr rtlCol="0" anchor="ctr"/>
+          <a:lstStyle/>
+          <a:p>
+            <a:pPr algn="ctr"/>
+          </a:p>
+        </p:txBody>
+      </p:sp>
+      <p:sp>
+        <p:nvSpPr>
+          <p:cNvPr id="15" name="TextBox 14"/>
+          <p:cNvSpPr txBox="1"/>
+          <p:nvPr/>
+        </p:nvSpPr>
+        <p:spPr>
+          <a:xfrm>
+            <a:off x="6446520" y="3977639"/>
+            <a:ext cx="411480" cy="411480"/>
+          </a:xfrm>
+          <a:prstGeom prst="rect">
+            <a:avLst/>
+          </a:prstGeom>
+          <a:noFill/>
+        </p:spPr>
+        <p:txBody>
+          <a:bodyPr wrap="square" anchor="ctr" lIns="0" rIns="0" tIns="0" bIns="0">
+            <a:spAutoFit/>
+          </a:bodyPr>
+          <a:lstStyle/>
+          <a:p>
+            <a:pPr algn="ctr"/>
+            <a:r>
               <a:rPr sz="1400" b="1" i="0">
                 <a:solidFill>
+                  <a:srgbClr val="FFFFFF"/>
+                </a:solidFill>
+                <a:latin typeface="Calibri"/>
+              </a:rPr>
+              <a:t>B</a:t>
+            </a:r>
+          </a:p>
+        </p:txBody>
+      </p:sp>
+      <p:sp>
+        <p:nvSpPr>
+          <p:cNvPr id="16" name="TextBox 15"/>
+          <p:cNvSpPr txBox="1"/>
+          <p:nvPr/>
+        </p:nvSpPr>
+        <p:spPr>
+          <a:xfrm>
+            <a:off x="7040880" y="3749039"/>
+            <a:ext cx="3840480" cy="868680"/>
+          </a:xfrm>
+          <a:prstGeom prst="rect">
+            <a:avLst/>
+          </a:prstGeom>
+          <a:noFill/>
+        </p:spPr>
+        <p:txBody>
+          <a:bodyPr wrap="square" anchor="ctr" lIns="0" rIns="0" tIns="0" bIns="0">
+            <a:spAutoFit/>
+          </a:bodyPr>
+          <a:lstStyle/>
+          <a:p>
+            <a:pPr algn="l"/>
+            <a:r>
+              <a:rPr sz="1450" b="1" i="0">
+                <a:solidFill>
+                  <a:srgbClr val="1D2433"/>
+                </a:solidFill>
+                <a:latin typeface="Calibri"/>
+              </a:rPr>
+              <a:t>Change the direction of the force</a:t>
+            </a:r>
+          </a:p>
+        </p:txBody>
+      </p:sp>
+      <p:sp>
+        <p:nvSpPr>
+          <p:cNvPr id="17" name="Oval 16"/>
+          <p:cNvSpPr/>
+          <p:nvPr/>
+        </p:nvSpPr>
+        <p:spPr>
+          <a:xfrm>
+            <a:off x="10972800" y="3995927"/>
+            <a:ext cx="365760" cy="365760"/>
+          </a:xfrm>
+          <a:prstGeom prst="ellipse">
+            <a:avLst/>
+          </a:prstGeom>
+          <a:solidFill>
+            <a:srgbClr val="2A9D8F"/>
+          </a:solidFill>
+          <a:ln>
+            <a:noFill/>
+          </a:ln>
+          <a:effectLst/>
+        </p:spPr>
+        <p:style>
+          <a:lnRef idx="1">
+            <a:schemeClr val="accent1"/>
+          </a:lnRef>
+          <a:fillRef idx="3">
+            <a:schemeClr val="accent1"/>
+          </a:fillRef>
+          <a:effectRef idx="2">
+            <a:schemeClr val="accent1"/>
+          </a:effectRef>
+          <a:fontRef idx="minor">
+            <a:schemeClr val="lt1"/>
+          </a:fontRef>
+        </p:style>
+        <p:txBody>
+          <a:bodyPr rtlCol="0" anchor="ctr"/>
+          <a:lstStyle/>
+          <a:p>
+            <a:pPr algn="ctr"/>
+          </a:p>
+        </p:txBody>
+      </p:sp>
+      <p:sp>
+        <p:nvSpPr>
+          <p:cNvPr id="18" name="TextBox 17"/>
+          <p:cNvSpPr txBox="1"/>
+          <p:nvPr/>
+        </p:nvSpPr>
+        <p:spPr>
+          <a:xfrm>
+            <a:off x="10972800" y="3950207"/>
+            <a:ext cx="365760" cy="365760"/>
+          </a:xfrm>
+          <a:prstGeom prst="rect">
+            <a:avLst/>
+          </a:prstGeom>
+          <a:noFill/>
+        </p:spPr>
+        <p:txBody>
+          <a:bodyPr wrap="square" anchor="ctr" lIns="0" rIns="0" tIns="0" bIns="0">
+            <a:spAutoFit/>
+          </a:bodyPr>
+          <a:lstStyle/>
+          <a:p>
+            <a:pPr algn="ctr"/>
+            <a:r>
+              <a:rPr sz="1600" b="1" i="0">
+                <a:solidFill>
+                  <a:srgbClr val="FFFFFF"/>
+                </a:solidFill>
+                <a:latin typeface="Calibri"/>
+              </a:rPr>
+              <a:t>✓</a:t>
+            </a:r>
+          </a:p>
+        </p:txBody>
+      </p:sp>
+      <p:sp>
+        <p:nvSpPr>
+          <p:cNvPr id="19" name="Rounded Rectangle 18"/>
+          <p:cNvSpPr/>
+          <p:nvPr/>
+        </p:nvSpPr>
+        <p:spPr>
+          <a:xfrm>
+            <a:off x="640080" y="4782312"/>
+            <a:ext cx="5349240" cy="868680"/>
+          </a:xfrm>
+          <a:prstGeom prst="roundRect">
+            <a:avLst>
+              <a:gd name="adj" fmla="val 12000"/>
+            </a:avLst>
+          </a:prstGeom>
+          <a:solidFill>
+            <a:srgbClr val="EAF1F4"/>
+          </a:solidFill>
+          <a:ln>
+            <a:noFill/>
+          </a:ln>
+          <a:effectLst/>
+        </p:spPr>
+        <p:style>
+          <a:lnRef idx="1">
+            <a:schemeClr val="accent1"/>
+          </a:lnRef>
+          <a:fillRef idx="3">
+            <a:schemeClr val="accent1"/>
+          </a:fillRef>
+          <a:effectRef idx="2">
+            <a:schemeClr val="accent1"/>
+          </a:effectRef>
+          <a:fontRef idx="minor">
+            <a:schemeClr val="lt1"/>
+          </a:fontRef>
+        </p:style>
+        <p:txBody>
+          <a:bodyPr rtlCol="0" anchor="ctr"/>
+          <a:lstStyle/>
+          <a:p>
+            <a:pPr algn="ctr"/>
+          </a:p>
+        </p:txBody>
+      </p:sp>
+      <p:sp>
+        <p:nvSpPr>
+          <p:cNvPr id="20" name="Oval 19"/>
+          <p:cNvSpPr/>
+          <p:nvPr/>
+        </p:nvSpPr>
+        <p:spPr>
+          <a:xfrm>
+            <a:off x="914400" y="5010912"/>
+            <a:ext cx="411480" cy="411480"/>
+          </a:xfrm>
+          <a:prstGeom prst="ellipse">
+            <a:avLst/>
+          </a:prstGeom>
+          <a:solidFill>
+            <a:srgbClr val="0A9396"/>
+          </a:solidFill>
+          <a:ln>
+            <a:noFill/>
+          </a:ln>
+          <a:effectLst/>
+        </p:spPr>
+        <p:style>
+          <a:lnRef idx="1">
+            <a:schemeClr val="accent1"/>
+          </a:lnRef>
+          <a:fillRef idx="3">
+            <a:schemeClr val="accent1"/>
+          </a:fillRef>
+          <a:effectRef idx="2">
+            <a:schemeClr val="accent1"/>
+          </a:effectRef>
+          <a:fontRef idx="minor">
+            <a:schemeClr val="lt1"/>
+          </a:fontRef>
+        </p:style>
+        <p:txBody>
+          <a:bodyPr rtlCol="0" anchor="ctr"/>
+          <a:lstStyle/>
+          <a:p>
+            <a:pPr algn="ctr"/>
+          </a:p>
+        </p:txBody>
+      </p:sp>
+      <p:sp>
+        <p:nvSpPr>
+          <p:cNvPr id="21" name="TextBox 20"/>
+          <p:cNvSpPr txBox="1"/>
+          <p:nvPr/>
+        </p:nvSpPr>
+        <p:spPr>
+          <a:xfrm>
+            <a:off x="914400" y="5010912"/>
+            <a:ext cx="411480" cy="411480"/>
+          </a:xfrm>
+          <a:prstGeom prst="rect">
+            <a:avLst/>
+          </a:prstGeom>
+          <a:noFill/>
+        </p:spPr>
+        <p:txBody>
+          <a:bodyPr wrap="square" anchor="ctr" lIns="0" rIns="0" tIns="0" bIns="0">
+            <a:spAutoFit/>
+          </a:bodyPr>
+          <a:lstStyle/>
+          <a:p>
+            <a:pPr algn="ctr"/>
+            <a:r>
+              <a:rPr sz="1400" b="1" i="0">
+                <a:solidFill>
+                  <a:srgbClr val="FFFFFF"/>
+                </a:solidFill>
+                <a:latin typeface="Calibri"/>
+              </a:rPr>
+              <a:t>C</a:t>
+            </a:r>
+          </a:p>
+        </p:txBody>
+      </p:sp>
+      <p:sp>
+        <p:nvSpPr>
+          <p:cNvPr id="22" name="TextBox 21"/>
+          <p:cNvSpPr txBox="1"/>
+          <p:nvPr/>
+        </p:nvSpPr>
+        <p:spPr>
+          <a:xfrm>
+            <a:off x="1508760" y="4782312"/>
+            <a:ext cx="3840480" cy="868680"/>
+          </a:xfrm>
+          <a:prstGeom prst="rect">
+            <a:avLst/>
+          </a:prstGeom>
+          <a:noFill/>
+        </p:spPr>
+        <p:txBody>
+          <a:bodyPr wrap="square" anchor="ctr" lIns="0" rIns="0" tIns="0" bIns="0">
+            <a:spAutoFit/>
+          </a:bodyPr>
+          <a:lstStyle/>
+          <a:p>
+            <a:pPr algn="l"/>
+            <a:r>
+              <a:rPr sz="1450" b="0" i="0">
+                <a:solidFill>
+                  <a:srgbClr val="1D2433"/>
+                </a:solidFill>
+                <a:latin typeface="Calibri"/>
+              </a:rPr>
+              <a:t>Double the load</a:t>
+            </a:r>
+          </a:p>
+        </p:txBody>
+      </p:sp>
+      <p:sp>
+        <p:nvSpPr>
+          <p:cNvPr id="23" name="Rounded Rectangle 22"/>
+          <p:cNvSpPr/>
+          <p:nvPr/>
+        </p:nvSpPr>
+        <p:spPr>
+          <a:xfrm>
+            <a:off x="6172200" y="4782312"/>
+            <a:ext cx="5349240" cy="868680"/>
+          </a:xfrm>
+          <a:prstGeom prst="roundRect">
+            <a:avLst>
+              <a:gd name="adj" fmla="val 12000"/>
+            </a:avLst>
+          </a:prstGeom>
+          <a:solidFill>
+            <a:srgbClr val="EAF1F4"/>
+          </a:solidFill>
+          <a:ln>
+            <a:noFill/>
+          </a:ln>
+          <a:effectLst/>
+        </p:spPr>
+        <p:style>
+          <a:lnRef idx="1">
+            <a:schemeClr val="accent1"/>
+          </a:lnRef>
+          <a:fillRef idx="3">
+            <a:schemeClr val="accent1"/>
+          </a:fillRef>
+          <a:effectRef idx="2">
+            <a:schemeClr val="accent1"/>
+          </a:effectRef>
+          <a:fontRef idx="minor">
+            <a:schemeClr val="lt1"/>
+          </a:fontRef>
+        </p:style>
+        <p:txBody>
+          <a:bodyPr rtlCol="0" anchor="ctr"/>
+          <a:lstStyle/>
+          <a:p>
+            <a:pPr algn="ctr"/>
+          </a:p>
+        </p:txBody>
+      </p:sp>
+      <p:sp>
+        <p:nvSpPr>
+          <p:cNvPr id="24" name="Oval 23"/>
+          <p:cNvSpPr/>
+          <p:nvPr/>
+        </p:nvSpPr>
+        <p:spPr>
+          <a:xfrm>
+            <a:off x="6446520" y="5010912"/>
+            <a:ext cx="411480" cy="411480"/>
+          </a:xfrm>
+          <a:prstGeom prst="ellipse">
+            <a:avLst/>
+          </a:prstGeom>
+          <a:solidFill>
+            <a:srgbClr val="0A9396"/>
+          </a:solidFill>
+          <a:ln>
+            <a:noFill/>
+          </a:ln>
+          <a:effectLst/>
+        </p:spPr>
+        <p:style>
+          <a:lnRef idx="1">
+            <a:schemeClr val="accent1"/>
+          </a:lnRef>
+          <a:fillRef idx="3">
+            <a:schemeClr val="accent1"/>
+          </a:fillRef>
+          <a:effectRef idx="2">
+            <a:schemeClr val="accent1"/>
+          </a:effectRef>
+          <a:fontRef idx="minor">
+            <a:schemeClr val="lt1"/>
+          </a:fontRef>
+        </p:style>
+        <p:txBody>
+          <a:bodyPr rtlCol="0" anchor="ctr"/>
+          <a:lstStyle/>
+          <a:p>
+            <a:pPr algn="ctr"/>
+          </a:p>
+        </p:txBody>
+      </p:sp>
+      <p:sp>
+        <p:nvSpPr>
+          <p:cNvPr id="25" name="TextBox 24"/>
+          <p:cNvSpPr txBox="1"/>
+          <p:nvPr/>
+        </p:nvSpPr>
+        <p:spPr>
+          <a:xfrm>
+            <a:off x="6446520" y="5010912"/>
+            <a:ext cx="411480" cy="411480"/>
+          </a:xfrm>
+          <a:prstGeom prst="rect">
+            <a:avLst/>
+          </a:prstGeom>
+          <a:noFill/>
+        </p:spPr>
+        <p:txBody>
+          <a:bodyPr wrap="square" anchor="ctr" lIns="0" rIns="0" tIns="0" bIns="0">
+            <a:spAutoFit/>
+          </a:bodyPr>
+          <a:lstStyle/>
+          <a:p>
+            <a:pPr algn="ctr"/>
+            <a:r>
+              <a:rPr sz="1400" b="1" i="0">
+                <a:solidFill>
+                  <a:srgbClr val="FFFFFF"/>
+                </a:solidFill>
+                <a:latin typeface="Calibri"/>
+              </a:rPr>
+              <a:t>D</a:t>
+            </a:r>
+          </a:p>
+        </p:txBody>
+      </p:sp>
+      <p:sp>
+        <p:nvSpPr>
+          <p:cNvPr id="26" name="TextBox 25"/>
+          <p:cNvSpPr txBox="1"/>
+          <p:nvPr/>
+        </p:nvSpPr>
+        <p:spPr>
+          <a:xfrm>
+            <a:off x="7040880" y="4782312"/>
+            <a:ext cx="3840480" cy="868680"/>
+          </a:xfrm>
+          <a:prstGeom prst="rect">
+            <a:avLst/>
+          </a:prstGeom>
+          <a:noFill/>
+        </p:spPr>
+        <p:txBody>
+          <a:bodyPr wrap="square" anchor="ctr" lIns="0" rIns="0" tIns="0" bIns="0">
+            <a:spAutoFit/>
+          </a:bodyPr>
+          <a:lstStyle/>
+          <a:p>
+            <a:pPr algn="l"/>
+            <a:r>
+              <a:rPr sz="1450" b="0" i="0">
+                <a:solidFill>
+                  <a:srgbClr val="1D2433"/>
+                </a:solidFill>
+                <a:latin typeface="Calibri"/>
+              </a:rPr>
+              <a:t>Increase the speed</a:t>
+            </a:r>
+          </a:p>
+        </p:txBody>
+      </p:sp>
+      <p:sp>
+        <p:nvSpPr>
+          <p:cNvPr id="27" name="Rounded Rectangle 26"/>
+          <p:cNvSpPr/>
+          <p:nvPr/>
+        </p:nvSpPr>
+        <p:spPr>
+          <a:xfrm>
+            <a:off x="640080" y="5779008"/>
+            <a:ext cx="10881360" cy="566928"/>
+          </a:xfrm>
+          <a:prstGeom prst="roundRect">
+            <a:avLst>
+              <a:gd name="adj" fmla="val 10000"/>
+            </a:avLst>
+          </a:prstGeom>
+          <a:solidFill>
+            <a:srgbClr val="EEF2F7"/>
+          </a:solidFill>
+          <a:ln>
+            <a:noFill/>
+          </a:ln>
+          <a:effectLst/>
+        </p:spPr>
+        <p:style>
+          <a:lnRef idx="1">
+            <a:schemeClr val="accent1"/>
+          </a:lnRef>
+          <a:fillRef idx="3">
+            <a:schemeClr val="accent1"/>
+          </a:fillRef>
+          <a:effectRef idx="2">
+            <a:schemeClr val="accent1"/>
+          </a:effectRef>
+          <a:fontRef idx="minor">
+            <a:schemeClr val="lt1"/>
+          </a:fontRef>
+        </p:style>
+        <p:txBody>
+          <a:bodyPr rtlCol="0" anchor="ctr"/>
+          <a:lstStyle/>
+          <a:p>
+            <a:pPr algn="ctr"/>
+          </a:p>
+        </p:txBody>
+      </p:sp>
+      <p:sp>
+        <p:nvSpPr>
+          <p:cNvPr id="28" name="TextBox 27"/>
+          <p:cNvSpPr txBox="1"/>
+          <p:nvPr/>
+        </p:nvSpPr>
+        <p:spPr>
+          <a:xfrm>
+            <a:off x="914400" y="5779008"/>
+            <a:ext cx="10332720" cy="566928"/>
+          </a:xfrm>
+          <a:prstGeom prst="rect">
+            <a:avLst/>
+          </a:prstGeom>
+          <a:noFill/>
+        </p:spPr>
+        <p:txBody>
+          <a:bodyPr wrap="square" anchor="ctr" lIns="0" rIns="0" tIns="0" bIns="0">
+            <a:spAutoFit/>
+          </a:bodyPr>
+          <a:lstStyle/>
+          <a:p>
+            <a:pPr algn="l"/>
+            <a:r>
+              <a:rPr sz="1250" b="1" i="0">
+                <a:solidFill>
                   <a:srgbClr val="2A9D8F"/>
                 </a:solidFill>
                 <a:latin typeface="Arial"/>
               </a:rPr>
-              <a:t>WHY</a:t>
-            </a:r>
-          </a:p>
-        </p:txBody>
-      </p:sp>
-      <p:sp>
-        <p:nvSpPr>
-          <p:cNvPr id="13" name="TextBox 12"/>
-          <p:cNvSpPr txBox="1"/>
-          <p:nvPr/>
-        </p:nvSpPr>
-        <p:spPr>
-          <a:xfrm>
-            <a:off x="1005840" y="4297680"/>
-            <a:ext cx="10149840" cy="1280160"/>
-          </a:xfrm>
-          <a:prstGeom prst="rect">
-            <a:avLst/>
-          </a:prstGeom>
-          <a:noFill/>
-        </p:spPr>
-        <p:txBody>
-          <a:bodyPr wrap="square" anchor="t" lIns="0" rIns="0" tIns="0" bIns="0">
-            <a:spAutoFit/>
-          </a:bodyPr>
-          <a:lstStyle/>
-          <a:p>
-            <a:pPr algn="l">
-              <a:lnSpc>
-                <a:spcPct val="110000"/>
-              </a:lnSpc>
-            </a:pPr>
-            <a:r>
-              <a:rPr sz="1600" b="0" i="0">
+              <a:t>Why  </a:t>
+            </a:r>
+            <a:r>
+              <a:rPr sz="1200" b="0" i="0">
                 <a:solidFill>
                   <a:srgbClr val="1D2433"/>
                 </a:solidFill>
@@ -6455,7 +7067,7 @@
                 </a:solidFill>
                 <a:latin typeface="Calibri"/>
               </a:rPr>
-              <a:t>Q2 — Movable pulley</a:t>
+              <a:t>Q2 - Movable pulley</a:t>
             </a:r>
           </a:p>
         </p:txBody>
@@ -6751,7 +7363,7 @@
         <p:spPr>
           <a:xfrm>
             <a:off x="1508760" y="3749039"/>
-            <a:ext cx="4297680" cy="868680"/>
+            <a:ext cx="3840480" cy="868680"/>
           </a:xfrm>
           <a:prstGeom prst="rect">
             <a:avLst/>
@@ -6911,7 +7523,7 @@
         <p:spPr>
           <a:xfrm>
             <a:off x="7040880" y="3749039"/>
-            <a:ext cx="4297680" cy="868680"/>
+            <a:ext cx="3840480" cy="868680"/>
           </a:xfrm>
           <a:prstGeom prst="rect">
             <a:avLst/>
@@ -7071,7 +7683,7 @@
         <p:spPr>
           <a:xfrm>
             <a:off x="1508760" y="4782312"/>
-            <a:ext cx="4297680" cy="868680"/>
+            <a:ext cx="3840480" cy="868680"/>
           </a:xfrm>
           <a:prstGeom prst="rect">
             <a:avLst/>
@@ -7231,7 +7843,7 @@
         <p:spPr>
           <a:xfrm>
             <a:off x="7040880" y="4782312"/>
-            <a:ext cx="4297680" cy="868680"/>
+            <a:ext cx="3840480" cy="868680"/>
           </a:xfrm>
           <a:prstGeom prst="rect">
             <a:avLst/>
@@ -7298,7 +7910,7 @@
             <a:avLst/>
           </a:prstGeom>
           <a:solidFill>
-            <a:srgbClr val="2A9D8F"/>
+            <a:srgbClr val="0A9396"/>
           </a:solidFill>
           <a:ln>
             <a:noFill/>
@@ -7353,11 +7965,11 @@
             <a:r>
               <a:rPr sz="1300" b="1" i="0">
                 <a:solidFill>
-                  <a:srgbClr val="2A9D8F"/>
+                  <a:srgbClr val="0A9396"/>
                 </a:solidFill>
                 <a:latin typeface="Arial"/>
               </a:rPr>
-              <a:t>ANSWER REVEAL</a:t>
+              <a:t>QUIZ QUESTION</a:t>
             </a:r>
           </a:p>
         </p:txBody>
@@ -7392,7 +8004,7 @@
                 </a:solidFill>
                 <a:latin typeface="Calibri"/>
               </a:rPr>
-              <a:t>Q2 — Answer</a:t>
+              <a:t>Q2 - Movable pulley</a:t>
             </a:r>
           </a:p>
         </p:txBody>
@@ -7481,166 +8093,6 @@
           <a:prstGeom prst="roundRect">
             <a:avLst>
               <a:gd name="adj" fmla="val 4000"/>
-            </a:avLst>
-          </a:prstGeom>
-          <a:solidFill>
-            <a:srgbClr val="E9F5F0"/>
-          </a:solidFill>
-          <a:ln>
-            <a:noFill/>
-          </a:ln>
-          <a:effectLst/>
-        </p:spPr>
-        <p:style>
-          <a:lnRef idx="1">
-            <a:schemeClr val="accent1"/>
-          </a:lnRef>
-          <a:fillRef idx="3">
-            <a:schemeClr val="accent1"/>
-          </a:fillRef>
-          <a:effectRef idx="2">
-            <a:schemeClr val="accent1"/>
-          </a:effectRef>
-          <a:fontRef idx="minor">
-            <a:schemeClr val="lt1"/>
-          </a:fontRef>
-        </p:style>
-        <p:txBody>
-          <a:bodyPr rtlCol="0" anchor="ctr"/>
-          <a:lstStyle/>
-          <a:p>
-            <a:pPr algn="ctr"/>
-          </a:p>
-        </p:txBody>
-      </p:sp>
-      <p:sp>
-        <p:nvSpPr>
-          <p:cNvPr id="8" name="Oval 7"/>
-          <p:cNvSpPr/>
-          <p:nvPr/>
-        </p:nvSpPr>
-        <p:spPr>
-          <a:xfrm>
-            <a:off x="1005840" y="2240280"/>
-            <a:ext cx="731520" cy="731520"/>
-          </a:xfrm>
-          <a:prstGeom prst="ellipse">
-            <a:avLst/>
-          </a:prstGeom>
-          <a:solidFill>
-            <a:srgbClr val="2A9D8F"/>
-          </a:solidFill>
-          <a:ln>
-            <a:noFill/>
-          </a:ln>
-          <a:effectLst/>
-        </p:spPr>
-        <p:style>
-          <a:lnRef idx="1">
-            <a:schemeClr val="accent1"/>
-          </a:lnRef>
-          <a:fillRef idx="3">
-            <a:schemeClr val="accent1"/>
-          </a:fillRef>
-          <a:effectRef idx="2">
-            <a:schemeClr val="accent1"/>
-          </a:effectRef>
-          <a:fontRef idx="minor">
-            <a:schemeClr val="lt1"/>
-          </a:fontRef>
-        </p:style>
-        <p:txBody>
-          <a:bodyPr rtlCol="0" anchor="ctr"/>
-          <a:lstStyle/>
-          <a:p>
-            <a:pPr algn="ctr"/>
-          </a:p>
-        </p:txBody>
-      </p:sp>
-      <p:sp>
-        <p:nvSpPr>
-          <p:cNvPr id="9" name="TextBox 8"/>
-          <p:cNvSpPr txBox="1"/>
-          <p:nvPr/>
-        </p:nvSpPr>
-        <p:spPr>
-          <a:xfrm>
-            <a:off x="1005840" y="2240280"/>
-            <a:ext cx="731520" cy="731520"/>
-          </a:xfrm>
-          <a:prstGeom prst="rect">
-            <a:avLst/>
-          </a:prstGeom>
-          <a:noFill/>
-        </p:spPr>
-        <p:txBody>
-          <a:bodyPr wrap="square" anchor="ctr" lIns="0" rIns="0" tIns="0" bIns="0">
-            <a:spAutoFit/>
-          </a:bodyPr>
-          <a:lstStyle/>
-          <a:p>
-            <a:pPr algn="ctr"/>
-            <a:r>
-              <a:rPr sz="3000" b="1" i="0">
-                <a:solidFill>
-                  <a:srgbClr val="FFFFFF"/>
-                </a:solidFill>
-                <a:latin typeface="Calibri"/>
-              </a:rPr>
-              <a:t>✓</a:t>
-            </a:r>
-          </a:p>
-        </p:txBody>
-      </p:sp>
-      <p:sp>
-        <p:nvSpPr>
-          <p:cNvPr id="10" name="TextBox 9"/>
-          <p:cNvSpPr txBox="1"/>
-          <p:nvPr/>
-        </p:nvSpPr>
-        <p:spPr>
-          <a:xfrm>
-            <a:off x="1920240" y="1828800"/>
-            <a:ext cx="9326880" cy="1554480"/>
-          </a:xfrm>
-          <a:prstGeom prst="rect">
-            <a:avLst/>
-          </a:prstGeom>
-          <a:noFill/>
-        </p:spPr>
-        <p:txBody>
-          <a:bodyPr wrap="square" anchor="ctr" lIns="0" rIns="0" tIns="0" bIns="0">
-            <a:spAutoFit/>
-          </a:bodyPr>
-          <a:lstStyle/>
-          <a:p>
-            <a:pPr algn="l"/>
-            <a:r>
-              <a:rPr sz="2200" b="1" i="0">
-                <a:solidFill>
-                  <a:srgbClr val="1D2433"/>
-                </a:solidFill>
-                <a:latin typeface="Calibri"/>
-              </a:rPr>
-              <a:t>B. 2</a:t>
-            </a:r>
-          </a:p>
-        </p:txBody>
-      </p:sp>
-      <p:sp>
-        <p:nvSpPr>
-          <p:cNvPr id="11" name="Rounded Rectangle 10"/>
-          <p:cNvSpPr/>
-          <p:nvPr/>
-        </p:nvSpPr>
-        <p:spPr>
-          <a:xfrm>
-            <a:off x="640080" y="3657600"/>
-            <a:ext cx="10881360" cy="2011680"/>
-          </a:xfrm>
-          <a:prstGeom prst="roundRect">
-            <a:avLst>
-              <a:gd name="adj" fmla="val 3000"/>
             </a:avLst>
           </a:prstGeom>
           <a:solidFill>
@@ -7681,68 +8133,840 @@
       </p:sp>
       <p:sp>
         <p:nvSpPr>
+          <p:cNvPr id="8" name="TextBox 7"/>
+          <p:cNvSpPr txBox="1"/>
+          <p:nvPr/>
+        </p:nvSpPr>
+        <p:spPr>
+          <a:xfrm>
+            <a:off x="1005840" y="1828800"/>
+            <a:ext cx="10149840" cy="1554480"/>
+          </a:xfrm>
+          <a:prstGeom prst="rect">
+            <a:avLst/>
+          </a:prstGeom>
+          <a:noFill/>
+        </p:spPr>
+        <p:txBody>
+          <a:bodyPr wrap="square" anchor="ctr" lIns="0" rIns="0" tIns="0" bIns="0">
+            <a:spAutoFit/>
+          </a:bodyPr>
+          <a:lstStyle/>
+          <a:p>
+            <a:pPr algn="l"/>
+            <a:r>
+              <a:rPr sz="1900" b="1" i="0">
+                <a:solidFill>
+                  <a:srgbClr val="1D2433"/>
+                </a:solidFill>
+                <a:latin typeface="Calibri"/>
+              </a:rPr>
+              <a:t>The ideal mechanical advantage of a single movable pulley is:</a:t>
+            </a:r>
+          </a:p>
+        </p:txBody>
+      </p:sp>
+      <p:sp>
+        <p:nvSpPr>
+          <p:cNvPr id="9" name="Rounded Rectangle 8"/>
+          <p:cNvSpPr/>
+          <p:nvPr/>
+        </p:nvSpPr>
+        <p:spPr>
+          <a:xfrm>
+            <a:off x="640080" y="3749039"/>
+            <a:ext cx="5349240" cy="868680"/>
+          </a:xfrm>
+          <a:prstGeom prst="roundRect">
+            <a:avLst>
+              <a:gd name="adj" fmla="val 12000"/>
+            </a:avLst>
+          </a:prstGeom>
+          <a:solidFill>
+            <a:srgbClr val="EAF1F4"/>
+          </a:solidFill>
+          <a:ln>
+            <a:noFill/>
+          </a:ln>
+          <a:effectLst/>
+        </p:spPr>
+        <p:style>
+          <a:lnRef idx="1">
+            <a:schemeClr val="accent1"/>
+          </a:lnRef>
+          <a:fillRef idx="3">
+            <a:schemeClr val="accent1"/>
+          </a:fillRef>
+          <a:effectRef idx="2">
+            <a:schemeClr val="accent1"/>
+          </a:effectRef>
+          <a:fontRef idx="minor">
+            <a:schemeClr val="lt1"/>
+          </a:fontRef>
+        </p:style>
+        <p:txBody>
+          <a:bodyPr rtlCol="0" anchor="ctr"/>
+          <a:lstStyle/>
+          <a:p>
+            <a:pPr algn="ctr"/>
+          </a:p>
+        </p:txBody>
+      </p:sp>
+      <p:sp>
+        <p:nvSpPr>
+          <p:cNvPr id="10" name="Oval 9"/>
+          <p:cNvSpPr/>
+          <p:nvPr/>
+        </p:nvSpPr>
+        <p:spPr>
+          <a:xfrm>
+            <a:off x="914400" y="3977639"/>
+            <a:ext cx="411480" cy="411480"/>
+          </a:xfrm>
+          <a:prstGeom prst="ellipse">
+            <a:avLst/>
+          </a:prstGeom>
+          <a:solidFill>
+            <a:srgbClr val="0A9396"/>
+          </a:solidFill>
+          <a:ln>
+            <a:noFill/>
+          </a:ln>
+          <a:effectLst/>
+        </p:spPr>
+        <p:style>
+          <a:lnRef idx="1">
+            <a:schemeClr val="accent1"/>
+          </a:lnRef>
+          <a:fillRef idx="3">
+            <a:schemeClr val="accent1"/>
+          </a:fillRef>
+          <a:effectRef idx="2">
+            <a:schemeClr val="accent1"/>
+          </a:effectRef>
+          <a:fontRef idx="minor">
+            <a:schemeClr val="lt1"/>
+          </a:fontRef>
+        </p:style>
+        <p:txBody>
+          <a:bodyPr rtlCol="0" anchor="ctr"/>
+          <a:lstStyle/>
+          <a:p>
+            <a:pPr algn="ctr"/>
+          </a:p>
+        </p:txBody>
+      </p:sp>
+      <p:sp>
+        <p:nvSpPr>
+          <p:cNvPr id="11" name="TextBox 10"/>
+          <p:cNvSpPr txBox="1"/>
+          <p:nvPr/>
+        </p:nvSpPr>
+        <p:spPr>
+          <a:xfrm>
+            <a:off x="914400" y="3977639"/>
+            <a:ext cx="411480" cy="411480"/>
+          </a:xfrm>
+          <a:prstGeom prst="rect">
+            <a:avLst/>
+          </a:prstGeom>
+          <a:noFill/>
+        </p:spPr>
+        <p:txBody>
+          <a:bodyPr wrap="square" anchor="ctr" lIns="0" rIns="0" tIns="0" bIns="0">
+            <a:spAutoFit/>
+          </a:bodyPr>
+          <a:lstStyle/>
+          <a:p>
+            <a:pPr algn="ctr"/>
+            <a:r>
+              <a:rPr sz="1400" b="1" i="0">
+                <a:solidFill>
+                  <a:srgbClr val="FFFFFF"/>
+                </a:solidFill>
+                <a:latin typeface="Calibri"/>
+              </a:rPr>
+              <a:t>A</a:t>
+            </a:r>
+          </a:p>
+        </p:txBody>
+      </p:sp>
+      <p:sp>
+        <p:nvSpPr>
           <p:cNvPr id="12" name="TextBox 11"/>
           <p:cNvSpPr txBox="1"/>
           <p:nvPr/>
         </p:nvSpPr>
         <p:spPr>
           <a:xfrm>
-            <a:off x="1005840" y="3886200"/>
-            <a:ext cx="4572000" cy="365760"/>
-          </a:xfrm>
-          <a:prstGeom prst="rect">
-            <a:avLst/>
-          </a:prstGeom>
-          <a:noFill/>
-        </p:spPr>
-        <p:txBody>
-          <a:bodyPr wrap="square" anchor="t" lIns="0" rIns="0" tIns="0" bIns="0">
+            <a:off x="1508760" y="3749039"/>
+            <a:ext cx="3840480" cy="868680"/>
+          </a:xfrm>
+          <a:prstGeom prst="rect">
+            <a:avLst/>
+          </a:prstGeom>
+          <a:noFill/>
+        </p:spPr>
+        <p:txBody>
+          <a:bodyPr wrap="square" anchor="ctr" lIns="0" rIns="0" tIns="0" bIns="0">
             <a:spAutoFit/>
           </a:bodyPr>
           <a:lstStyle/>
           <a:p>
             <a:pPr algn="l"/>
             <a:r>
+              <a:rPr sz="1450" b="0" i="0">
+                <a:solidFill>
+                  <a:srgbClr val="1D2433"/>
+                </a:solidFill>
+                <a:latin typeface="Calibri"/>
+              </a:rPr>
+              <a:t>1</a:t>
+            </a:r>
+          </a:p>
+        </p:txBody>
+      </p:sp>
+      <p:sp>
+        <p:nvSpPr>
+          <p:cNvPr id="13" name="Rounded Rectangle 12"/>
+          <p:cNvSpPr/>
+          <p:nvPr/>
+        </p:nvSpPr>
+        <p:spPr>
+          <a:xfrm>
+            <a:off x="6172200" y="3749039"/>
+            <a:ext cx="5349240" cy="868680"/>
+          </a:xfrm>
+          <a:prstGeom prst="roundRect">
+            <a:avLst>
+              <a:gd name="adj" fmla="val 12000"/>
+            </a:avLst>
+          </a:prstGeom>
+          <a:solidFill>
+            <a:srgbClr val="E9F5F0"/>
+          </a:solidFill>
+          <a:ln w="31750">
+            <a:solidFill>
+              <a:srgbClr val="2A9D8F"/>
+            </a:solidFill>
+          </a:ln>
+          <a:effectLst/>
+        </p:spPr>
+        <p:style>
+          <a:lnRef idx="1">
+            <a:schemeClr val="accent1"/>
+          </a:lnRef>
+          <a:fillRef idx="3">
+            <a:schemeClr val="accent1"/>
+          </a:fillRef>
+          <a:effectRef idx="2">
+            <a:schemeClr val="accent1"/>
+          </a:effectRef>
+          <a:fontRef idx="minor">
+            <a:schemeClr val="lt1"/>
+          </a:fontRef>
+        </p:style>
+        <p:txBody>
+          <a:bodyPr rtlCol="0" anchor="ctr"/>
+          <a:lstStyle/>
+          <a:p>
+            <a:pPr algn="ctr"/>
+          </a:p>
+        </p:txBody>
+      </p:sp>
+      <p:sp>
+        <p:nvSpPr>
+          <p:cNvPr id="14" name="Oval 13"/>
+          <p:cNvSpPr/>
+          <p:nvPr/>
+        </p:nvSpPr>
+        <p:spPr>
+          <a:xfrm>
+            <a:off x="6446520" y="3977639"/>
+            <a:ext cx="411480" cy="411480"/>
+          </a:xfrm>
+          <a:prstGeom prst="ellipse">
+            <a:avLst/>
+          </a:prstGeom>
+          <a:solidFill>
+            <a:srgbClr val="2A9D8F"/>
+          </a:solidFill>
+          <a:ln>
+            <a:noFill/>
+          </a:ln>
+          <a:effectLst/>
+        </p:spPr>
+        <p:style>
+          <a:lnRef idx="1">
+            <a:schemeClr val="accent1"/>
+          </a:lnRef>
+          <a:fillRef idx="3">
+            <a:schemeClr val="accent1"/>
+          </a:fillRef>
+          <a:effectRef idx="2">
+            <a:schemeClr val="accent1"/>
+          </a:effectRef>
+          <a:fontRef idx="minor">
+            <a:schemeClr val="lt1"/>
+          </a:fontRef>
+        </p:style>
+        <p:txBody>
+          <a:bodyPr rtlCol="0" anchor="ctr"/>
+          <a:lstStyle/>
+          <a:p>
+            <a:pPr algn="ctr"/>
+          </a:p>
+        </p:txBody>
+      </p:sp>
+      <p:sp>
+        <p:nvSpPr>
+          <p:cNvPr id="15" name="TextBox 14"/>
+          <p:cNvSpPr txBox="1"/>
+          <p:nvPr/>
+        </p:nvSpPr>
+        <p:spPr>
+          <a:xfrm>
+            <a:off x="6446520" y="3977639"/>
+            <a:ext cx="411480" cy="411480"/>
+          </a:xfrm>
+          <a:prstGeom prst="rect">
+            <a:avLst/>
+          </a:prstGeom>
+          <a:noFill/>
+        </p:spPr>
+        <p:txBody>
+          <a:bodyPr wrap="square" anchor="ctr" lIns="0" rIns="0" tIns="0" bIns="0">
+            <a:spAutoFit/>
+          </a:bodyPr>
+          <a:lstStyle/>
+          <a:p>
+            <a:pPr algn="ctr"/>
+            <a:r>
               <a:rPr sz="1400" b="1" i="0">
                 <a:solidFill>
+                  <a:srgbClr val="FFFFFF"/>
+                </a:solidFill>
+                <a:latin typeface="Calibri"/>
+              </a:rPr>
+              <a:t>B</a:t>
+            </a:r>
+          </a:p>
+        </p:txBody>
+      </p:sp>
+      <p:sp>
+        <p:nvSpPr>
+          <p:cNvPr id="16" name="TextBox 15"/>
+          <p:cNvSpPr txBox="1"/>
+          <p:nvPr/>
+        </p:nvSpPr>
+        <p:spPr>
+          <a:xfrm>
+            <a:off x="7040880" y="3749039"/>
+            <a:ext cx="3840480" cy="868680"/>
+          </a:xfrm>
+          <a:prstGeom prst="rect">
+            <a:avLst/>
+          </a:prstGeom>
+          <a:noFill/>
+        </p:spPr>
+        <p:txBody>
+          <a:bodyPr wrap="square" anchor="ctr" lIns="0" rIns="0" tIns="0" bIns="0">
+            <a:spAutoFit/>
+          </a:bodyPr>
+          <a:lstStyle/>
+          <a:p>
+            <a:pPr algn="l"/>
+            <a:r>
+              <a:rPr sz="1450" b="1" i="0">
+                <a:solidFill>
+                  <a:srgbClr val="1D2433"/>
+                </a:solidFill>
+                <a:latin typeface="Calibri"/>
+              </a:rPr>
+              <a:t>2</a:t>
+            </a:r>
+          </a:p>
+        </p:txBody>
+      </p:sp>
+      <p:sp>
+        <p:nvSpPr>
+          <p:cNvPr id="17" name="Oval 16"/>
+          <p:cNvSpPr/>
+          <p:nvPr/>
+        </p:nvSpPr>
+        <p:spPr>
+          <a:xfrm>
+            <a:off x="10972800" y="3995927"/>
+            <a:ext cx="365760" cy="365760"/>
+          </a:xfrm>
+          <a:prstGeom prst="ellipse">
+            <a:avLst/>
+          </a:prstGeom>
+          <a:solidFill>
+            <a:srgbClr val="2A9D8F"/>
+          </a:solidFill>
+          <a:ln>
+            <a:noFill/>
+          </a:ln>
+          <a:effectLst/>
+        </p:spPr>
+        <p:style>
+          <a:lnRef idx="1">
+            <a:schemeClr val="accent1"/>
+          </a:lnRef>
+          <a:fillRef idx="3">
+            <a:schemeClr val="accent1"/>
+          </a:fillRef>
+          <a:effectRef idx="2">
+            <a:schemeClr val="accent1"/>
+          </a:effectRef>
+          <a:fontRef idx="minor">
+            <a:schemeClr val="lt1"/>
+          </a:fontRef>
+        </p:style>
+        <p:txBody>
+          <a:bodyPr rtlCol="0" anchor="ctr"/>
+          <a:lstStyle/>
+          <a:p>
+            <a:pPr algn="ctr"/>
+          </a:p>
+        </p:txBody>
+      </p:sp>
+      <p:sp>
+        <p:nvSpPr>
+          <p:cNvPr id="18" name="TextBox 17"/>
+          <p:cNvSpPr txBox="1"/>
+          <p:nvPr/>
+        </p:nvSpPr>
+        <p:spPr>
+          <a:xfrm>
+            <a:off x="10972800" y="3950207"/>
+            <a:ext cx="365760" cy="365760"/>
+          </a:xfrm>
+          <a:prstGeom prst="rect">
+            <a:avLst/>
+          </a:prstGeom>
+          <a:noFill/>
+        </p:spPr>
+        <p:txBody>
+          <a:bodyPr wrap="square" anchor="ctr" lIns="0" rIns="0" tIns="0" bIns="0">
+            <a:spAutoFit/>
+          </a:bodyPr>
+          <a:lstStyle/>
+          <a:p>
+            <a:pPr algn="ctr"/>
+            <a:r>
+              <a:rPr sz="1600" b="1" i="0">
+                <a:solidFill>
+                  <a:srgbClr val="FFFFFF"/>
+                </a:solidFill>
+                <a:latin typeface="Calibri"/>
+              </a:rPr>
+              <a:t>✓</a:t>
+            </a:r>
+          </a:p>
+        </p:txBody>
+      </p:sp>
+      <p:sp>
+        <p:nvSpPr>
+          <p:cNvPr id="19" name="Rounded Rectangle 18"/>
+          <p:cNvSpPr/>
+          <p:nvPr/>
+        </p:nvSpPr>
+        <p:spPr>
+          <a:xfrm>
+            <a:off x="640080" y="4782312"/>
+            <a:ext cx="5349240" cy="868680"/>
+          </a:xfrm>
+          <a:prstGeom prst="roundRect">
+            <a:avLst>
+              <a:gd name="adj" fmla="val 12000"/>
+            </a:avLst>
+          </a:prstGeom>
+          <a:solidFill>
+            <a:srgbClr val="EAF1F4"/>
+          </a:solidFill>
+          <a:ln>
+            <a:noFill/>
+          </a:ln>
+          <a:effectLst/>
+        </p:spPr>
+        <p:style>
+          <a:lnRef idx="1">
+            <a:schemeClr val="accent1"/>
+          </a:lnRef>
+          <a:fillRef idx="3">
+            <a:schemeClr val="accent1"/>
+          </a:fillRef>
+          <a:effectRef idx="2">
+            <a:schemeClr val="accent1"/>
+          </a:effectRef>
+          <a:fontRef idx="minor">
+            <a:schemeClr val="lt1"/>
+          </a:fontRef>
+        </p:style>
+        <p:txBody>
+          <a:bodyPr rtlCol="0" anchor="ctr"/>
+          <a:lstStyle/>
+          <a:p>
+            <a:pPr algn="ctr"/>
+          </a:p>
+        </p:txBody>
+      </p:sp>
+      <p:sp>
+        <p:nvSpPr>
+          <p:cNvPr id="20" name="Oval 19"/>
+          <p:cNvSpPr/>
+          <p:nvPr/>
+        </p:nvSpPr>
+        <p:spPr>
+          <a:xfrm>
+            <a:off x="914400" y="5010912"/>
+            <a:ext cx="411480" cy="411480"/>
+          </a:xfrm>
+          <a:prstGeom prst="ellipse">
+            <a:avLst/>
+          </a:prstGeom>
+          <a:solidFill>
+            <a:srgbClr val="0A9396"/>
+          </a:solidFill>
+          <a:ln>
+            <a:noFill/>
+          </a:ln>
+          <a:effectLst/>
+        </p:spPr>
+        <p:style>
+          <a:lnRef idx="1">
+            <a:schemeClr val="accent1"/>
+          </a:lnRef>
+          <a:fillRef idx="3">
+            <a:schemeClr val="accent1"/>
+          </a:fillRef>
+          <a:effectRef idx="2">
+            <a:schemeClr val="accent1"/>
+          </a:effectRef>
+          <a:fontRef idx="minor">
+            <a:schemeClr val="lt1"/>
+          </a:fontRef>
+        </p:style>
+        <p:txBody>
+          <a:bodyPr rtlCol="0" anchor="ctr"/>
+          <a:lstStyle/>
+          <a:p>
+            <a:pPr algn="ctr"/>
+          </a:p>
+        </p:txBody>
+      </p:sp>
+      <p:sp>
+        <p:nvSpPr>
+          <p:cNvPr id="21" name="TextBox 20"/>
+          <p:cNvSpPr txBox="1"/>
+          <p:nvPr/>
+        </p:nvSpPr>
+        <p:spPr>
+          <a:xfrm>
+            <a:off x="914400" y="5010912"/>
+            <a:ext cx="411480" cy="411480"/>
+          </a:xfrm>
+          <a:prstGeom prst="rect">
+            <a:avLst/>
+          </a:prstGeom>
+          <a:noFill/>
+        </p:spPr>
+        <p:txBody>
+          <a:bodyPr wrap="square" anchor="ctr" lIns="0" rIns="0" tIns="0" bIns="0">
+            <a:spAutoFit/>
+          </a:bodyPr>
+          <a:lstStyle/>
+          <a:p>
+            <a:pPr algn="ctr"/>
+            <a:r>
+              <a:rPr sz="1400" b="1" i="0">
+                <a:solidFill>
+                  <a:srgbClr val="FFFFFF"/>
+                </a:solidFill>
+                <a:latin typeface="Calibri"/>
+              </a:rPr>
+              <a:t>C</a:t>
+            </a:r>
+          </a:p>
+        </p:txBody>
+      </p:sp>
+      <p:sp>
+        <p:nvSpPr>
+          <p:cNvPr id="22" name="TextBox 21"/>
+          <p:cNvSpPr txBox="1"/>
+          <p:nvPr/>
+        </p:nvSpPr>
+        <p:spPr>
+          <a:xfrm>
+            <a:off x="1508760" y="4782312"/>
+            <a:ext cx="3840480" cy="868680"/>
+          </a:xfrm>
+          <a:prstGeom prst="rect">
+            <a:avLst/>
+          </a:prstGeom>
+          <a:noFill/>
+        </p:spPr>
+        <p:txBody>
+          <a:bodyPr wrap="square" anchor="ctr" lIns="0" rIns="0" tIns="0" bIns="0">
+            <a:spAutoFit/>
+          </a:bodyPr>
+          <a:lstStyle/>
+          <a:p>
+            <a:pPr algn="l"/>
+            <a:r>
+              <a:rPr sz="1450" b="0" i="0">
+                <a:solidFill>
+                  <a:srgbClr val="1D2433"/>
+                </a:solidFill>
+                <a:latin typeface="Calibri"/>
+              </a:rPr>
+              <a:t>3</a:t>
+            </a:r>
+          </a:p>
+        </p:txBody>
+      </p:sp>
+      <p:sp>
+        <p:nvSpPr>
+          <p:cNvPr id="23" name="Rounded Rectangle 22"/>
+          <p:cNvSpPr/>
+          <p:nvPr/>
+        </p:nvSpPr>
+        <p:spPr>
+          <a:xfrm>
+            <a:off x="6172200" y="4782312"/>
+            <a:ext cx="5349240" cy="868680"/>
+          </a:xfrm>
+          <a:prstGeom prst="roundRect">
+            <a:avLst>
+              <a:gd name="adj" fmla="val 12000"/>
+            </a:avLst>
+          </a:prstGeom>
+          <a:solidFill>
+            <a:srgbClr val="EAF1F4"/>
+          </a:solidFill>
+          <a:ln>
+            <a:noFill/>
+          </a:ln>
+          <a:effectLst/>
+        </p:spPr>
+        <p:style>
+          <a:lnRef idx="1">
+            <a:schemeClr val="accent1"/>
+          </a:lnRef>
+          <a:fillRef idx="3">
+            <a:schemeClr val="accent1"/>
+          </a:fillRef>
+          <a:effectRef idx="2">
+            <a:schemeClr val="accent1"/>
+          </a:effectRef>
+          <a:fontRef idx="minor">
+            <a:schemeClr val="lt1"/>
+          </a:fontRef>
+        </p:style>
+        <p:txBody>
+          <a:bodyPr rtlCol="0" anchor="ctr"/>
+          <a:lstStyle/>
+          <a:p>
+            <a:pPr algn="ctr"/>
+          </a:p>
+        </p:txBody>
+      </p:sp>
+      <p:sp>
+        <p:nvSpPr>
+          <p:cNvPr id="24" name="Oval 23"/>
+          <p:cNvSpPr/>
+          <p:nvPr/>
+        </p:nvSpPr>
+        <p:spPr>
+          <a:xfrm>
+            <a:off x="6446520" y="5010912"/>
+            <a:ext cx="411480" cy="411480"/>
+          </a:xfrm>
+          <a:prstGeom prst="ellipse">
+            <a:avLst/>
+          </a:prstGeom>
+          <a:solidFill>
+            <a:srgbClr val="0A9396"/>
+          </a:solidFill>
+          <a:ln>
+            <a:noFill/>
+          </a:ln>
+          <a:effectLst/>
+        </p:spPr>
+        <p:style>
+          <a:lnRef idx="1">
+            <a:schemeClr val="accent1"/>
+          </a:lnRef>
+          <a:fillRef idx="3">
+            <a:schemeClr val="accent1"/>
+          </a:fillRef>
+          <a:effectRef idx="2">
+            <a:schemeClr val="accent1"/>
+          </a:effectRef>
+          <a:fontRef idx="minor">
+            <a:schemeClr val="lt1"/>
+          </a:fontRef>
+        </p:style>
+        <p:txBody>
+          <a:bodyPr rtlCol="0" anchor="ctr"/>
+          <a:lstStyle/>
+          <a:p>
+            <a:pPr algn="ctr"/>
+          </a:p>
+        </p:txBody>
+      </p:sp>
+      <p:sp>
+        <p:nvSpPr>
+          <p:cNvPr id="25" name="TextBox 24"/>
+          <p:cNvSpPr txBox="1"/>
+          <p:nvPr/>
+        </p:nvSpPr>
+        <p:spPr>
+          <a:xfrm>
+            <a:off x="6446520" y="5010912"/>
+            <a:ext cx="411480" cy="411480"/>
+          </a:xfrm>
+          <a:prstGeom prst="rect">
+            <a:avLst/>
+          </a:prstGeom>
+          <a:noFill/>
+        </p:spPr>
+        <p:txBody>
+          <a:bodyPr wrap="square" anchor="ctr" lIns="0" rIns="0" tIns="0" bIns="0">
+            <a:spAutoFit/>
+          </a:bodyPr>
+          <a:lstStyle/>
+          <a:p>
+            <a:pPr algn="ctr"/>
+            <a:r>
+              <a:rPr sz="1400" b="1" i="0">
+                <a:solidFill>
+                  <a:srgbClr val="FFFFFF"/>
+                </a:solidFill>
+                <a:latin typeface="Calibri"/>
+              </a:rPr>
+              <a:t>D</a:t>
+            </a:r>
+          </a:p>
+        </p:txBody>
+      </p:sp>
+      <p:sp>
+        <p:nvSpPr>
+          <p:cNvPr id="26" name="TextBox 25"/>
+          <p:cNvSpPr txBox="1"/>
+          <p:nvPr/>
+        </p:nvSpPr>
+        <p:spPr>
+          <a:xfrm>
+            <a:off x="7040880" y="4782312"/>
+            <a:ext cx="3840480" cy="868680"/>
+          </a:xfrm>
+          <a:prstGeom prst="rect">
+            <a:avLst/>
+          </a:prstGeom>
+          <a:noFill/>
+        </p:spPr>
+        <p:txBody>
+          <a:bodyPr wrap="square" anchor="ctr" lIns="0" rIns="0" tIns="0" bIns="0">
+            <a:spAutoFit/>
+          </a:bodyPr>
+          <a:lstStyle/>
+          <a:p>
+            <a:pPr algn="l"/>
+            <a:r>
+              <a:rPr sz="1450" b="0" i="0">
+                <a:solidFill>
+                  <a:srgbClr val="1D2433"/>
+                </a:solidFill>
+                <a:latin typeface="Calibri"/>
+              </a:rPr>
+              <a:t>0.5</a:t>
+            </a:r>
+          </a:p>
+        </p:txBody>
+      </p:sp>
+      <p:sp>
+        <p:nvSpPr>
+          <p:cNvPr id="27" name="Rounded Rectangle 26"/>
+          <p:cNvSpPr/>
+          <p:nvPr/>
+        </p:nvSpPr>
+        <p:spPr>
+          <a:xfrm>
+            <a:off x="640080" y="5779008"/>
+            <a:ext cx="10881360" cy="566928"/>
+          </a:xfrm>
+          <a:prstGeom prst="roundRect">
+            <a:avLst>
+              <a:gd name="adj" fmla="val 10000"/>
+            </a:avLst>
+          </a:prstGeom>
+          <a:solidFill>
+            <a:srgbClr val="EEF2F7"/>
+          </a:solidFill>
+          <a:ln>
+            <a:noFill/>
+          </a:ln>
+          <a:effectLst/>
+        </p:spPr>
+        <p:style>
+          <a:lnRef idx="1">
+            <a:schemeClr val="accent1"/>
+          </a:lnRef>
+          <a:fillRef idx="3">
+            <a:schemeClr val="accent1"/>
+          </a:fillRef>
+          <a:effectRef idx="2">
+            <a:schemeClr val="accent1"/>
+          </a:effectRef>
+          <a:fontRef idx="minor">
+            <a:schemeClr val="lt1"/>
+          </a:fontRef>
+        </p:style>
+        <p:txBody>
+          <a:bodyPr rtlCol="0" anchor="ctr"/>
+          <a:lstStyle/>
+          <a:p>
+            <a:pPr algn="ctr"/>
+          </a:p>
+        </p:txBody>
+      </p:sp>
+      <p:sp>
+        <p:nvSpPr>
+          <p:cNvPr id="28" name="TextBox 27"/>
+          <p:cNvSpPr txBox="1"/>
+          <p:nvPr/>
+        </p:nvSpPr>
+        <p:spPr>
+          <a:xfrm>
+            <a:off x="914400" y="5779008"/>
+            <a:ext cx="10332720" cy="566928"/>
+          </a:xfrm>
+          <a:prstGeom prst="rect">
+            <a:avLst/>
+          </a:prstGeom>
+          <a:noFill/>
+        </p:spPr>
+        <p:txBody>
+          <a:bodyPr wrap="square" anchor="ctr" lIns="0" rIns="0" tIns="0" bIns="0">
+            <a:spAutoFit/>
+          </a:bodyPr>
+          <a:lstStyle/>
+          <a:p>
+            <a:pPr algn="l"/>
+            <a:r>
+              <a:rPr sz="1250" b="1" i="0">
+                <a:solidFill>
                   <a:srgbClr val="2A9D8F"/>
                 </a:solidFill>
                 <a:latin typeface="Arial"/>
               </a:rPr>
-              <a:t>WHY</a:t>
-            </a:r>
-          </a:p>
-        </p:txBody>
-      </p:sp>
-      <p:sp>
-        <p:nvSpPr>
-          <p:cNvPr id="13" name="TextBox 12"/>
-          <p:cNvSpPr txBox="1"/>
-          <p:nvPr/>
-        </p:nvSpPr>
-        <p:spPr>
-          <a:xfrm>
-            <a:off x="1005840" y="4297680"/>
-            <a:ext cx="10149840" cy="1280160"/>
-          </a:xfrm>
-          <a:prstGeom prst="rect">
-            <a:avLst/>
-          </a:prstGeom>
-          <a:noFill/>
-        </p:spPr>
-        <p:txBody>
-          <a:bodyPr wrap="square" anchor="t" lIns="0" rIns="0" tIns="0" bIns="0">
-            <a:spAutoFit/>
-          </a:bodyPr>
-          <a:lstStyle/>
-          <a:p>
-            <a:pPr algn="l">
-              <a:lnSpc>
-                <a:spcPct val="110000"/>
-              </a:lnSpc>
-            </a:pPr>
-            <a:r>
-              <a:rPr sz="1600" b="0" i="0">
+              <a:t>Why  </a:t>
+            </a:r>
+            <a:r>
+              <a:rPr sz="1200" b="0" i="0">
                 <a:solidFill>
                   <a:srgbClr val="1D2433"/>
                 </a:solidFill>
@@ -7888,7 +9112,7 @@
                 </a:solidFill>
                 <a:latin typeface="Calibri"/>
               </a:rPr>
-              <a:t>Q3 — Wheel &amp; axle</a:t>
+              <a:t>Q3 - Wheel &amp; axle</a:t>
             </a:r>
           </a:p>
         </p:txBody>
@@ -8184,7 +9408,7 @@
         <p:spPr>
           <a:xfrm>
             <a:off x="1508760" y="3749039"/>
-            <a:ext cx="4297680" cy="868680"/>
+            <a:ext cx="3840480" cy="868680"/>
           </a:xfrm>
           <a:prstGeom prst="rect">
             <a:avLst/>
@@ -8344,7 +9568,7 @@
         <p:spPr>
           <a:xfrm>
             <a:off x="7040880" y="3749039"/>
-            <a:ext cx="4297680" cy="868680"/>
+            <a:ext cx="3840480" cy="868680"/>
           </a:xfrm>
           <a:prstGeom prst="rect">
             <a:avLst/>
@@ -8504,7 +9728,7 @@
         <p:spPr>
           <a:xfrm>
             <a:off x="1508760" y="4782312"/>
-            <a:ext cx="4297680" cy="868680"/>
+            <a:ext cx="3840480" cy="868680"/>
           </a:xfrm>
           <a:prstGeom prst="rect">
             <a:avLst/>
@@ -8664,7 +9888,7 @@
         <p:spPr>
           <a:xfrm>
             <a:off x="7040880" y="4782312"/>
-            <a:ext cx="4297680" cy="868680"/>
+            <a:ext cx="3840480" cy="868680"/>
           </a:xfrm>
           <a:prstGeom prst="rect">
             <a:avLst/>
@@ -8731,7 +9955,7 @@
             <a:avLst/>
           </a:prstGeom>
           <a:solidFill>
-            <a:srgbClr val="2A9D8F"/>
+            <a:srgbClr val="0A9396"/>
           </a:solidFill>
           <a:ln>
             <a:noFill/>
@@ -8786,11 +10010,11 @@
             <a:r>
               <a:rPr sz="1300" b="1" i="0">
                 <a:solidFill>
-                  <a:srgbClr val="2A9D8F"/>
+                  <a:srgbClr val="0A9396"/>
                 </a:solidFill>
                 <a:latin typeface="Arial"/>
               </a:rPr>
-              <a:t>ANSWER REVEAL</a:t>
+              <a:t>QUIZ QUESTION</a:t>
             </a:r>
           </a:p>
         </p:txBody>
@@ -8825,7 +10049,7 @@
                 </a:solidFill>
                 <a:latin typeface="Calibri"/>
               </a:rPr>
-              <a:t>Q3 — Answer</a:t>
+              <a:t>Q3 - Wheel &amp; axle</a:t>
             </a:r>
           </a:p>
         </p:txBody>
@@ -8914,166 +10138,6 @@
           <a:prstGeom prst="roundRect">
             <a:avLst>
               <a:gd name="adj" fmla="val 4000"/>
-            </a:avLst>
-          </a:prstGeom>
-          <a:solidFill>
-            <a:srgbClr val="E9F5F0"/>
-          </a:solidFill>
-          <a:ln>
-            <a:noFill/>
-          </a:ln>
-          <a:effectLst/>
-        </p:spPr>
-        <p:style>
-          <a:lnRef idx="1">
-            <a:schemeClr val="accent1"/>
-          </a:lnRef>
-          <a:fillRef idx="3">
-            <a:schemeClr val="accent1"/>
-          </a:fillRef>
-          <a:effectRef idx="2">
-            <a:schemeClr val="accent1"/>
-          </a:effectRef>
-          <a:fontRef idx="minor">
-            <a:schemeClr val="lt1"/>
-          </a:fontRef>
-        </p:style>
-        <p:txBody>
-          <a:bodyPr rtlCol="0" anchor="ctr"/>
-          <a:lstStyle/>
-          <a:p>
-            <a:pPr algn="ctr"/>
-          </a:p>
-        </p:txBody>
-      </p:sp>
-      <p:sp>
-        <p:nvSpPr>
-          <p:cNvPr id="8" name="Oval 7"/>
-          <p:cNvSpPr/>
-          <p:nvPr/>
-        </p:nvSpPr>
-        <p:spPr>
-          <a:xfrm>
-            <a:off x="1005840" y="2240280"/>
-            <a:ext cx="731520" cy="731520"/>
-          </a:xfrm>
-          <a:prstGeom prst="ellipse">
-            <a:avLst/>
-          </a:prstGeom>
-          <a:solidFill>
-            <a:srgbClr val="2A9D8F"/>
-          </a:solidFill>
-          <a:ln>
-            <a:noFill/>
-          </a:ln>
-          <a:effectLst/>
-        </p:spPr>
-        <p:style>
-          <a:lnRef idx="1">
-            <a:schemeClr val="accent1"/>
-          </a:lnRef>
-          <a:fillRef idx="3">
-            <a:schemeClr val="accent1"/>
-          </a:fillRef>
-          <a:effectRef idx="2">
-            <a:schemeClr val="accent1"/>
-          </a:effectRef>
-          <a:fontRef idx="minor">
-            <a:schemeClr val="lt1"/>
-          </a:fontRef>
-        </p:style>
-        <p:txBody>
-          <a:bodyPr rtlCol="0" anchor="ctr"/>
-          <a:lstStyle/>
-          <a:p>
-            <a:pPr algn="ctr"/>
-          </a:p>
-        </p:txBody>
-      </p:sp>
-      <p:sp>
-        <p:nvSpPr>
-          <p:cNvPr id="9" name="TextBox 8"/>
-          <p:cNvSpPr txBox="1"/>
-          <p:nvPr/>
-        </p:nvSpPr>
-        <p:spPr>
-          <a:xfrm>
-            <a:off x="1005840" y="2240280"/>
-            <a:ext cx="731520" cy="731520"/>
-          </a:xfrm>
-          <a:prstGeom prst="rect">
-            <a:avLst/>
-          </a:prstGeom>
-          <a:noFill/>
-        </p:spPr>
-        <p:txBody>
-          <a:bodyPr wrap="square" anchor="ctr" lIns="0" rIns="0" tIns="0" bIns="0">
-            <a:spAutoFit/>
-          </a:bodyPr>
-          <a:lstStyle/>
-          <a:p>
-            <a:pPr algn="ctr"/>
-            <a:r>
-              <a:rPr sz="3000" b="1" i="0">
-                <a:solidFill>
-                  <a:srgbClr val="FFFFFF"/>
-                </a:solidFill>
-                <a:latin typeface="Calibri"/>
-              </a:rPr>
-              <a:t>✓</a:t>
-            </a:r>
-          </a:p>
-        </p:txBody>
-      </p:sp>
-      <p:sp>
-        <p:nvSpPr>
-          <p:cNvPr id="10" name="TextBox 9"/>
-          <p:cNvSpPr txBox="1"/>
-          <p:nvPr/>
-        </p:nvSpPr>
-        <p:spPr>
-          <a:xfrm>
-            <a:off x="1920240" y="1828800"/>
-            <a:ext cx="9326880" cy="1554480"/>
-          </a:xfrm>
-          <a:prstGeom prst="rect">
-            <a:avLst/>
-          </a:prstGeom>
-          <a:noFill/>
-        </p:spPr>
-        <p:txBody>
-          <a:bodyPr wrap="square" anchor="ctr" lIns="0" rIns="0" tIns="0" bIns="0">
-            <a:spAutoFit/>
-          </a:bodyPr>
-          <a:lstStyle/>
-          <a:p>
-            <a:pPr algn="l"/>
-            <a:r>
-              <a:rPr sz="2200" b="1" i="0">
-                <a:solidFill>
-                  <a:srgbClr val="1D2433"/>
-                </a:solidFill>
-                <a:latin typeface="Calibri"/>
-              </a:rPr>
-              <a:t>B. R / r</a:t>
-            </a:r>
-          </a:p>
-        </p:txBody>
-      </p:sp>
-      <p:sp>
-        <p:nvSpPr>
-          <p:cNvPr id="11" name="Rounded Rectangle 10"/>
-          <p:cNvSpPr/>
-          <p:nvPr/>
-        </p:nvSpPr>
-        <p:spPr>
-          <a:xfrm>
-            <a:off x="640080" y="3657600"/>
-            <a:ext cx="10881360" cy="2011680"/>
-          </a:xfrm>
-          <a:prstGeom prst="roundRect">
-            <a:avLst>
-              <a:gd name="adj" fmla="val 3000"/>
             </a:avLst>
           </a:prstGeom>
           <a:solidFill>
@@ -9114,68 +10178,840 @@
       </p:sp>
       <p:sp>
         <p:nvSpPr>
+          <p:cNvPr id="8" name="TextBox 7"/>
+          <p:cNvSpPr txBox="1"/>
+          <p:nvPr/>
+        </p:nvSpPr>
+        <p:spPr>
+          <a:xfrm>
+            <a:off x="1005840" y="1828800"/>
+            <a:ext cx="10149840" cy="1554480"/>
+          </a:xfrm>
+          <a:prstGeom prst="rect">
+            <a:avLst/>
+          </a:prstGeom>
+          <a:noFill/>
+        </p:spPr>
+        <p:txBody>
+          <a:bodyPr wrap="square" anchor="ctr" lIns="0" rIns="0" tIns="0" bIns="0">
+            <a:spAutoFit/>
+          </a:bodyPr>
+          <a:lstStyle/>
+          <a:p>
+            <a:pPr algn="l"/>
+            <a:r>
+              <a:rPr sz="1900" b="1" i="0">
+                <a:solidFill>
+                  <a:srgbClr val="1D2433"/>
+                </a:solidFill>
+                <a:latin typeface="Calibri"/>
+              </a:rPr>
+              <a:t>In a wheel and axle, the mechanical advantage is given by:</a:t>
+            </a:r>
+          </a:p>
+        </p:txBody>
+      </p:sp>
+      <p:sp>
+        <p:nvSpPr>
+          <p:cNvPr id="9" name="Rounded Rectangle 8"/>
+          <p:cNvSpPr/>
+          <p:nvPr/>
+        </p:nvSpPr>
+        <p:spPr>
+          <a:xfrm>
+            <a:off x="640080" y="3749039"/>
+            <a:ext cx="5349240" cy="868680"/>
+          </a:xfrm>
+          <a:prstGeom prst="roundRect">
+            <a:avLst>
+              <a:gd name="adj" fmla="val 12000"/>
+            </a:avLst>
+          </a:prstGeom>
+          <a:solidFill>
+            <a:srgbClr val="EAF1F4"/>
+          </a:solidFill>
+          <a:ln>
+            <a:noFill/>
+          </a:ln>
+          <a:effectLst/>
+        </p:spPr>
+        <p:style>
+          <a:lnRef idx="1">
+            <a:schemeClr val="accent1"/>
+          </a:lnRef>
+          <a:fillRef idx="3">
+            <a:schemeClr val="accent1"/>
+          </a:fillRef>
+          <a:effectRef idx="2">
+            <a:schemeClr val="accent1"/>
+          </a:effectRef>
+          <a:fontRef idx="minor">
+            <a:schemeClr val="lt1"/>
+          </a:fontRef>
+        </p:style>
+        <p:txBody>
+          <a:bodyPr rtlCol="0" anchor="ctr"/>
+          <a:lstStyle/>
+          <a:p>
+            <a:pPr algn="ctr"/>
+          </a:p>
+        </p:txBody>
+      </p:sp>
+      <p:sp>
+        <p:nvSpPr>
+          <p:cNvPr id="10" name="Oval 9"/>
+          <p:cNvSpPr/>
+          <p:nvPr/>
+        </p:nvSpPr>
+        <p:spPr>
+          <a:xfrm>
+            <a:off x="914400" y="3977639"/>
+            <a:ext cx="411480" cy="411480"/>
+          </a:xfrm>
+          <a:prstGeom prst="ellipse">
+            <a:avLst/>
+          </a:prstGeom>
+          <a:solidFill>
+            <a:srgbClr val="0A9396"/>
+          </a:solidFill>
+          <a:ln>
+            <a:noFill/>
+          </a:ln>
+          <a:effectLst/>
+        </p:spPr>
+        <p:style>
+          <a:lnRef idx="1">
+            <a:schemeClr val="accent1"/>
+          </a:lnRef>
+          <a:fillRef idx="3">
+            <a:schemeClr val="accent1"/>
+          </a:fillRef>
+          <a:effectRef idx="2">
+            <a:schemeClr val="accent1"/>
+          </a:effectRef>
+          <a:fontRef idx="minor">
+            <a:schemeClr val="lt1"/>
+          </a:fontRef>
+        </p:style>
+        <p:txBody>
+          <a:bodyPr rtlCol="0" anchor="ctr"/>
+          <a:lstStyle/>
+          <a:p>
+            <a:pPr algn="ctr"/>
+          </a:p>
+        </p:txBody>
+      </p:sp>
+      <p:sp>
+        <p:nvSpPr>
+          <p:cNvPr id="11" name="TextBox 10"/>
+          <p:cNvSpPr txBox="1"/>
+          <p:nvPr/>
+        </p:nvSpPr>
+        <p:spPr>
+          <a:xfrm>
+            <a:off x="914400" y="3977639"/>
+            <a:ext cx="411480" cy="411480"/>
+          </a:xfrm>
+          <a:prstGeom prst="rect">
+            <a:avLst/>
+          </a:prstGeom>
+          <a:noFill/>
+        </p:spPr>
+        <p:txBody>
+          <a:bodyPr wrap="square" anchor="ctr" lIns="0" rIns="0" tIns="0" bIns="0">
+            <a:spAutoFit/>
+          </a:bodyPr>
+          <a:lstStyle/>
+          <a:p>
+            <a:pPr algn="ctr"/>
+            <a:r>
+              <a:rPr sz="1400" b="1" i="0">
+                <a:solidFill>
+                  <a:srgbClr val="FFFFFF"/>
+                </a:solidFill>
+                <a:latin typeface="Calibri"/>
+              </a:rPr>
+              <a:t>A</a:t>
+            </a:r>
+          </a:p>
+        </p:txBody>
+      </p:sp>
+      <p:sp>
+        <p:nvSpPr>
           <p:cNvPr id="12" name="TextBox 11"/>
           <p:cNvSpPr txBox="1"/>
           <p:nvPr/>
         </p:nvSpPr>
         <p:spPr>
           <a:xfrm>
-            <a:off x="1005840" y="3886200"/>
-            <a:ext cx="4572000" cy="365760"/>
-          </a:xfrm>
-          <a:prstGeom prst="rect">
-            <a:avLst/>
-          </a:prstGeom>
-          <a:noFill/>
-        </p:spPr>
-        <p:txBody>
-          <a:bodyPr wrap="square" anchor="t" lIns="0" rIns="0" tIns="0" bIns="0">
+            <a:off x="1508760" y="3749039"/>
+            <a:ext cx="3840480" cy="868680"/>
+          </a:xfrm>
+          <a:prstGeom prst="rect">
+            <a:avLst/>
+          </a:prstGeom>
+          <a:noFill/>
+        </p:spPr>
+        <p:txBody>
+          <a:bodyPr wrap="square" anchor="ctr" lIns="0" rIns="0" tIns="0" bIns="0">
             <a:spAutoFit/>
           </a:bodyPr>
           <a:lstStyle/>
           <a:p>
             <a:pPr algn="l"/>
             <a:r>
+              <a:rPr sz="1450" b="0" i="0">
+                <a:solidFill>
+                  <a:srgbClr val="1D2433"/>
+                </a:solidFill>
+                <a:latin typeface="Calibri"/>
+              </a:rPr>
+              <a:t>r / R</a:t>
+            </a:r>
+          </a:p>
+        </p:txBody>
+      </p:sp>
+      <p:sp>
+        <p:nvSpPr>
+          <p:cNvPr id="13" name="Rounded Rectangle 12"/>
+          <p:cNvSpPr/>
+          <p:nvPr/>
+        </p:nvSpPr>
+        <p:spPr>
+          <a:xfrm>
+            <a:off x="6172200" y="3749039"/>
+            <a:ext cx="5349240" cy="868680"/>
+          </a:xfrm>
+          <a:prstGeom prst="roundRect">
+            <a:avLst>
+              <a:gd name="adj" fmla="val 12000"/>
+            </a:avLst>
+          </a:prstGeom>
+          <a:solidFill>
+            <a:srgbClr val="E9F5F0"/>
+          </a:solidFill>
+          <a:ln w="31750">
+            <a:solidFill>
+              <a:srgbClr val="2A9D8F"/>
+            </a:solidFill>
+          </a:ln>
+          <a:effectLst/>
+        </p:spPr>
+        <p:style>
+          <a:lnRef idx="1">
+            <a:schemeClr val="accent1"/>
+          </a:lnRef>
+          <a:fillRef idx="3">
+            <a:schemeClr val="accent1"/>
+          </a:fillRef>
+          <a:effectRef idx="2">
+            <a:schemeClr val="accent1"/>
+          </a:effectRef>
+          <a:fontRef idx="minor">
+            <a:schemeClr val="lt1"/>
+          </a:fontRef>
+        </p:style>
+        <p:txBody>
+          <a:bodyPr rtlCol="0" anchor="ctr"/>
+          <a:lstStyle/>
+          <a:p>
+            <a:pPr algn="ctr"/>
+          </a:p>
+        </p:txBody>
+      </p:sp>
+      <p:sp>
+        <p:nvSpPr>
+          <p:cNvPr id="14" name="Oval 13"/>
+          <p:cNvSpPr/>
+          <p:nvPr/>
+        </p:nvSpPr>
+        <p:spPr>
+          <a:xfrm>
+            <a:off x="6446520" y="3977639"/>
+            <a:ext cx="411480" cy="411480"/>
+          </a:xfrm>
+          <a:prstGeom prst="ellipse">
+            <a:avLst/>
+          </a:prstGeom>
+          <a:solidFill>
+            <a:srgbClr val="2A9D8F"/>
+          </a:solidFill>
+          <a:ln>
+            <a:noFill/>
+          </a:ln>
+          <a:effectLst/>
+        </p:spPr>
+        <p:style>
+          <a:lnRef idx="1">
+            <a:schemeClr val="accent1"/>
+          </a:lnRef>
+          <a:fillRef idx="3">
+            <a:schemeClr val="accent1"/>
+          </a:fillRef>
+          <a:effectRef idx="2">
+            <a:schemeClr val="accent1"/>
+          </a:effectRef>
+          <a:fontRef idx="minor">
+            <a:schemeClr val="lt1"/>
+          </a:fontRef>
+        </p:style>
+        <p:txBody>
+          <a:bodyPr rtlCol="0" anchor="ctr"/>
+          <a:lstStyle/>
+          <a:p>
+            <a:pPr algn="ctr"/>
+          </a:p>
+        </p:txBody>
+      </p:sp>
+      <p:sp>
+        <p:nvSpPr>
+          <p:cNvPr id="15" name="TextBox 14"/>
+          <p:cNvSpPr txBox="1"/>
+          <p:nvPr/>
+        </p:nvSpPr>
+        <p:spPr>
+          <a:xfrm>
+            <a:off x="6446520" y="3977639"/>
+            <a:ext cx="411480" cy="411480"/>
+          </a:xfrm>
+          <a:prstGeom prst="rect">
+            <a:avLst/>
+          </a:prstGeom>
+          <a:noFill/>
+        </p:spPr>
+        <p:txBody>
+          <a:bodyPr wrap="square" anchor="ctr" lIns="0" rIns="0" tIns="0" bIns="0">
+            <a:spAutoFit/>
+          </a:bodyPr>
+          <a:lstStyle/>
+          <a:p>
+            <a:pPr algn="ctr"/>
+            <a:r>
               <a:rPr sz="1400" b="1" i="0">
                 <a:solidFill>
+                  <a:srgbClr val="FFFFFF"/>
+                </a:solidFill>
+                <a:latin typeface="Calibri"/>
+              </a:rPr>
+              <a:t>B</a:t>
+            </a:r>
+          </a:p>
+        </p:txBody>
+      </p:sp>
+      <p:sp>
+        <p:nvSpPr>
+          <p:cNvPr id="16" name="TextBox 15"/>
+          <p:cNvSpPr txBox="1"/>
+          <p:nvPr/>
+        </p:nvSpPr>
+        <p:spPr>
+          <a:xfrm>
+            <a:off x="7040880" y="3749039"/>
+            <a:ext cx="3840480" cy="868680"/>
+          </a:xfrm>
+          <a:prstGeom prst="rect">
+            <a:avLst/>
+          </a:prstGeom>
+          <a:noFill/>
+        </p:spPr>
+        <p:txBody>
+          <a:bodyPr wrap="square" anchor="ctr" lIns="0" rIns="0" tIns="0" bIns="0">
+            <a:spAutoFit/>
+          </a:bodyPr>
+          <a:lstStyle/>
+          <a:p>
+            <a:pPr algn="l"/>
+            <a:r>
+              <a:rPr sz="1450" b="1" i="0">
+                <a:solidFill>
+                  <a:srgbClr val="1D2433"/>
+                </a:solidFill>
+                <a:latin typeface="Calibri"/>
+              </a:rPr>
+              <a:t>R / r</a:t>
+            </a:r>
+          </a:p>
+        </p:txBody>
+      </p:sp>
+      <p:sp>
+        <p:nvSpPr>
+          <p:cNvPr id="17" name="Oval 16"/>
+          <p:cNvSpPr/>
+          <p:nvPr/>
+        </p:nvSpPr>
+        <p:spPr>
+          <a:xfrm>
+            <a:off x="10972800" y="3995927"/>
+            <a:ext cx="365760" cy="365760"/>
+          </a:xfrm>
+          <a:prstGeom prst="ellipse">
+            <a:avLst/>
+          </a:prstGeom>
+          <a:solidFill>
+            <a:srgbClr val="2A9D8F"/>
+          </a:solidFill>
+          <a:ln>
+            <a:noFill/>
+          </a:ln>
+          <a:effectLst/>
+        </p:spPr>
+        <p:style>
+          <a:lnRef idx="1">
+            <a:schemeClr val="accent1"/>
+          </a:lnRef>
+          <a:fillRef idx="3">
+            <a:schemeClr val="accent1"/>
+          </a:fillRef>
+          <a:effectRef idx="2">
+            <a:schemeClr val="accent1"/>
+          </a:effectRef>
+          <a:fontRef idx="minor">
+            <a:schemeClr val="lt1"/>
+          </a:fontRef>
+        </p:style>
+        <p:txBody>
+          <a:bodyPr rtlCol="0" anchor="ctr"/>
+          <a:lstStyle/>
+          <a:p>
+            <a:pPr algn="ctr"/>
+          </a:p>
+        </p:txBody>
+      </p:sp>
+      <p:sp>
+        <p:nvSpPr>
+          <p:cNvPr id="18" name="TextBox 17"/>
+          <p:cNvSpPr txBox="1"/>
+          <p:nvPr/>
+        </p:nvSpPr>
+        <p:spPr>
+          <a:xfrm>
+            <a:off x="10972800" y="3950207"/>
+            <a:ext cx="365760" cy="365760"/>
+          </a:xfrm>
+          <a:prstGeom prst="rect">
+            <a:avLst/>
+          </a:prstGeom>
+          <a:noFill/>
+        </p:spPr>
+        <p:txBody>
+          <a:bodyPr wrap="square" anchor="ctr" lIns="0" rIns="0" tIns="0" bIns="0">
+            <a:spAutoFit/>
+          </a:bodyPr>
+          <a:lstStyle/>
+          <a:p>
+            <a:pPr algn="ctr"/>
+            <a:r>
+              <a:rPr sz="1600" b="1" i="0">
+                <a:solidFill>
+                  <a:srgbClr val="FFFFFF"/>
+                </a:solidFill>
+                <a:latin typeface="Calibri"/>
+              </a:rPr>
+              <a:t>✓</a:t>
+            </a:r>
+          </a:p>
+        </p:txBody>
+      </p:sp>
+      <p:sp>
+        <p:nvSpPr>
+          <p:cNvPr id="19" name="Rounded Rectangle 18"/>
+          <p:cNvSpPr/>
+          <p:nvPr/>
+        </p:nvSpPr>
+        <p:spPr>
+          <a:xfrm>
+            <a:off x="640080" y="4782312"/>
+            <a:ext cx="5349240" cy="868680"/>
+          </a:xfrm>
+          <a:prstGeom prst="roundRect">
+            <a:avLst>
+              <a:gd name="adj" fmla="val 12000"/>
+            </a:avLst>
+          </a:prstGeom>
+          <a:solidFill>
+            <a:srgbClr val="EAF1F4"/>
+          </a:solidFill>
+          <a:ln>
+            <a:noFill/>
+          </a:ln>
+          <a:effectLst/>
+        </p:spPr>
+        <p:style>
+          <a:lnRef idx="1">
+            <a:schemeClr val="accent1"/>
+          </a:lnRef>
+          <a:fillRef idx="3">
+            <a:schemeClr val="accent1"/>
+          </a:fillRef>
+          <a:effectRef idx="2">
+            <a:schemeClr val="accent1"/>
+          </a:effectRef>
+          <a:fontRef idx="minor">
+            <a:schemeClr val="lt1"/>
+          </a:fontRef>
+        </p:style>
+        <p:txBody>
+          <a:bodyPr rtlCol="0" anchor="ctr"/>
+          <a:lstStyle/>
+          <a:p>
+            <a:pPr algn="ctr"/>
+          </a:p>
+        </p:txBody>
+      </p:sp>
+      <p:sp>
+        <p:nvSpPr>
+          <p:cNvPr id="20" name="Oval 19"/>
+          <p:cNvSpPr/>
+          <p:nvPr/>
+        </p:nvSpPr>
+        <p:spPr>
+          <a:xfrm>
+            <a:off x="914400" y="5010912"/>
+            <a:ext cx="411480" cy="411480"/>
+          </a:xfrm>
+          <a:prstGeom prst="ellipse">
+            <a:avLst/>
+          </a:prstGeom>
+          <a:solidFill>
+            <a:srgbClr val="0A9396"/>
+          </a:solidFill>
+          <a:ln>
+            <a:noFill/>
+          </a:ln>
+          <a:effectLst/>
+        </p:spPr>
+        <p:style>
+          <a:lnRef idx="1">
+            <a:schemeClr val="accent1"/>
+          </a:lnRef>
+          <a:fillRef idx="3">
+            <a:schemeClr val="accent1"/>
+          </a:fillRef>
+          <a:effectRef idx="2">
+            <a:schemeClr val="accent1"/>
+          </a:effectRef>
+          <a:fontRef idx="minor">
+            <a:schemeClr val="lt1"/>
+          </a:fontRef>
+        </p:style>
+        <p:txBody>
+          <a:bodyPr rtlCol="0" anchor="ctr"/>
+          <a:lstStyle/>
+          <a:p>
+            <a:pPr algn="ctr"/>
+          </a:p>
+        </p:txBody>
+      </p:sp>
+      <p:sp>
+        <p:nvSpPr>
+          <p:cNvPr id="21" name="TextBox 20"/>
+          <p:cNvSpPr txBox="1"/>
+          <p:nvPr/>
+        </p:nvSpPr>
+        <p:spPr>
+          <a:xfrm>
+            <a:off x="914400" y="5010912"/>
+            <a:ext cx="411480" cy="411480"/>
+          </a:xfrm>
+          <a:prstGeom prst="rect">
+            <a:avLst/>
+          </a:prstGeom>
+          <a:noFill/>
+        </p:spPr>
+        <p:txBody>
+          <a:bodyPr wrap="square" anchor="ctr" lIns="0" rIns="0" tIns="0" bIns="0">
+            <a:spAutoFit/>
+          </a:bodyPr>
+          <a:lstStyle/>
+          <a:p>
+            <a:pPr algn="ctr"/>
+            <a:r>
+              <a:rPr sz="1400" b="1" i="0">
+                <a:solidFill>
+                  <a:srgbClr val="FFFFFF"/>
+                </a:solidFill>
+                <a:latin typeface="Calibri"/>
+              </a:rPr>
+              <a:t>C</a:t>
+            </a:r>
+          </a:p>
+        </p:txBody>
+      </p:sp>
+      <p:sp>
+        <p:nvSpPr>
+          <p:cNvPr id="22" name="TextBox 21"/>
+          <p:cNvSpPr txBox="1"/>
+          <p:nvPr/>
+        </p:nvSpPr>
+        <p:spPr>
+          <a:xfrm>
+            <a:off x="1508760" y="4782312"/>
+            <a:ext cx="3840480" cy="868680"/>
+          </a:xfrm>
+          <a:prstGeom prst="rect">
+            <a:avLst/>
+          </a:prstGeom>
+          <a:noFill/>
+        </p:spPr>
+        <p:txBody>
+          <a:bodyPr wrap="square" anchor="ctr" lIns="0" rIns="0" tIns="0" bIns="0">
+            <a:spAutoFit/>
+          </a:bodyPr>
+          <a:lstStyle/>
+          <a:p>
+            <a:pPr algn="l"/>
+            <a:r>
+              <a:rPr sz="1450" b="0" i="0">
+                <a:solidFill>
+                  <a:srgbClr val="1D2433"/>
+                </a:solidFill>
+                <a:latin typeface="Calibri"/>
+              </a:rPr>
+              <a:t>R × r</a:t>
+            </a:r>
+          </a:p>
+        </p:txBody>
+      </p:sp>
+      <p:sp>
+        <p:nvSpPr>
+          <p:cNvPr id="23" name="Rounded Rectangle 22"/>
+          <p:cNvSpPr/>
+          <p:nvPr/>
+        </p:nvSpPr>
+        <p:spPr>
+          <a:xfrm>
+            <a:off x="6172200" y="4782312"/>
+            <a:ext cx="5349240" cy="868680"/>
+          </a:xfrm>
+          <a:prstGeom prst="roundRect">
+            <a:avLst>
+              <a:gd name="adj" fmla="val 12000"/>
+            </a:avLst>
+          </a:prstGeom>
+          <a:solidFill>
+            <a:srgbClr val="EAF1F4"/>
+          </a:solidFill>
+          <a:ln>
+            <a:noFill/>
+          </a:ln>
+          <a:effectLst/>
+        </p:spPr>
+        <p:style>
+          <a:lnRef idx="1">
+            <a:schemeClr val="accent1"/>
+          </a:lnRef>
+          <a:fillRef idx="3">
+            <a:schemeClr val="accent1"/>
+          </a:fillRef>
+          <a:effectRef idx="2">
+            <a:schemeClr val="accent1"/>
+          </a:effectRef>
+          <a:fontRef idx="minor">
+            <a:schemeClr val="lt1"/>
+          </a:fontRef>
+        </p:style>
+        <p:txBody>
+          <a:bodyPr rtlCol="0" anchor="ctr"/>
+          <a:lstStyle/>
+          <a:p>
+            <a:pPr algn="ctr"/>
+          </a:p>
+        </p:txBody>
+      </p:sp>
+      <p:sp>
+        <p:nvSpPr>
+          <p:cNvPr id="24" name="Oval 23"/>
+          <p:cNvSpPr/>
+          <p:nvPr/>
+        </p:nvSpPr>
+        <p:spPr>
+          <a:xfrm>
+            <a:off x="6446520" y="5010912"/>
+            <a:ext cx="411480" cy="411480"/>
+          </a:xfrm>
+          <a:prstGeom prst="ellipse">
+            <a:avLst/>
+          </a:prstGeom>
+          <a:solidFill>
+            <a:srgbClr val="0A9396"/>
+          </a:solidFill>
+          <a:ln>
+            <a:noFill/>
+          </a:ln>
+          <a:effectLst/>
+        </p:spPr>
+        <p:style>
+          <a:lnRef idx="1">
+            <a:schemeClr val="accent1"/>
+          </a:lnRef>
+          <a:fillRef idx="3">
+            <a:schemeClr val="accent1"/>
+          </a:fillRef>
+          <a:effectRef idx="2">
+            <a:schemeClr val="accent1"/>
+          </a:effectRef>
+          <a:fontRef idx="minor">
+            <a:schemeClr val="lt1"/>
+          </a:fontRef>
+        </p:style>
+        <p:txBody>
+          <a:bodyPr rtlCol="0" anchor="ctr"/>
+          <a:lstStyle/>
+          <a:p>
+            <a:pPr algn="ctr"/>
+          </a:p>
+        </p:txBody>
+      </p:sp>
+      <p:sp>
+        <p:nvSpPr>
+          <p:cNvPr id="25" name="TextBox 24"/>
+          <p:cNvSpPr txBox="1"/>
+          <p:nvPr/>
+        </p:nvSpPr>
+        <p:spPr>
+          <a:xfrm>
+            <a:off x="6446520" y="5010912"/>
+            <a:ext cx="411480" cy="411480"/>
+          </a:xfrm>
+          <a:prstGeom prst="rect">
+            <a:avLst/>
+          </a:prstGeom>
+          <a:noFill/>
+        </p:spPr>
+        <p:txBody>
+          <a:bodyPr wrap="square" anchor="ctr" lIns="0" rIns="0" tIns="0" bIns="0">
+            <a:spAutoFit/>
+          </a:bodyPr>
+          <a:lstStyle/>
+          <a:p>
+            <a:pPr algn="ctr"/>
+            <a:r>
+              <a:rPr sz="1400" b="1" i="0">
+                <a:solidFill>
+                  <a:srgbClr val="FFFFFF"/>
+                </a:solidFill>
+                <a:latin typeface="Calibri"/>
+              </a:rPr>
+              <a:t>D</a:t>
+            </a:r>
+          </a:p>
+        </p:txBody>
+      </p:sp>
+      <p:sp>
+        <p:nvSpPr>
+          <p:cNvPr id="26" name="TextBox 25"/>
+          <p:cNvSpPr txBox="1"/>
+          <p:nvPr/>
+        </p:nvSpPr>
+        <p:spPr>
+          <a:xfrm>
+            <a:off x="7040880" y="4782312"/>
+            <a:ext cx="3840480" cy="868680"/>
+          </a:xfrm>
+          <a:prstGeom prst="rect">
+            <a:avLst/>
+          </a:prstGeom>
+          <a:noFill/>
+        </p:spPr>
+        <p:txBody>
+          <a:bodyPr wrap="square" anchor="ctr" lIns="0" rIns="0" tIns="0" bIns="0">
+            <a:spAutoFit/>
+          </a:bodyPr>
+          <a:lstStyle/>
+          <a:p>
+            <a:pPr algn="l"/>
+            <a:r>
+              <a:rPr sz="1450" b="0" i="0">
+                <a:solidFill>
+                  <a:srgbClr val="1D2433"/>
+                </a:solidFill>
+                <a:latin typeface="Calibri"/>
+              </a:rPr>
+              <a:t>R + r</a:t>
+            </a:r>
+          </a:p>
+        </p:txBody>
+      </p:sp>
+      <p:sp>
+        <p:nvSpPr>
+          <p:cNvPr id="27" name="Rounded Rectangle 26"/>
+          <p:cNvSpPr/>
+          <p:nvPr/>
+        </p:nvSpPr>
+        <p:spPr>
+          <a:xfrm>
+            <a:off x="640080" y="5779008"/>
+            <a:ext cx="10881360" cy="566928"/>
+          </a:xfrm>
+          <a:prstGeom prst="roundRect">
+            <a:avLst>
+              <a:gd name="adj" fmla="val 10000"/>
+            </a:avLst>
+          </a:prstGeom>
+          <a:solidFill>
+            <a:srgbClr val="EEF2F7"/>
+          </a:solidFill>
+          <a:ln>
+            <a:noFill/>
+          </a:ln>
+          <a:effectLst/>
+        </p:spPr>
+        <p:style>
+          <a:lnRef idx="1">
+            <a:schemeClr val="accent1"/>
+          </a:lnRef>
+          <a:fillRef idx="3">
+            <a:schemeClr val="accent1"/>
+          </a:fillRef>
+          <a:effectRef idx="2">
+            <a:schemeClr val="accent1"/>
+          </a:effectRef>
+          <a:fontRef idx="minor">
+            <a:schemeClr val="lt1"/>
+          </a:fontRef>
+        </p:style>
+        <p:txBody>
+          <a:bodyPr rtlCol="0" anchor="ctr"/>
+          <a:lstStyle/>
+          <a:p>
+            <a:pPr algn="ctr"/>
+          </a:p>
+        </p:txBody>
+      </p:sp>
+      <p:sp>
+        <p:nvSpPr>
+          <p:cNvPr id="28" name="TextBox 27"/>
+          <p:cNvSpPr txBox="1"/>
+          <p:nvPr/>
+        </p:nvSpPr>
+        <p:spPr>
+          <a:xfrm>
+            <a:off x="914400" y="5779008"/>
+            <a:ext cx="10332720" cy="566928"/>
+          </a:xfrm>
+          <a:prstGeom prst="rect">
+            <a:avLst/>
+          </a:prstGeom>
+          <a:noFill/>
+        </p:spPr>
+        <p:txBody>
+          <a:bodyPr wrap="square" anchor="ctr" lIns="0" rIns="0" tIns="0" bIns="0">
+            <a:spAutoFit/>
+          </a:bodyPr>
+          <a:lstStyle/>
+          <a:p>
+            <a:pPr algn="l"/>
+            <a:r>
+              <a:rPr sz="1250" b="1" i="0">
+                <a:solidFill>
                   <a:srgbClr val="2A9D8F"/>
                 </a:solidFill>
                 <a:latin typeface="Arial"/>
               </a:rPr>
-              <a:t>WHY</a:t>
-            </a:r>
-          </a:p>
-        </p:txBody>
-      </p:sp>
-      <p:sp>
-        <p:nvSpPr>
-          <p:cNvPr id="13" name="TextBox 12"/>
-          <p:cNvSpPr txBox="1"/>
-          <p:nvPr/>
-        </p:nvSpPr>
-        <p:spPr>
-          <a:xfrm>
-            <a:off x="1005840" y="4297680"/>
-            <a:ext cx="10149840" cy="1280160"/>
-          </a:xfrm>
-          <a:prstGeom prst="rect">
-            <a:avLst/>
-          </a:prstGeom>
-          <a:noFill/>
-        </p:spPr>
-        <p:txBody>
-          <a:bodyPr wrap="square" anchor="t" lIns="0" rIns="0" tIns="0" bIns="0">
-            <a:spAutoFit/>
-          </a:bodyPr>
-          <a:lstStyle/>
-          <a:p>
-            <a:pPr algn="l">
-              <a:lnSpc>
-                <a:spcPct val="110000"/>
-              </a:lnSpc>
-            </a:pPr>
-            <a:r>
-              <a:rPr sz="1600" b="0" i="0">
+              <a:t>Why  </a:t>
+            </a:r>
+            <a:r>
+              <a:rPr sz="1200" b="0" i="0">
                 <a:solidFill>
                   <a:srgbClr val="1D2433"/>
                 </a:solidFill>
@@ -9321,7 +11157,7 @@
                 </a:solidFill>
                 <a:latin typeface="Calibri"/>
               </a:rPr>
-              <a:t>Q4 — Identify</a:t>
+              <a:t>Q4 - Identify</a:t>
             </a:r>
           </a:p>
         </p:txBody>
@@ -9617,7 +11453,7 @@
         <p:spPr>
           <a:xfrm>
             <a:off x="1508760" y="3749039"/>
-            <a:ext cx="4297680" cy="868680"/>
+            <a:ext cx="3840480" cy="868680"/>
           </a:xfrm>
           <a:prstGeom prst="rect">
             <a:avLst/>
@@ -9777,7 +11613,7 @@
         <p:spPr>
           <a:xfrm>
             <a:off x="7040880" y="3749039"/>
-            <a:ext cx="4297680" cy="868680"/>
+            <a:ext cx="3840480" cy="868680"/>
           </a:xfrm>
           <a:prstGeom prst="rect">
             <a:avLst/>
@@ -9937,7 +11773,7 @@
         <p:spPr>
           <a:xfrm>
             <a:off x="1508760" y="4782312"/>
-            <a:ext cx="4297680" cy="868680"/>
+            <a:ext cx="3840480" cy="868680"/>
           </a:xfrm>
           <a:prstGeom prst="rect">
             <a:avLst/>
@@ -10097,7 +11933,7 @@
         <p:spPr>
           <a:xfrm>
             <a:off x="7040880" y="4782312"/>
-            <a:ext cx="4297680" cy="868680"/>
+            <a:ext cx="3840480" cy="868680"/>
           </a:xfrm>
           <a:prstGeom prst="rect">
             <a:avLst/>
@@ -10164,7 +12000,7 @@
             <a:avLst/>
           </a:prstGeom>
           <a:solidFill>
-            <a:srgbClr val="2A9D8F"/>
+            <a:srgbClr val="0A9396"/>
           </a:solidFill>
           <a:ln>
             <a:noFill/>
@@ -10219,11 +12055,11 @@
             <a:r>
               <a:rPr sz="1300" b="1" i="0">
                 <a:solidFill>
-                  <a:srgbClr val="2A9D8F"/>
+                  <a:srgbClr val="0A9396"/>
                 </a:solidFill>
                 <a:latin typeface="Arial"/>
               </a:rPr>
-              <a:t>ANSWER REVEAL</a:t>
+              <a:t>QUIZ QUESTION</a:t>
             </a:r>
           </a:p>
         </p:txBody>
@@ -10258,7 +12094,7 @@
                 </a:solidFill>
                 <a:latin typeface="Calibri"/>
               </a:rPr>
-              <a:t>Q4 — Answer</a:t>
+              <a:t>Q4 - Identify</a:t>
             </a:r>
           </a:p>
         </p:txBody>
@@ -10347,166 +12183,6 @@
           <a:prstGeom prst="roundRect">
             <a:avLst>
               <a:gd name="adj" fmla="val 4000"/>
-            </a:avLst>
-          </a:prstGeom>
-          <a:solidFill>
-            <a:srgbClr val="E9F5F0"/>
-          </a:solidFill>
-          <a:ln>
-            <a:noFill/>
-          </a:ln>
-          <a:effectLst/>
-        </p:spPr>
-        <p:style>
-          <a:lnRef idx="1">
-            <a:schemeClr val="accent1"/>
-          </a:lnRef>
-          <a:fillRef idx="3">
-            <a:schemeClr val="accent1"/>
-          </a:fillRef>
-          <a:effectRef idx="2">
-            <a:schemeClr val="accent1"/>
-          </a:effectRef>
-          <a:fontRef idx="minor">
-            <a:schemeClr val="lt1"/>
-          </a:fontRef>
-        </p:style>
-        <p:txBody>
-          <a:bodyPr rtlCol="0" anchor="ctr"/>
-          <a:lstStyle/>
-          <a:p>
-            <a:pPr algn="ctr"/>
-          </a:p>
-        </p:txBody>
-      </p:sp>
-      <p:sp>
-        <p:nvSpPr>
-          <p:cNvPr id="8" name="Oval 7"/>
-          <p:cNvSpPr/>
-          <p:nvPr/>
-        </p:nvSpPr>
-        <p:spPr>
-          <a:xfrm>
-            <a:off x="1005840" y="2240280"/>
-            <a:ext cx="731520" cy="731520"/>
-          </a:xfrm>
-          <a:prstGeom prst="ellipse">
-            <a:avLst/>
-          </a:prstGeom>
-          <a:solidFill>
-            <a:srgbClr val="2A9D8F"/>
-          </a:solidFill>
-          <a:ln>
-            <a:noFill/>
-          </a:ln>
-          <a:effectLst/>
-        </p:spPr>
-        <p:style>
-          <a:lnRef idx="1">
-            <a:schemeClr val="accent1"/>
-          </a:lnRef>
-          <a:fillRef idx="3">
-            <a:schemeClr val="accent1"/>
-          </a:fillRef>
-          <a:effectRef idx="2">
-            <a:schemeClr val="accent1"/>
-          </a:effectRef>
-          <a:fontRef idx="minor">
-            <a:schemeClr val="lt1"/>
-          </a:fontRef>
-        </p:style>
-        <p:txBody>
-          <a:bodyPr rtlCol="0" anchor="ctr"/>
-          <a:lstStyle/>
-          <a:p>
-            <a:pPr algn="ctr"/>
-          </a:p>
-        </p:txBody>
-      </p:sp>
-      <p:sp>
-        <p:nvSpPr>
-          <p:cNvPr id="9" name="TextBox 8"/>
-          <p:cNvSpPr txBox="1"/>
-          <p:nvPr/>
-        </p:nvSpPr>
-        <p:spPr>
-          <a:xfrm>
-            <a:off x="1005840" y="2240280"/>
-            <a:ext cx="731520" cy="731520"/>
-          </a:xfrm>
-          <a:prstGeom prst="rect">
-            <a:avLst/>
-          </a:prstGeom>
-          <a:noFill/>
-        </p:spPr>
-        <p:txBody>
-          <a:bodyPr wrap="square" anchor="ctr" lIns="0" rIns="0" tIns="0" bIns="0">
-            <a:spAutoFit/>
-          </a:bodyPr>
-          <a:lstStyle/>
-          <a:p>
-            <a:pPr algn="ctr"/>
-            <a:r>
-              <a:rPr sz="3000" b="1" i="0">
-                <a:solidFill>
-                  <a:srgbClr val="FFFFFF"/>
-                </a:solidFill>
-                <a:latin typeface="Calibri"/>
-              </a:rPr>
-              <a:t>✓</a:t>
-            </a:r>
-          </a:p>
-        </p:txBody>
-      </p:sp>
-      <p:sp>
-        <p:nvSpPr>
-          <p:cNvPr id="10" name="TextBox 9"/>
-          <p:cNvSpPr txBox="1"/>
-          <p:nvPr/>
-        </p:nvSpPr>
-        <p:spPr>
-          <a:xfrm>
-            <a:off x="1920240" y="1828800"/>
-            <a:ext cx="9326880" cy="1554480"/>
-          </a:xfrm>
-          <a:prstGeom prst="rect">
-            <a:avLst/>
-          </a:prstGeom>
-          <a:noFill/>
-        </p:spPr>
-        <p:txBody>
-          <a:bodyPr wrap="square" anchor="ctr" lIns="0" rIns="0" tIns="0" bIns="0">
-            <a:spAutoFit/>
-          </a:bodyPr>
-          <a:lstStyle/>
-          <a:p>
-            <a:pPr algn="l"/>
-            <a:r>
-              <a:rPr sz="2200" b="1" i="0">
-                <a:solidFill>
-                  <a:srgbClr val="1D2433"/>
-                </a:solidFill>
-                <a:latin typeface="Calibri"/>
-              </a:rPr>
-              <a:t>C. A wheel and axle</a:t>
-            </a:r>
-          </a:p>
-        </p:txBody>
-      </p:sp>
-      <p:sp>
-        <p:nvSpPr>
-          <p:cNvPr id="11" name="Rounded Rectangle 10"/>
-          <p:cNvSpPr/>
-          <p:nvPr/>
-        </p:nvSpPr>
-        <p:spPr>
-          <a:xfrm>
-            <a:off x="640080" y="3657600"/>
-            <a:ext cx="10881360" cy="2011680"/>
-          </a:xfrm>
-          <a:prstGeom prst="roundRect">
-            <a:avLst>
-              <a:gd name="adj" fmla="val 3000"/>
             </a:avLst>
           </a:prstGeom>
           <a:solidFill>
@@ -10547,68 +12223,840 @@
       </p:sp>
       <p:sp>
         <p:nvSpPr>
+          <p:cNvPr id="8" name="TextBox 7"/>
+          <p:cNvSpPr txBox="1"/>
+          <p:nvPr/>
+        </p:nvSpPr>
+        <p:spPr>
+          <a:xfrm>
+            <a:off x="1005840" y="1828800"/>
+            <a:ext cx="10149840" cy="1554480"/>
+          </a:xfrm>
+          <a:prstGeom prst="rect">
+            <a:avLst/>
+          </a:prstGeom>
+          <a:noFill/>
+        </p:spPr>
+        <p:txBody>
+          <a:bodyPr wrap="square" anchor="ctr" lIns="0" rIns="0" tIns="0" bIns="0">
+            <a:spAutoFit/>
+          </a:bodyPr>
+          <a:lstStyle/>
+          <a:p>
+            <a:pPr algn="l"/>
+            <a:r>
+              <a:rPr sz="1900" b="1" i="0">
+                <a:solidFill>
+                  <a:srgbClr val="1D2433"/>
+                </a:solidFill>
+                <a:latin typeface="Calibri"/>
+              </a:rPr>
+              <a:t>A steering wheel is an example of which simple machine?</a:t>
+            </a:r>
+          </a:p>
+        </p:txBody>
+      </p:sp>
+      <p:sp>
+        <p:nvSpPr>
+          <p:cNvPr id="9" name="Rounded Rectangle 8"/>
+          <p:cNvSpPr/>
+          <p:nvPr/>
+        </p:nvSpPr>
+        <p:spPr>
+          <a:xfrm>
+            <a:off x="640080" y="3749039"/>
+            <a:ext cx="5349240" cy="868680"/>
+          </a:xfrm>
+          <a:prstGeom prst="roundRect">
+            <a:avLst>
+              <a:gd name="adj" fmla="val 12000"/>
+            </a:avLst>
+          </a:prstGeom>
+          <a:solidFill>
+            <a:srgbClr val="EAF1F4"/>
+          </a:solidFill>
+          <a:ln>
+            <a:noFill/>
+          </a:ln>
+          <a:effectLst/>
+        </p:spPr>
+        <p:style>
+          <a:lnRef idx="1">
+            <a:schemeClr val="accent1"/>
+          </a:lnRef>
+          <a:fillRef idx="3">
+            <a:schemeClr val="accent1"/>
+          </a:fillRef>
+          <a:effectRef idx="2">
+            <a:schemeClr val="accent1"/>
+          </a:effectRef>
+          <a:fontRef idx="minor">
+            <a:schemeClr val="lt1"/>
+          </a:fontRef>
+        </p:style>
+        <p:txBody>
+          <a:bodyPr rtlCol="0" anchor="ctr"/>
+          <a:lstStyle/>
+          <a:p>
+            <a:pPr algn="ctr"/>
+          </a:p>
+        </p:txBody>
+      </p:sp>
+      <p:sp>
+        <p:nvSpPr>
+          <p:cNvPr id="10" name="Oval 9"/>
+          <p:cNvSpPr/>
+          <p:nvPr/>
+        </p:nvSpPr>
+        <p:spPr>
+          <a:xfrm>
+            <a:off x="914400" y="3977639"/>
+            <a:ext cx="411480" cy="411480"/>
+          </a:xfrm>
+          <a:prstGeom prst="ellipse">
+            <a:avLst/>
+          </a:prstGeom>
+          <a:solidFill>
+            <a:srgbClr val="0A9396"/>
+          </a:solidFill>
+          <a:ln>
+            <a:noFill/>
+          </a:ln>
+          <a:effectLst/>
+        </p:spPr>
+        <p:style>
+          <a:lnRef idx="1">
+            <a:schemeClr val="accent1"/>
+          </a:lnRef>
+          <a:fillRef idx="3">
+            <a:schemeClr val="accent1"/>
+          </a:fillRef>
+          <a:effectRef idx="2">
+            <a:schemeClr val="accent1"/>
+          </a:effectRef>
+          <a:fontRef idx="minor">
+            <a:schemeClr val="lt1"/>
+          </a:fontRef>
+        </p:style>
+        <p:txBody>
+          <a:bodyPr rtlCol="0" anchor="ctr"/>
+          <a:lstStyle/>
+          <a:p>
+            <a:pPr algn="ctr"/>
+          </a:p>
+        </p:txBody>
+      </p:sp>
+      <p:sp>
+        <p:nvSpPr>
+          <p:cNvPr id="11" name="TextBox 10"/>
+          <p:cNvSpPr txBox="1"/>
+          <p:nvPr/>
+        </p:nvSpPr>
+        <p:spPr>
+          <a:xfrm>
+            <a:off x="914400" y="3977639"/>
+            <a:ext cx="411480" cy="411480"/>
+          </a:xfrm>
+          <a:prstGeom prst="rect">
+            <a:avLst/>
+          </a:prstGeom>
+          <a:noFill/>
+        </p:spPr>
+        <p:txBody>
+          <a:bodyPr wrap="square" anchor="ctr" lIns="0" rIns="0" tIns="0" bIns="0">
+            <a:spAutoFit/>
+          </a:bodyPr>
+          <a:lstStyle/>
+          <a:p>
+            <a:pPr algn="ctr"/>
+            <a:r>
+              <a:rPr sz="1400" b="1" i="0">
+                <a:solidFill>
+                  <a:srgbClr val="FFFFFF"/>
+                </a:solidFill>
+                <a:latin typeface="Calibri"/>
+              </a:rPr>
+              <a:t>A</a:t>
+            </a:r>
+          </a:p>
+        </p:txBody>
+      </p:sp>
+      <p:sp>
+        <p:nvSpPr>
           <p:cNvPr id="12" name="TextBox 11"/>
           <p:cNvSpPr txBox="1"/>
           <p:nvPr/>
         </p:nvSpPr>
         <p:spPr>
           <a:xfrm>
-            <a:off x="1005840" y="3886200"/>
-            <a:ext cx="4572000" cy="365760"/>
-          </a:xfrm>
-          <a:prstGeom prst="rect">
-            <a:avLst/>
-          </a:prstGeom>
-          <a:noFill/>
-        </p:spPr>
-        <p:txBody>
-          <a:bodyPr wrap="square" anchor="t" lIns="0" rIns="0" tIns="0" bIns="0">
+            <a:off x="1508760" y="3749039"/>
+            <a:ext cx="3840480" cy="868680"/>
+          </a:xfrm>
+          <a:prstGeom prst="rect">
+            <a:avLst/>
+          </a:prstGeom>
+          <a:noFill/>
+        </p:spPr>
+        <p:txBody>
+          <a:bodyPr wrap="square" anchor="ctr" lIns="0" rIns="0" tIns="0" bIns="0">
             <a:spAutoFit/>
           </a:bodyPr>
           <a:lstStyle/>
           <a:p>
             <a:pPr algn="l"/>
             <a:r>
+              <a:rPr sz="1450" b="0" i="0">
+                <a:solidFill>
+                  <a:srgbClr val="1D2433"/>
+                </a:solidFill>
+                <a:latin typeface="Calibri"/>
+              </a:rPr>
+              <a:t>A lever</a:t>
+            </a:r>
+          </a:p>
+        </p:txBody>
+      </p:sp>
+      <p:sp>
+        <p:nvSpPr>
+          <p:cNvPr id="13" name="Rounded Rectangle 12"/>
+          <p:cNvSpPr/>
+          <p:nvPr/>
+        </p:nvSpPr>
+        <p:spPr>
+          <a:xfrm>
+            <a:off x="6172200" y="3749039"/>
+            <a:ext cx="5349240" cy="868680"/>
+          </a:xfrm>
+          <a:prstGeom prst="roundRect">
+            <a:avLst>
+              <a:gd name="adj" fmla="val 12000"/>
+            </a:avLst>
+          </a:prstGeom>
+          <a:solidFill>
+            <a:srgbClr val="EAF1F4"/>
+          </a:solidFill>
+          <a:ln>
+            <a:noFill/>
+          </a:ln>
+          <a:effectLst/>
+        </p:spPr>
+        <p:style>
+          <a:lnRef idx="1">
+            <a:schemeClr val="accent1"/>
+          </a:lnRef>
+          <a:fillRef idx="3">
+            <a:schemeClr val="accent1"/>
+          </a:fillRef>
+          <a:effectRef idx="2">
+            <a:schemeClr val="accent1"/>
+          </a:effectRef>
+          <a:fontRef idx="minor">
+            <a:schemeClr val="lt1"/>
+          </a:fontRef>
+        </p:style>
+        <p:txBody>
+          <a:bodyPr rtlCol="0" anchor="ctr"/>
+          <a:lstStyle/>
+          <a:p>
+            <a:pPr algn="ctr"/>
+          </a:p>
+        </p:txBody>
+      </p:sp>
+      <p:sp>
+        <p:nvSpPr>
+          <p:cNvPr id="14" name="Oval 13"/>
+          <p:cNvSpPr/>
+          <p:nvPr/>
+        </p:nvSpPr>
+        <p:spPr>
+          <a:xfrm>
+            <a:off x="6446520" y="3977639"/>
+            <a:ext cx="411480" cy="411480"/>
+          </a:xfrm>
+          <a:prstGeom prst="ellipse">
+            <a:avLst/>
+          </a:prstGeom>
+          <a:solidFill>
+            <a:srgbClr val="0A9396"/>
+          </a:solidFill>
+          <a:ln>
+            <a:noFill/>
+          </a:ln>
+          <a:effectLst/>
+        </p:spPr>
+        <p:style>
+          <a:lnRef idx="1">
+            <a:schemeClr val="accent1"/>
+          </a:lnRef>
+          <a:fillRef idx="3">
+            <a:schemeClr val="accent1"/>
+          </a:fillRef>
+          <a:effectRef idx="2">
+            <a:schemeClr val="accent1"/>
+          </a:effectRef>
+          <a:fontRef idx="minor">
+            <a:schemeClr val="lt1"/>
+          </a:fontRef>
+        </p:style>
+        <p:txBody>
+          <a:bodyPr rtlCol="0" anchor="ctr"/>
+          <a:lstStyle/>
+          <a:p>
+            <a:pPr algn="ctr"/>
+          </a:p>
+        </p:txBody>
+      </p:sp>
+      <p:sp>
+        <p:nvSpPr>
+          <p:cNvPr id="15" name="TextBox 14"/>
+          <p:cNvSpPr txBox="1"/>
+          <p:nvPr/>
+        </p:nvSpPr>
+        <p:spPr>
+          <a:xfrm>
+            <a:off x="6446520" y="3977639"/>
+            <a:ext cx="411480" cy="411480"/>
+          </a:xfrm>
+          <a:prstGeom prst="rect">
+            <a:avLst/>
+          </a:prstGeom>
+          <a:noFill/>
+        </p:spPr>
+        <p:txBody>
+          <a:bodyPr wrap="square" anchor="ctr" lIns="0" rIns="0" tIns="0" bIns="0">
+            <a:spAutoFit/>
+          </a:bodyPr>
+          <a:lstStyle/>
+          <a:p>
+            <a:pPr algn="ctr"/>
+            <a:r>
               <a:rPr sz="1400" b="1" i="0">
                 <a:solidFill>
+                  <a:srgbClr val="FFFFFF"/>
+                </a:solidFill>
+                <a:latin typeface="Calibri"/>
+              </a:rPr>
+              <a:t>B</a:t>
+            </a:r>
+          </a:p>
+        </p:txBody>
+      </p:sp>
+      <p:sp>
+        <p:nvSpPr>
+          <p:cNvPr id="16" name="TextBox 15"/>
+          <p:cNvSpPr txBox="1"/>
+          <p:nvPr/>
+        </p:nvSpPr>
+        <p:spPr>
+          <a:xfrm>
+            <a:off x="7040880" y="3749039"/>
+            <a:ext cx="3840480" cy="868680"/>
+          </a:xfrm>
+          <a:prstGeom prst="rect">
+            <a:avLst/>
+          </a:prstGeom>
+          <a:noFill/>
+        </p:spPr>
+        <p:txBody>
+          <a:bodyPr wrap="square" anchor="ctr" lIns="0" rIns="0" tIns="0" bIns="0">
+            <a:spAutoFit/>
+          </a:bodyPr>
+          <a:lstStyle/>
+          <a:p>
+            <a:pPr algn="l"/>
+            <a:r>
+              <a:rPr sz="1450" b="0" i="0">
+                <a:solidFill>
+                  <a:srgbClr val="1D2433"/>
+                </a:solidFill>
+                <a:latin typeface="Calibri"/>
+              </a:rPr>
+              <a:t>A pulley</a:t>
+            </a:r>
+          </a:p>
+        </p:txBody>
+      </p:sp>
+      <p:sp>
+        <p:nvSpPr>
+          <p:cNvPr id="17" name="Rounded Rectangle 16"/>
+          <p:cNvSpPr/>
+          <p:nvPr/>
+        </p:nvSpPr>
+        <p:spPr>
+          <a:xfrm>
+            <a:off x="640080" y="4782312"/>
+            <a:ext cx="5349240" cy="868680"/>
+          </a:xfrm>
+          <a:prstGeom prst="roundRect">
+            <a:avLst>
+              <a:gd name="adj" fmla="val 12000"/>
+            </a:avLst>
+          </a:prstGeom>
+          <a:solidFill>
+            <a:srgbClr val="E9F5F0"/>
+          </a:solidFill>
+          <a:ln w="31750">
+            <a:solidFill>
+              <a:srgbClr val="2A9D8F"/>
+            </a:solidFill>
+          </a:ln>
+          <a:effectLst/>
+        </p:spPr>
+        <p:style>
+          <a:lnRef idx="1">
+            <a:schemeClr val="accent1"/>
+          </a:lnRef>
+          <a:fillRef idx="3">
+            <a:schemeClr val="accent1"/>
+          </a:fillRef>
+          <a:effectRef idx="2">
+            <a:schemeClr val="accent1"/>
+          </a:effectRef>
+          <a:fontRef idx="minor">
+            <a:schemeClr val="lt1"/>
+          </a:fontRef>
+        </p:style>
+        <p:txBody>
+          <a:bodyPr rtlCol="0" anchor="ctr"/>
+          <a:lstStyle/>
+          <a:p>
+            <a:pPr algn="ctr"/>
+          </a:p>
+        </p:txBody>
+      </p:sp>
+      <p:sp>
+        <p:nvSpPr>
+          <p:cNvPr id="18" name="Oval 17"/>
+          <p:cNvSpPr/>
+          <p:nvPr/>
+        </p:nvSpPr>
+        <p:spPr>
+          <a:xfrm>
+            <a:off x="914400" y="5010912"/>
+            <a:ext cx="411480" cy="411480"/>
+          </a:xfrm>
+          <a:prstGeom prst="ellipse">
+            <a:avLst/>
+          </a:prstGeom>
+          <a:solidFill>
+            <a:srgbClr val="2A9D8F"/>
+          </a:solidFill>
+          <a:ln>
+            <a:noFill/>
+          </a:ln>
+          <a:effectLst/>
+        </p:spPr>
+        <p:style>
+          <a:lnRef idx="1">
+            <a:schemeClr val="accent1"/>
+          </a:lnRef>
+          <a:fillRef idx="3">
+            <a:schemeClr val="accent1"/>
+          </a:fillRef>
+          <a:effectRef idx="2">
+            <a:schemeClr val="accent1"/>
+          </a:effectRef>
+          <a:fontRef idx="minor">
+            <a:schemeClr val="lt1"/>
+          </a:fontRef>
+        </p:style>
+        <p:txBody>
+          <a:bodyPr rtlCol="0" anchor="ctr"/>
+          <a:lstStyle/>
+          <a:p>
+            <a:pPr algn="ctr"/>
+          </a:p>
+        </p:txBody>
+      </p:sp>
+      <p:sp>
+        <p:nvSpPr>
+          <p:cNvPr id="19" name="TextBox 18"/>
+          <p:cNvSpPr txBox="1"/>
+          <p:nvPr/>
+        </p:nvSpPr>
+        <p:spPr>
+          <a:xfrm>
+            <a:off x="914400" y="5010912"/>
+            <a:ext cx="411480" cy="411480"/>
+          </a:xfrm>
+          <a:prstGeom prst="rect">
+            <a:avLst/>
+          </a:prstGeom>
+          <a:noFill/>
+        </p:spPr>
+        <p:txBody>
+          <a:bodyPr wrap="square" anchor="ctr" lIns="0" rIns="0" tIns="0" bIns="0">
+            <a:spAutoFit/>
+          </a:bodyPr>
+          <a:lstStyle/>
+          <a:p>
+            <a:pPr algn="ctr"/>
+            <a:r>
+              <a:rPr sz="1400" b="1" i="0">
+                <a:solidFill>
+                  <a:srgbClr val="FFFFFF"/>
+                </a:solidFill>
+                <a:latin typeface="Calibri"/>
+              </a:rPr>
+              <a:t>C</a:t>
+            </a:r>
+          </a:p>
+        </p:txBody>
+      </p:sp>
+      <p:sp>
+        <p:nvSpPr>
+          <p:cNvPr id="20" name="TextBox 19"/>
+          <p:cNvSpPr txBox="1"/>
+          <p:nvPr/>
+        </p:nvSpPr>
+        <p:spPr>
+          <a:xfrm>
+            <a:off x="1508760" y="4782312"/>
+            <a:ext cx="3840480" cy="868680"/>
+          </a:xfrm>
+          <a:prstGeom prst="rect">
+            <a:avLst/>
+          </a:prstGeom>
+          <a:noFill/>
+        </p:spPr>
+        <p:txBody>
+          <a:bodyPr wrap="square" anchor="ctr" lIns="0" rIns="0" tIns="0" bIns="0">
+            <a:spAutoFit/>
+          </a:bodyPr>
+          <a:lstStyle/>
+          <a:p>
+            <a:pPr algn="l"/>
+            <a:r>
+              <a:rPr sz="1450" b="1" i="0">
+                <a:solidFill>
+                  <a:srgbClr val="1D2433"/>
+                </a:solidFill>
+                <a:latin typeface="Calibri"/>
+              </a:rPr>
+              <a:t>A wheel and axle</a:t>
+            </a:r>
+          </a:p>
+        </p:txBody>
+      </p:sp>
+      <p:sp>
+        <p:nvSpPr>
+          <p:cNvPr id="21" name="Oval 20"/>
+          <p:cNvSpPr/>
+          <p:nvPr/>
+        </p:nvSpPr>
+        <p:spPr>
+          <a:xfrm>
+            <a:off x="5440680" y="5029200"/>
+            <a:ext cx="365760" cy="365760"/>
+          </a:xfrm>
+          <a:prstGeom prst="ellipse">
+            <a:avLst/>
+          </a:prstGeom>
+          <a:solidFill>
+            <a:srgbClr val="2A9D8F"/>
+          </a:solidFill>
+          <a:ln>
+            <a:noFill/>
+          </a:ln>
+          <a:effectLst/>
+        </p:spPr>
+        <p:style>
+          <a:lnRef idx="1">
+            <a:schemeClr val="accent1"/>
+          </a:lnRef>
+          <a:fillRef idx="3">
+            <a:schemeClr val="accent1"/>
+          </a:fillRef>
+          <a:effectRef idx="2">
+            <a:schemeClr val="accent1"/>
+          </a:effectRef>
+          <a:fontRef idx="minor">
+            <a:schemeClr val="lt1"/>
+          </a:fontRef>
+        </p:style>
+        <p:txBody>
+          <a:bodyPr rtlCol="0" anchor="ctr"/>
+          <a:lstStyle/>
+          <a:p>
+            <a:pPr algn="ctr"/>
+          </a:p>
+        </p:txBody>
+      </p:sp>
+      <p:sp>
+        <p:nvSpPr>
+          <p:cNvPr id="22" name="TextBox 21"/>
+          <p:cNvSpPr txBox="1"/>
+          <p:nvPr/>
+        </p:nvSpPr>
+        <p:spPr>
+          <a:xfrm>
+            <a:off x="5440680" y="4983479"/>
+            <a:ext cx="365760" cy="365760"/>
+          </a:xfrm>
+          <a:prstGeom prst="rect">
+            <a:avLst/>
+          </a:prstGeom>
+          <a:noFill/>
+        </p:spPr>
+        <p:txBody>
+          <a:bodyPr wrap="square" anchor="ctr" lIns="0" rIns="0" tIns="0" bIns="0">
+            <a:spAutoFit/>
+          </a:bodyPr>
+          <a:lstStyle/>
+          <a:p>
+            <a:pPr algn="ctr"/>
+            <a:r>
+              <a:rPr sz="1600" b="1" i="0">
+                <a:solidFill>
+                  <a:srgbClr val="FFFFFF"/>
+                </a:solidFill>
+                <a:latin typeface="Calibri"/>
+              </a:rPr>
+              <a:t>✓</a:t>
+            </a:r>
+          </a:p>
+        </p:txBody>
+      </p:sp>
+      <p:sp>
+        <p:nvSpPr>
+          <p:cNvPr id="23" name="Rounded Rectangle 22"/>
+          <p:cNvSpPr/>
+          <p:nvPr/>
+        </p:nvSpPr>
+        <p:spPr>
+          <a:xfrm>
+            <a:off x="6172200" y="4782312"/>
+            <a:ext cx="5349240" cy="868680"/>
+          </a:xfrm>
+          <a:prstGeom prst="roundRect">
+            <a:avLst>
+              <a:gd name="adj" fmla="val 12000"/>
+            </a:avLst>
+          </a:prstGeom>
+          <a:solidFill>
+            <a:srgbClr val="EAF1F4"/>
+          </a:solidFill>
+          <a:ln>
+            <a:noFill/>
+          </a:ln>
+          <a:effectLst/>
+        </p:spPr>
+        <p:style>
+          <a:lnRef idx="1">
+            <a:schemeClr val="accent1"/>
+          </a:lnRef>
+          <a:fillRef idx="3">
+            <a:schemeClr val="accent1"/>
+          </a:fillRef>
+          <a:effectRef idx="2">
+            <a:schemeClr val="accent1"/>
+          </a:effectRef>
+          <a:fontRef idx="minor">
+            <a:schemeClr val="lt1"/>
+          </a:fontRef>
+        </p:style>
+        <p:txBody>
+          <a:bodyPr rtlCol="0" anchor="ctr"/>
+          <a:lstStyle/>
+          <a:p>
+            <a:pPr algn="ctr"/>
+          </a:p>
+        </p:txBody>
+      </p:sp>
+      <p:sp>
+        <p:nvSpPr>
+          <p:cNvPr id="24" name="Oval 23"/>
+          <p:cNvSpPr/>
+          <p:nvPr/>
+        </p:nvSpPr>
+        <p:spPr>
+          <a:xfrm>
+            <a:off x="6446520" y="5010912"/>
+            <a:ext cx="411480" cy="411480"/>
+          </a:xfrm>
+          <a:prstGeom prst="ellipse">
+            <a:avLst/>
+          </a:prstGeom>
+          <a:solidFill>
+            <a:srgbClr val="0A9396"/>
+          </a:solidFill>
+          <a:ln>
+            <a:noFill/>
+          </a:ln>
+          <a:effectLst/>
+        </p:spPr>
+        <p:style>
+          <a:lnRef idx="1">
+            <a:schemeClr val="accent1"/>
+          </a:lnRef>
+          <a:fillRef idx="3">
+            <a:schemeClr val="accent1"/>
+          </a:fillRef>
+          <a:effectRef idx="2">
+            <a:schemeClr val="accent1"/>
+          </a:effectRef>
+          <a:fontRef idx="minor">
+            <a:schemeClr val="lt1"/>
+          </a:fontRef>
+        </p:style>
+        <p:txBody>
+          <a:bodyPr rtlCol="0" anchor="ctr"/>
+          <a:lstStyle/>
+          <a:p>
+            <a:pPr algn="ctr"/>
+          </a:p>
+        </p:txBody>
+      </p:sp>
+      <p:sp>
+        <p:nvSpPr>
+          <p:cNvPr id="25" name="TextBox 24"/>
+          <p:cNvSpPr txBox="1"/>
+          <p:nvPr/>
+        </p:nvSpPr>
+        <p:spPr>
+          <a:xfrm>
+            <a:off x="6446520" y="5010912"/>
+            <a:ext cx="411480" cy="411480"/>
+          </a:xfrm>
+          <a:prstGeom prst="rect">
+            <a:avLst/>
+          </a:prstGeom>
+          <a:noFill/>
+        </p:spPr>
+        <p:txBody>
+          <a:bodyPr wrap="square" anchor="ctr" lIns="0" rIns="0" tIns="0" bIns="0">
+            <a:spAutoFit/>
+          </a:bodyPr>
+          <a:lstStyle/>
+          <a:p>
+            <a:pPr algn="ctr"/>
+            <a:r>
+              <a:rPr sz="1400" b="1" i="0">
+                <a:solidFill>
+                  <a:srgbClr val="FFFFFF"/>
+                </a:solidFill>
+                <a:latin typeface="Calibri"/>
+              </a:rPr>
+              <a:t>D</a:t>
+            </a:r>
+          </a:p>
+        </p:txBody>
+      </p:sp>
+      <p:sp>
+        <p:nvSpPr>
+          <p:cNvPr id="26" name="TextBox 25"/>
+          <p:cNvSpPr txBox="1"/>
+          <p:nvPr/>
+        </p:nvSpPr>
+        <p:spPr>
+          <a:xfrm>
+            <a:off x="7040880" y="4782312"/>
+            <a:ext cx="3840480" cy="868680"/>
+          </a:xfrm>
+          <a:prstGeom prst="rect">
+            <a:avLst/>
+          </a:prstGeom>
+          <a:noFill/>
+        </p:spPr>
+        <p:txBody>
+          <a:bodyPr wrap="square" anchor="ctr" lIns="0" rIns="0" tIns="0" bIns="0">
+            <a:spAutoFit/>
+          </a:bodyPr>
+          <a:lstStyle/>
+          <a:p>
+            <a:pPr algn="l"/>
+            <a:r>
+              <a:rPr sz="1450" b="0" i="0">
+                <a:solidFill>
+                  <a:srgbClr val="1D2433"/>
+                </a:solidFill>
+                <a:latin typeface="Calibri"/>
+              </a:rPr>
+              <a:t>A wedge</a:t>
+            </a:r>
+          </a:p>
+        </p:txBody>
+      </p:sp>
+      <p:sp>
+        <p:nvSpPr>
+          <p:cNvPr id="27" name="Rounded Rectangle 26"/>
+          <p:cNvSpPr/>
+          <p:nvPr/>
+        </p:nvSpPr>
+        <p:spPr>
+          <a:xfrm>
+            <a:off x="640080" y="5779008"/>
+            <a:ext cx="10881360" cy="566928"/>
+          </a:xfrm>
+          <a:prstGeom prst="roundRect">
+            <a:avLst>
+              <a:gd name="adj" fmla="val 10000"/>
+            </a:avLst>
+          </a:prstGeom>
+          <a:solidFill>
+            <a:srgbClr val="EEF2F7"/>
+          </a:solidFill>
+          <a:ln>
+            <a:noFill/>
+          </a:ln>
+          <a:effectLst/>
+        </p:spPr>
+        <p:style>
+          <a:lnRef idx="1">
+            <a:schemeClr val="accent1"/>
+          </a:lnRef>
+          <a:fillRef idx="3">
+            <a:schemeClr val="accent1"/>
+          </a:fillRef>
+          <a:effectRef idx="2">
+            <a:schemeClr val="accent1"/>
+          </a:effectRef>
+          <a:fontRef idx="minor">
+            <a:schemeClr val="lt1"/>
+          </a:fontRef>
+        </p:style>
+        <p:txBody>
+          <a:bodyPr rtlCol="0" anchor="ctr"/>
+          <a:lstStyle/>
+          <a:p>
+            <a:pPr algn="ctr"/>
+          </a:p>
+        </p:txBody>
+      </p:sp>
+      <p:sp>
+        <p:nvSpPr>
+          <p:cNvPr id="28" name="TextBox 27"/>
+          <p:cNvSpPr txBox="1"/>
+          <p:nvPr/>
+        </p:nvSpPr>
+        <p:spPr>
+          <a:xfrm>
+            <a:off x="914400" y="5779008"/>
+            <a:ext cx="10332720" cy="566928"/>
+          </a:xfrm>
+          <a:prstGeom prst="rect">
+            <a:avLst/>
+          </a:prstGeom>
+          <a:noFill/>
+        </p:spPr>
+        <p:txBody>
+          <a:bodyPr wrap="square" anchor="ctr" lIns="0" rIns="0" tIns="0" bIns="0">
+            <a:spAutoFit/>
+          </a:bodyPr>
+          <a:lstStyle/>
+          <a:p>
+            <a:pPr algn="l"/>
+            <a:r>
+              <a:rPr sz="1250" b="1" i="0">
+                <a:solidFill>
                   <a:srgbClr val="2A9D8F"/>
                 </a:solidFill>
                 <a:latin typeface="Arial"/>
               </a:rPr>
-              <a:t>WHY</a:t>
-            </a:r>
-          </a:p>
-        </p:txBody>
-      </p:sp>
-      <p:sp>
-        <p:nvSpPr>
-          <p:cNvPr id="13" name="TextBox 12"/>
-          <p:cNvSpPr txBox="1"/>
-          <p:nvPr/>
-        </p:nvSpPr>
-        <p:spPr>
-          <a:xfrm>
-            <a:off x="1005840" y="4297680"/>
-            <a:ext cx="10149840" cy="1280160"/>
-          </a:xfrm>
-          <a:prstGeom prst="rect">
-            <a:avLst/>
-          </a:prstGeom>
-          <a:noFill/>
-        </p:spPr>
-        <p:txBody>
-          <a:bodyPr wrap="square" anchor="t" lIns="0" rIns="0" tIns="0" bIns="0">
-            <a:spAutoFit/>
-          </a:bodyPr>
-          <a:lstStyle/>
-          <a:p>
-            <a:pPr algn="l">
-              <a:lnSpc>
-                <a:spcPct val="110000"/>
-              </a:lnSpc>
-            </a:pPr>
-            <a:r>
-              <a:rPr sz="1600" b="0" i="0">
+              <a:t>Why  </a:t>
+            </a:r>
+            <a:r>
+              <a:rPr sz="1200" b="0" i="0">
                 <a:solidFill>
                   <a:srgbClr val="1D2433"/>
                 </a:solidFill>
@@ -14332,9 +16780,33 @@
           </a:p>
         </p:txBody>
       </p:sp>
-      <p:sp>
-        <p:nvSpPr>
-          <p:cNvPr id="9" name="TextBox 8"/>
+      <p:pic>
+        <p:nvPicPr>
+          <p:cNvPr id="9" name="Picture 8" descr="icon_gear.png"/>
+          <p:cNvPicPr>
+            <a:picLocks noChangeAspect="1"/>
+          </p:cNvPicPr>
+          <p:nvPr/>
+        </p:nvPicPr>
+        <p:blipFill>
+          <a:blip r:embed="rId2"/>
+          <a:stretch>
+            <a:fillRect/>
+          </a:stretch>
+        </p:blipFill>
+        <p:spPr>
+          <a:xfrm>
+            <a:off x="1051560" y="2304288"/>
+            <a:ext cx="320040" cy="320040"/>
+          </a:xfrm>
+          <a:prstGeom prst="rect">
+            <a:avLst/>
+          </a:prstGeom>
+        </p:spPr>
+      </p:pic>
+      <p:sp>
+        <p:nvSpPr>
+          <p:cNvPr id="10" name="TextBox 9"/>
           <p:cNvSpPr txBox="1"/>
           <p:nvPr/>
         </p:nvSpPr>
@@ -14369,7 +16841,7 @@
       </p:sp>
       <p:sp>
         <p:nvSpPr>
-          <p:cNvPr id="10" name="TextBox 9"/>
+          <p:cNvPr id="11" name="TextBox 10"/>
           <p:cNvSpPr txBox="1"/>
           <p:nvPr/>
         </p:nvSpPr>
@@ -14404,7 +16876,7 @@
       </p:sp>
       <p:sp>
         <p:nvSpPr>
-          <p:cNvPr id="11" name="Rounded Rectangle 10"/>
+          <p:cNvPr id="12" name="Rounded Rectangle 11"/>
           <p:cNvSpPr/>
           <p:nvPr/>
         </p:nvSpPr>
@@ -14456,7 +16928,7 @@
       </p:sp>
       <p:sp>
         <p:nvSpPr>
-          <p:cNvPr id="12" name="Rounded Rectangle 11"/>
+          <p:cNvPr id="13" name="Rounded Rectangle 12"/>
           <p:cNvSpPr/>
           <p:nvPr/>
         </p:nvSpPr>
@@ -14500,9 +16972,33 @@
           </a:p>
         </p:txBody>
       </p:sp>
-      <p:sp>
-        <p:nvSpPr>
-          <p:cNvPr id="13" name="TextBox 12"/>
+      <p:pic>
+        <p:nvPicPr>
+          <p:cNvPr id="14" name="Picture 13" descr="icon_gear.png"/>
+          <p:cNvPicPr>
+            <a:picLocks noChangeAspect="1"/>
+          </p:cNvPicPr>
+          <p:nvPr/>
+        </p:nvPicPr>
+        <p:blipFill>
+          <a:blip r:embed="rId2"/>
+          <a:stretch>
+            <a:fillRect/>
+          </a:stretch>
+        </p:blipFill>
+        <p:spPr>
+          <a:xfrm>
+            <a:off x="6629400" y="2304288"/>
+            <a:ext cx="320040" cy="320040"/>
+          </a:xfrm>
+          <a:prstGeom prst="rect">
+            <a:avLst/>
+          </a:prstGeom>
+        </p:spPr>
+      </p:pic>
+      <p:sp>
+        <p:nvSpPr>
+          <p:cNvPr id="15" name="TextBox 14"/>
           <p:cNvSpPr txBox="1"/>
           <p:nvPr/>
         </p:nvSpPr>
@@ -14537,7 +17033,7 @@
       </p:sp>
       <p:sp>
         <p:nvSpPr>
-          <p:cNvPr id="14" name="TextBox 13"/>
+          <p:cNvPr id="16" name="TextBox 15"/>
           <p:cNvSpPr txBox="1"/>
           <p:nvPr/>
         </p:nvSpPr>
@@ -14572,7 +17068,7 @@
       </p:sp>
       <p:sp>
         <p:nvSpPr>
-          <p:cNvPr id="15" name="Rounded Rectangle 14"/>
+          <p:cNvPr id="17" name="Rounded Rectangle 16"/>
           <p:cNvSpPr/>
           <p:nvPr/>
         </p:nvSpPr>
@@ -14624,7 +17120,7 @@
       </p:sp>
       <p:sp>
         <p:nvSpPr>
-          <p:cNvPr id="16" name="Rounded Rectangle 15"/>
+          <p:cNvPr id="18" name="Rounded Rectangle 17"/>
           <p:cNvSpPr/>
           <p:nvPr/>
         </p:nvSpPr>
@@ -14668,9 +17164,33 @@
           </a:p>
         </p:txBody>
       </p:sp>
-      <p:sp>
-        <p:nvSpPr>
-          <p:cNvPr id="17" name="TextBox 16"/>
+      <p:pic>
+        <p:nvPicPr>
+          <p:cNvPr id="19" name="Picture 18" descr="icon_star.png"/>
+          <p:cNvPicPr>
+            <a:picLocks noChangeAspect="1"/>
+          </p:cNvPicPr>
+          <p:nvPr/>
+        </p:nvPicPr>
+        <p:blipFill>
+          <a:blip r:embed="rId3"/>
+          <a:stretch>
+            <a:fillRect/>
+          </a:stretch>
+        </p:blipFill>
+        <p:spPr>
+          <a:xfrm>
+            <a:off x="1051560" y="4133087"/>
+            <a:ext cx="320040" cy="320040"/>
+          </a:xfrm>
+          <a:prstGeom prst="rect">
+            <a:avLst/>
+          </a:prstGeom>
+        </p:spPr>
+      </p:pic>
+      <p:sp>
+        <p:nvSpPr>
+          <p:cNvPr id="20" name="TextBox 19"/>
           <p:cNvSpPr txBox="1"/>
           <p:nvPr/>
         </p:nvSpPr>
@@ -14705,7 +17225,7 @@
       </p:sp>
       <p:sp>
         <p:nvSpPr>
-          <p:cNvPr id="18" name="TextBox 17"/>
+          <p:cNvPr id="21" name="TextBox 20"/>
           <p:cNvSpPr txBox="1"/>
           <p:nvPr/>
         </p:nvSpPr>
@@ -14740,7 +17260,7 @@
       </p:sp>
       <p:sp>
         <p:nvSpPr>
-          <p:cNvPr id="19" name="Rounded Rectangle 18"/>
+          <p:cNvPr id="22" name="Rounded Rectangle 21"/>
           <p:cNvSpPr/>
           <p:nvPr/>
         </p:nvSpPr>
@@ -14792,7 +17312,7 @@
       </p:sp>
       <p:sp>
         <p:nvSpPr>
-          <p:cNvPr id="20" name="Rounded Rectangle 19"/>
+          <p:cNvPr id="23" name="Rounded Rectangle 22"/>
           <p:cNvSpPr/>
           <p:nvPr/>
         </p:nvSpPr>
@@ -14836,9 +17356,33 @@
           </a:p>
         </p:txBody>
       </p:sp>
-      <p:sp>
-        <p:nvSpPr>
-          <p:cNvPr id="21" name="TextBox 20"/>
+      <p:pic>
+        <p:nvPicPr>
+          <p:cNvPr id="24" name="Picture 23" descr="icon_star.png"/>
+          <p:cNvPicPr>
+            <a:picLocks noChangeAspect="1"/>
+          </p:cNvPicPr>
+          <p:nvPr/>
+        </p:nvPicPr>
+        <p:blipFill>
+          <a:blip r:embed="rId3"/>
+          <a:stretch>
+            <a:fillRect/>
+          </a:stretch>
+        </p:blipFill>
+        <p:spPr>
+          <a:xfrm>
+            <a:off x="6629400" y="4133087"/>
+            <a:ext cx="320040" cy="320040"/>
+          </a:xfrm>
+          <a:prstGeom prst="rect">
+            <a:avLst/>
+          </a:prstGeom>
+        </p:spPr>
+      </p:pic>
+      <p:sp>
+        <p:nvSpPr>
+          <p:cNvPr id="25" name="TextBox 24"/>
           <p:cNvSpPr txBox="1"/>
           <p:nvPr/>
         </p:nvSpPr>
@@ -14873,7 +17417,7 @@
       </p:sp>
       <p:sp>
         <p:nvSpPr>
-          <p:cNvPr id="22" name="TextBox 21"/>
+          <p:cNvPr id="26" name="TextBox 25"/>
           <p:cNvSpPr txBox="1"/>
           <p:nvPr/>
         </p:nvSpPr>
@@ -15793,7 +18337,7 @@
                 </a:solidFill>
                 <a:latin typeface="Calibri"/>
               </a:rPr>
-              <a:t>Q1 — Inclined plane</a:t>
+              <a:t>Q1 - Inclined plane</a:t>
             </a:r>
           </a:p>
         </p:txBody>
@@ -16089,7 +18633,7 @@
         <p:spPr>
           <a:xfrm>
             <a:off x="1508760" y="3749039"/>
-            <a:ext cx="4297680" cy="868680"/>
+            <a:ext cx="3840480" cy="868680"/>
           </a:xfrm>
           <a:prstGeom prst="rect">
             <a:avLst/>
@@ -16249,7 +18793,7 @@
         <p:spPr>
           <a:xfrm>
             <a:off x="7040880" y="3749039"/>
-            <a:ext cx="4297680" cy="868680"/>
+            <a:ext cx="3840480" cy="868680"/>
           </a:xfrm>
           <a:prstGeom prst="rect">
             <a:avLst/>
@@ -16409,7 +18953,7 @@
         <p:spPr>
           <a:xfrm>
             <a:off x="1508760" y="4782312"/>
-            <a:ext cx="4297680" cy="868680"/>
+            <a:ext cx="3840480" cy="868680"/>
           </a:xfrm>
           <a:prstGeom prst="rect">
             <a:avLst/>
@@ -16569,7 +19113,7 @@
         <p:spPr>
           <a:xfrm>
             <a:off x="7040880" y="4782312"/>
-            <a:ext cx="4297680" cy="868680"/>
+            <a:ext cx="3840480" cy="868680"/>
           </a:xfrm>
           <a:prstGeom prst="rect">
             <a:avLst/>
@@ -16636,7 +19180,7 @@
             <a:avLst/>
           </a:prstGeom>
           <a:solidFill>
-            <a:srgbClr val="2A9D8F"/>
+            <a:srgbClr val="0A9396"/>
           </a:solidFill>
           <a:ln>
             <a:noFill/>
@@ -16691,11 +19235,11 @@
             <a:r>
               <a:rPr sz="1300" b="1" i="0">
                 <a:solidFill>
-                  <a:srgbClr val="2A9D8F"/>
+                  <a:srgbClr val="0A9396"/>
                 </a:solidFill>
                 <a:latin typeface="Arial"/>
               </a:rPr>
-              <a:t>ANSWER REVEAL</a:t>
+              <a:t>QUIZ QUESTION</a:t>
             </a:r>
           </a:p>
         </p:txBody>
@@ -16730,7 +19274,7 @@
                 </a:solidFill>
                 <a:latin typeface="Calibri"/>
               </a:rPr>
-              <a:t>Q1 — Answer</a:t>
+              <a:t>Q1 - Inclined plane</a:t>
             </a:r>
           </a:p>
         </p:txBody>
@@ -16819,166 +19363,6 @@
           <a:prstGeom prst="roundRect">
             <a:avLst>
               <a:gd name="adj" fmla="val 4000"/>
-            </a:avLst>
-          </a:prstGeom>
-          <a:solidFill>
-            <a:srgbClr val="E9F5F0"/>
-          </a:solidFill>
-          <a:ln>
-            <a:noFill/>
-          </a:ln>
-          <a:effectLst/>
-        </p:spPr>
-        <p:style>
-          <a:lnRef idx="1">
-            <a:schemeClr val="accent1"/>
-          </a:lnRef>
-          <a:fillRef idx="3">
-            <a:schemeClr val="accent1"/>
-          </a:fillRef>
-          <a:effectRef idx="2">
-            <a:schemeClr val="accent1"/>
-          </a:effectRef>
-          <a:fontRef idx="minor">
-            <a:schemeClr val="lt1"/>
-          </a:fontRef>
-        </p:style>
-        <p:txBody>
-          <a:bodyPr rtlCol="0" anchor="ctr"/>
-          <a:lstStyle/>
-          <a:p>
-            <a:pPr algn="ctr"/>
-          </a:p>
-        </p:txBody>
-      </p:sp>
-      <p:sp>
-        <p:nvSpPr>
-          <p:cNvPr id="8" name="Oval 7"/>
-          <p:cNvSpPr/>
-          <p:nvPr/>
-        </p:nvSpPr>
-        <p:spPr>
-          <a:xfrm>
-            <a:off x="1005840" y="2240280"/>
-            <a:ext cx="731520" cy="731520"/>
-          </a:xfrm>
-          <a:prstGeom prst="ellipse">
-            <a:avLst/>
-          </a:prstGeom>
-          <a:solidFill>
-            <a:srgbClr val="2A9D8F"/>
-          </a:solidFill>
-          <a:ln>
-            <a:noFill/>
-          </a:ln>
-          <a:effectLst/>
-        </p:spPr>
-        <p:style>
-          <a:lnRef idx="1">
-            <a:schemeClr val="accent1"/>
-          </a:lnRef>
-          <a:fillRef idx="3">
-            <a:schemeClr val="accent1"/>
-          </a:fillRef>
-          <a:effectRef idx="2">
-            <a:schemeClr val="accent1"/>
-          </a:effectRef>
-          <a:fontRef idx="minor">
-            <a:schemeClr val="lt1"/>
-          </a:fontRef>
-        </p:style>
-        <p:txBody>
-          <a:bodyPr rtlCol="0" anchor="ctr"/>
-          <a:lstStyle/>
-          <a:p>
-            <a:pPr algn="ctr"/>
-          </a:p>
-        </p:txBody>
-      </p:sp>
-      <p:sp>
-        <p:nvSpPr>
-          <p:cNvPr id="9" name="TextBox 8"/>
-          <p:cNvSpPr txBox="1"/>
-          <p:nvPr/>
-        </p:nvSpPr>
-        <p:spPr>
-          <a:xfrm>
-            <a:off x="1005840" y="2240280"/>
-            <a:ext cx="731520" cy="731520"/>
-          </a:xfrm>
-          <a:prstGeom prst="rect">
-            <a:avLst/>
-          </a:prstGeom>
-          <a:noFill/>
-        </p:spPr>
-        <p:txBody>
-          <a:bodyPr wrap="square" anchor="ctr" lIns="0" rIns="0" tIns="0" bIns="0">
-            <a:spAutoFit/>
-          </a:bodyPr>
-          <a:lstStyle/>
-          <a:p>
-            <a:pPr algn="ctr"/>
-            <a:r>
-              <a:rPr sz="3000" b="1" i="0">
-                <a:solidFill>
-                  <a:srgbClr val="FFFFFF"/>
-                </a:solidFill>
-                <a:latin typeface="Calibri"/>
-              </a:rPr>
-              <a:t>✓</a:t>
-            </a:r>
-          </a:p>
-        </p:txBody>
-      </p:sp>
-      <p:sp>
-        <p:nvSpPr>
-          <p:cNvPr id="10" name="TextBox 9"/>
-          <p:cNvSpPr txBox="1"/>
-          <p:nvPr/>
-        </p:nvSpPr>
-        <p:spPr>
-          <a:xfrm>
-            <a:off x="1920240" y="1828800"/>
-            <a:ext cx="9326880" cy="1554480"/>
-          </a:xfrm>
-          <a:prstGeom prst="rect">
-            <a:avLst/>
-          </a:prstGeom>
-          <a:noFill/>
-        </p:spPr>
-        <p:txBody>
-          <a:bodyPr wrap="square" anchor="ctr" lIns="0" rIns="0" tIns="0" bIns="0">
-            <a:spAutoFit/>
-          </a:bodyPr>
-          <a:lstStyle/>
-          <a:p>
-            <a:pPr algn="l"/>
-            <a:r>
-              <a:rPr sz="2200" b="1" i="0">
-                <a:solidFill>
-                  <a:srgbClr val="1D2433"/>
-                </a:solidFill>
-                <a:latin typeface="Calibri"/>
-              </a:rPr>
-              <a:t>B. Less effort over a longer distance</a:t>
-            </a:r>
-          </a:p>
-        </p:txBody>
-      </p:sp>
-      <p:sp>
-        <p:nvSpPr>
-          <p:cNvPr id="11" name="Rounded Rectangle 10"/>
-          <p:cNvSpPr/>
-          <p:nvPr/>
-        </p:nvSpPr>
-        <p:spPr>
-          <a:xfrm>
-            <a:off x="640080" y="3657600"/>
-            <a:ext cx="10881360" cy="2011680"/>
-          </a:xfrm>
-          <a:prstGeom prst="roundRect">
-            <a:avLst>
-              <a:gd name="adj" fmla="val 3000"/>
             </a:avLst>
           </a:prstGeom>
           <a:solidFill>
@@ -17019,68 +19403,840 @@
       </p:sp>
       <p:sp>
         <p:nvSpPr>
+          <p:cNvPr id="8" name="TextBox 7"/>
+          <p:cNvSpPr txBox="1"/>
+          <p:nvPr/>
+        </p:nvSpPr>
+        <p:spPr>
+          <a:xfrm>
+            <a:off x="1005840" y="1828800"/>
+            <a:ext cx="10149840" cy="1554480"/>
+          </a:xfrm>
+          <a:prstGeom prst="rect">
+            <a:avLst/>
+          </a:prstGeom>
+          <a:noFill/>
+        </p:spPr>
+        <p:txBody>
+          <a:bodyPr wrap="square" anchor="ctr" lIns="0" rIns="0" tIns="0" bIns="0">
+            <a:spAutoFit/>
+          </a:bodyPr>
+          <a:lstStyle/>
+          <a:p>
+            <a:pPr algn="l"/>
+            <a:r>
+              <a:rPr sz="1900" b="1" i="0">
+                <a:solidFill>
+                  <a:srgbClr val="1D2433"/>
+                </a:solidFill>
+                <a:latin typeface="Calibri"/>
+              </a:rPr>
+              <a:t>Using a ramp instead of lifting straight up means you apply:</a:t>
+            </a:r>
+          </a:p>
+        </p:txBody>
+      </p:sp>
+      <p:sp>
+        <p:nvSpPr>
+          <p:cNvPr id="9" name="Rounded Rectangle 8"/>
+          <p:cNvSpPr/>
+          <p:nvPr/>
+        </p:nvSpPr>
+        <p:spPr>
+          <a:xfrm>
+            <a:off x="640080" y="3749039"/>
+            <a:ext cx="5349240" cy="868680"/>
+          </a:xfrm>
+          <a:prstGeom prst="roundRect">
+            <a:avLst>
+              <a:gd name="adj" fmla="val 12000"/>
+            </a:avLst>
+          </a:prstGeom>
+          <a:solidFill>
+            <a:srgbClr val="EAF1F4"/>
+          </a:solidFill>
+          <a:ln>
+            <a:noFill/>
+          </a:ln>
+          <a:effectLst/>
+        </p:spPr>
+        <p:style>
+          <a:lnRef idx="1">
+            <a:schemeClr val="accent1"/>
+          </a:lnRef>
+          <a:fillRef idx="3">
+            <a:schemeClr val="accent1"/>
+          </a:fillRef>
+          <a:effectRef idx="2">
+            <a:schemeClr val="accent1"/>
+          </a:effectRef>
+          <a:fontRef idx="minor">
+            <a:schemeClr val="lt1"/>
+          </a:fontRef>
+        </p:style>
+        <p:txBody>
+          <a:bodyPr rtlCol="0" anchor="ctr"/>
+          <a:lstStyle/>
+          <a:p>
+            <a:pPr algn="ctr"/>
+          </a:p>
+        </p:txBody>
+      </p:sp>
+      <p:sp>
+        <p:nvSpPr>
+          <p:cNvPr id="10" name="Oval 9"/>
+          <p:cNvSpPr/>
+          <p:nvPr/>
+        </p:nvSpPr>
+        <p:spPr>
+          <a:xfrm>
+            <a:off x="914400" y="3977639"/>
+            <a:ext cx="411480" cy="411480"/>
+          </a:xfrm>
+          <a:prstGeom prst="ellipse">
+            <a:avLst/>
+          </a:prstGeom>
+          <a:solidFill>
+            <a:srgbClr val="0A9396"/>
+          </a:solidFill>
+          <a:ln>
+            <a:noFill/>
+          </a:ln>
+          <a:effectLst/>
+        </p:spPr>
+        <p:style>
+          <a:lnRef idx="1">
+            <a:schemeClr val="accent1"/>
+          </a:lnRef>
+          <a:fillRef idx="3">
+            <a:schemeClr val="accent1"/>
+          </a:fillRef>
+          <a:effectRef idx="2">
+            <a:schemeClr val="accent1"/>
+          </a:effectRef>
+          <a:fontRef idx="minor">
+            <a:schemeClr val="lt1"/>
+          </a:fontRef>
+        </p:style>
+        <p:txBody>
+          <a:bodyPr rtlCol="0" anchor="ctr"/>
+          <a:lstStyle/>
+          <a:p>
+            <a:pPr algn="ctr"/>
+          </a:p>
+        </p:txBody>
+      </p:sp>
+      <p:sp>
+        <p:nvSpPr>
+          <p:cNvPr id="11" name="TextBox 10"/>
+          <p:cNvSpPr txBox="1"/>
+          <p:nvPr/>
+        </p:nvSpPr>
+        <p:spPr>
+          <a:xfrm>
+            <a:off x="914400" y="3977639"/>
+            <a:ext cx="411480" cy="411480"/>
+          </a:xfrm>
+          <a:prstGeom prst="rect">
+            <a:avLst/>
+          </a:prstGeom>
+          <a:noFill/>
+        </p:spPr>
+        <p:txBody>
+          <a:bodyPr wrap="square" anchor="ctr" lIns="0" rIns="0" tIns="0" bIns="0">
+            <a:spAutoFit/>
+          </a:bodyPr>
+          <a:lstStyle/>
+          <a:p>
+            <a:pPr algn="ctr"/>
+            <a:r>
+              <a:rPr sz="1400" b="1" i="0">
+                <a:solidFill>
+                  <a:srgbClr val="FFFFFF"/>
+                </a:solidFill>
+                <a:latin typeface="Calibri"/>
+              </a:rPr>
+              <a:t>A</a:t>
+            </a:r>
+          </a:p>
+        </p:txBody>
+      </p:sp>
+      <p:sp>
+        <p:nvSpPr>
           <p:cNvPr id="12" name="TextBox 11"/>
           <p:cNvSpPr txBox="1"/>
           <p:nvPr/>
         </p:nvSpPr>
         <p:spPr>
           <a:xfrm>
-            <a:off x="1005840" y="3886200"/>
-            <a:ext cx="4572000" cy="365760"/>
-          </a:xfrm>
-          <a:prstGeom prst="rect">
-            <a:avLst/>
-          </a:prstGeom>
-          <a:noFill/>
-        </p:spPr>
-        <p:txBody>
-          <a:bodyPr wrap="square" anchor="t" lIns="0" rIns="0" tIns="0" bIns="0">
+            <a:off x="1508760" y="3749039"/>
+            <a:ext cx="3840480" cy="868680"/>
+          </a:xfrm>
+          <a:prstGeom prst="rect">
+            <a:avLst/>
+          </a:prstGeom>
+          <a:noFill/>
+        </p:spPr>
+        <p:txBody>
+          <a:bodyPr wrap="square" anchor="ctr" lIns="0" rIns="0" tIns="0" bIns="0">
             <a:spAutoFit/>
           </a:bodyPr>
           <a:lstStyle/>
           <a:p>
             <a:pPr algn="l"/>
             <a:r>
+              <a:rPr sz="1450" b="0" i="0">
+                <a:solidFill>
+                  <a:srgbClr val="1D2433"/>
+                </a:solidFill>
+                <a:latin typeface="Calibri"/>
+              </a:rPr>
+              <a:t>More effort over a shorter distance</a:t>
+            </a:r>
+          </a:p>
+        </p:txBody>
+      </p:sp>
+      <p:sp>
+        <p:nvSpPr>
+          <p:cNvPr id="13" name="Rounded Rectangle 12"/>
+          <p:cNvSpPr/>
+          <p:nvPr/>
+        </p:nvSpPr>
+        <p:spPr>
+          <a:xfrm>
+            <a:off x="6172200" y="3749039"/>
+            <a:ext cx="5349240" cy="868680"/>
+          </a:xfrm>
+          <a:prstGeom prst="roundRect">
+            <a:avLst>
+              <a:gd name="adj" fmla="val 12000"/>
+            </a:avLst>
+          </a:prstGeom>
+          <a:solidFill>
+            <a:srgbClr val="E9F5F0"/>
+          </a:solidFill>
+          <a:ln w="31750">
+            <a:solidFill>
+              <a:srgbClr val="2A9D8F"/>
+            </a:solidFill>
+          </a:ln>
+          <a:effectLst/>
+        </p:spPr>
+        <p:style>
+          <a:lnRef idx="1">
+            <a:schemeClr val="accent1"/>
+          </a:lnRef>
+          <a:fillRef idx="3">
+            <a:schemeClr val="accent1"/>
+          </a:fillRef>
+          <a:effectRef idx="2">
+            <a:schemeClr val="accent1"/>
+          </a:effectRef>
+          <a:fontRef idx="minor">
+            <a:schemeClr val="lt1"/>
+          </a:fontRef>
+        </p:style>
+        <p:txBody>
+          <a:bodyPr rtlCol="0" anchor="ctr"/>
+          <a:lstStyle/>
+          <a:p>
+            <a:pPr algn="ctr"/>
+          </a:p>
+        </p:txBody>
+      </p:sp>
+      <p:sp>
+        <p:nvSpPr>
+          <p:cNvPr id="14" name="Oval 13"/>
+          <p:cNvSpPr/>
+          <p:nvPr/>
+        </p:nvSpPr>
+        <p:spPr>
+          <a:xfrm>
+            <a:off x="6446520" y="3977639"/>
+            <a:ext cx="411480" cy="411480"/>
+          </a:xfrm>
+          <a:prstGeom prst="ellipse">
+            <a:avLst/>
+          </a:prstGeom>
+          <a:solidFill>
+            <a:srgbClr val="2A9D8F"/>
+          </a:solidFill>
+          <a:ln>
+            <a:noFill/>
+          </a:ln>
+          <a:effectLst/>
+        </p:spPr>
+        <p:style>
+          <a:lnRef idx="1">
+            <a:schemeClr val="accent1"/>
+          </a:lnRef>
+          <a:fillRef idx="3">
+            <a:schemeClr val="accent1"/>
+          </a:fillRef>
+          <a:effectRef idx="2">
+            <a:schemeClr val="accent1"/>
+          </a:effectRef>
+          <a:fontRef idx="minor">
+            <a:schemeClr val="lt1"/>
+          </a:fontRef>
+        </p:style>
+        <p:txBody>
+          <a:bodyPr rtlCol="0" anchor="ctr"/>
+          <a:lstStyle/>
+          <a:p>
+            <a:pPr algn="ctr"/>
+          </a:p>
+        </p:txBody>
+      </p:sp>
+      <p:sp>
+        <p:nvSpPr>
+          <p:cNvPr id="15" name="TextBox 14"/>
+          <p:cNvSpPr txBox="1"/>
+          <p:nvPr/>
+        </p:nvSpPr>
+        <p:spPr>
+          <a:xfrm>
+            <a:off x="6446520" y="3977639"/>
+            <a:ext cx="411480" cy="411480"/>
+          </a:xfrm>
+          <a:prstGeom prst="rect">
+            <a:avLst/>
+          </a:prstGeom>
+          <a:noFill/>
+        </p:spPr>
+        <p:txBody>
+          <a:bodyPr wrap="square" anchor="ctr" lIns="0" rIns="0" tIns="0" bIns="0">
+            <a:spAutoFit/>
+          </a:bodyPr>
+          <a:lstStyle/>
+          <a:p>
+            <a:pPr algn="ctr"/>
+            <a:r>
               <a:rPr sz="1400" b="1" i="0">
                 <a:solidFill>
+                  <a:srgbClr val="FFFFFF"/>
+                </a:solidFill>
+                <a:latin typeface="Calibri"/>
+              </a:rPr>
+              <a:t>B</a:t>
+            </a:r>
+          </a:p>
+        </p:txBody>
+      </p:sp>
+      <p:sp>
+        <p:nvSpPr>
+          <p:cNvPr id="16" name="TextBox 15"/>
+          <p:cNvSpPr txBox="1"/>
+          <p:nvPr/>
+        </p:nvSpPr>
+        <p:spPr>
+          <a:xfrm>
+            <a:off x="7040880" y="3749039"/>
+            <a:ext cx="3840480" cy="868680"/>
+          </a:xfrm>
+          <a:prstGeom prst="rect">
+            <a:avLst/>
+          </a:prstGeom>
+          <a:noFill/>
+        </p:spPr>
+        <p:txBody>
+          <a:bodyPr wrap="square" anchor="ctr" lIns="0" rIns="0" tIns="0" bIns="0">
+            <a:spAutoFit/>
+          </a:bodyPr>
+          <a:lstStyle/>
+          <a:p>
+            <a:pPr algn="l"/>
+            <a:r>
+              <a:rPr sz="1450" b="1" i="0">
+                <a:solidFill>
+                  <a:srgbClr val="1D2433"/>
+                </a:solidFill>
+                <a:latin typeface="Calibri"/>
+              </a:rPr>
+              <a:t>Less effort over a longer distance</a:t>
+            </a:r>
+          </a:p>
+        </p:txBody>
+      </p:sp>
+      <p:sp>
+        <p:nvSpPr>
+          <p:cNvPr id="17" name="Oval 16"/>
+          <p:cNvSpPr/>
+          <p:nvPr/>
+        </p:nvSpPr>
+        <p:spPr>
+          <a:xfrm>
+            <a:off x="10972800" y="3995927"/>
+            <a:ext cx="365760" cy="365760"/>
+          </a:xfrm>
+          <a:prstGeom prst="ellipse">
+            <a:avLst/>
+          </a:prstGeom>
+          <a:solidFill>
+            <a:srgbClr val="2A9D8F"/>
+          </a:solidFill>
+          <a:ln>
+            <a:noFill/>
+          </a:ln>
+          <a:effectLst/>
+        </p:spPr>
+        <p:style>
+          <a:lnRef idx="1">
+            <a:schemeClr val="accent1"/>
+          </a:lnRef>
+          <a:fillRef idx="3">
+            <a:schemeClr val="accent1"/>
+          </a:fillRef>
+          <a:effectRef idx="2">
+            <a:schemeClr val="accent1"/>
+          </a:effectRef>
+          <a:fontRef idx="minor">
+            <a:schemeClr val="lt1"/>
+          </a:fontRef>
+        </p:style>
+        <p:txBody>
+          <a:bodyPr rtlCol="0" anchor="ctr"/>
+          <a:lstStyle/>
+          <a:p>
+            <a:pPr algn="ctr"/>
+          </a:p>
+        </p:txBody>
+      </p:sp>
+      <p:sp>
+        <p:nvSpPr>
+          <p:cNvPr id="18" name="TextBox 17"/>
+          <p:cNvSpPr txBox="1"/>
+          <p:nvPr/>
+        </p:nvSpPr>
+        <p:spPr>
+          <a:xfrm>
+            <a:off x="10972800" y="3950207"/>
+            <a:ext cx="365760" cy="365760"/>
+          </a:xfrm>
+          <a:prstGeom prst="rect">
+            <a:avLst/>
+          </a:prstGeom>
+          <a:noFill/>
+        </p:spPr>
+        <p:txBody>
+          <a:bodyPr wrap="square" anchor="ctr" lIns="0" rIns="0" tIns="0" bIns="0">
+            <a:spAutoFit/>
+          </a:bodyPr>
+          <a:lstStyle/>
+          <a:p>
+            <a:pPr algn="ctr"/>
+            <a:r>
+              <a:rPr sz="1600" b="1" i="0">
+                <a:solidFill>
+                  <a:srgbClr val="FFFFFF"/>
+                </a:solidFill>
+                <a:latin typeface="Calibri"/>
+              </a:rPr>
+              <a:t>✓</a:t>
+            </a:r>
+          </a:p>
+        </p:txBody>
+      </p:sp>
+      <p:sp>
+        <p:nvSpPr>
+          <p:cNvPr id="19" name="Rounded Rectangle 18"/>
+          <p:cNvSpPr/>
+          <p:nvPr/>
+        </p:nvSpPr>
+        <p:spPr>
+          <a:xfrm>
+            <a:off x="640080" y="4782312"/>
+            <a:ext cx="5349240" cy="868680"/>
+          </a:xfrm>
+          <a:prstGeom prst="roundRect">
+            <a:avLst>
+              <a:gd name="adj" fmla="val 12000"/>
+            </a:avLst>
+          </a:prstGeom>
+          <a:solidFill>
+            <a:srgbClr val="EAF1F4"/>
+          </a:solidFill>
+          <a:ln>
+            <a:noFill/>
+          </a:ln>
+          <a:effectLst/>
+        </p:spPr>
+        <p:style>
+          <a:lnRef idx="1">
+            <a:schemeClr val="accent1"/>
+          </a:lnRef>
+          <a:fillRef idx="3">
+            <a:schemeClr val="accent1"/>
+          </a:fillRef>
+          <a:effectRef idx="2">
+            <a:schemeClr val="accent1"/>
+          </a:effectRef>
+          <a:fontRef idx="minor">
+            <a:schemeClr val="lt1"/>
+          </a:fontRef>
+        </p:style>
+        <p:txBody>
+          <a:bodyPr rtlCol="0" anchor="ctr"/>
+          <a:lstStyle/>
+          <a:p>
+            <a:pPr algn="ctr"/>
+          </a:p>
+        </p:txBody>
+      </p:sp>
+      <p:sp>
+        <p:nvSpPr>
+          <p:cNvPr id="20" name="Oval 19"/>
+          <p:cNvSpPr/>
+          <p:nvPr/>
+        </p:nvSpPr>
+        <p:spPr>
+          <a:xfrm>
+            <a:off x="914400" y="5010912"/>
+            <a:ext cx="411480" cy="411480"/>
+          </a:xfrm>
+          <a:prstGeom prst="ellipse">
+            <a:avLst/>
+          </a:prstGeom>
+          <a:solidFill>
+            <a:srgbClr val="0A9396"/>
+          </a:solidFill>
+          <a:ln>
+            <a:noFill/>
+          </a:ln>
+          <a:effectLst/>
+        </p:spPr>
+        <p:style>
+          <a:lnRef idx="1">
+            <a:schemeClr val="accent1"/>
+          </a:lnRef>
+          <a:fillRef idx="3">
+            <a:schemeClr val="accent1"/>
+          </a:fillRef>
+          <a:effectRef idx="2">
+            <a:schemeClr val="accent1"/>
+          </a:effectRef>
+          <a:fontRef idx="minor">
+            <a:schemeClr val="lt1"/>
+          </a:fontRef>
+        </p:style>
+        <p:txBody>
+          <a:bodyPr rtlCol="0" anchor="ctr"/>
+          <a:lstStyle/>
+          <a:p>
+            <a:pPr algn="ctr"/>
+          </a:p>
+        </p:txBody>
+      </p:sp>
+      <p:sp>
+        <p:nvSpPr>
+          <p:cNvPr id="21" name="TextBox 20"/>
+          <p:cNvSpPr txBox="1"/>
+          <p:nvPr/>
+        </p:nvSpPr>
+        <p:spPr>
+          <a:xfrm>
+            <a:off x="914400" y="5010912"/>
+            <a:ext cx="411480" cy="411480"/>
+          </a:xfrm>
+          <a:prstGeom prst="rect">
+            <a:avLst/>
+          </a:prstGeom>
+          <a:noFill/>
+        </p:spPr>
+        <p:txBody>
+          <a:bodyPr wrap="square" anchor="ctr" lIns="0" rIns="0" tIns="0" bIns="0">
+            <a:spAutoFit/>
+          </a:bodyPr>
+          <a:lstStyle/>
+          <a:p>
+            <a:pPr algn="ctr"/>
+            <a:r>
+              <a:rPr sz="1400" b="1" i="0">
+                <a:solidFill>
+                  <a:srgbClr val="FFFFFF"/>
+                </a:solidFill>
+                <a:latin typeface="Calibri"/>
+              </a:rPr>
+              <a:t>C</a:t>
+            </a:r>
+          </a:p>
+        </p:txBody>
+      </p:sp>
+      <p:sp>
+        <p:nvSpPr>
+          <p:cNvPr id="22" name="TextBox 21"/>
+          <p:cNvSpPr txBox="1"/>
+          <p:nvPr/>
+        </p:nvSpPr>
+        <p:spPr>
+          <a:xfrm>
+            <a:off x="1508760" y="4782312"/>
+            <a:ext cx="3840480" cy="868680"/>
+          </a:xfrm>
+          <a:prstGeom prst="rect">
+            <a:avLst/>
+          </a:prstGeom>
+          <a:noFill/>
+        </p:spPr>
+        <p:txBody>
+          <a:bodyPr wrap="square" anchor="ctr" lIns="0" rIns="0" tIns="0" bIns="0">
+            <a:spAutoFit/>
+          </a:bodyPr>
+          <a:lstStyle/>
+          <a:p>
+            <a:pPr algn="l"/>
+            <a:r>
+              <a:rPr sz="1450" b="0" i="0">
+                <a:solidFill>
+                  <a:srgbClr val="1D2433"/>
+                </a:solidFill>
+                <a:latin typeface="Calibri"/>
+              </a:rPr>
+              <a:t>The same effort</a:t>
+            </a:r>
+          </a:p>
+        </p:txBody>
+      </p:sp>
+      <p:sp>
+        <p:nvSpPr>
+          <p:cNvPr id="23" name="Rounded Rectangle 22"/>
+          <p:cNvSpPr/>
+          <p:nvPr/>
+        </p:nvSpPr>
+        <p:spPr>
+          <a:xfrm>
+            <a:off x="6172200" y="4782312"/>
+            <a:ext cx="5349240" cy="868680"/>
+          </a:xfrm>
+          <a:prstGeom prst="roundRect">
+            <a:avLst>
+              <a:gd name="adj" fmla="val 12000"/>
+            </a:avLst>
+          </a:prstGeom>
+          <a:solidFill>
+            <a:srgbClr val="EAF1F4"/>
+          </a:solidFill>
+          <a:ln>
+            <a:noFill/>
+          </a:ln>
+          <a:effectLst/>
+        </p:spPr>
+        <p:style>
+          <a:lnRef idx="1">
+            <a:schemeClr val="accent1"/>
+          </a:lnRef>
+          <a:fillRef idx="3">
+            <a:schemeClr val="accent1"/>
+          </a:fillRef>
+          <a:effectRef idx="2">
+            <a:schemeClr val="accent1"/>
+          </a:effectRef>
+          <a:fontRef idx="minor">
+            <a:schemeClr val="lt1"/>
+          </a:fontRef>
+        </p:style>
+        <p:txBody>
+          <a:bodyPr rtlCol="0" anchor="ctr"/>
+          <a:lstStyle/>
+          <a:p>
+            <a:pPr algn="ctr"/>
+          </a:p>
+        </p:txBody>
+      </p:sp>
+      <p:sp>
+        <p:nvSpPr>
+          <p:cNvPr id="24" name="Oval 23"/>
+          <p:cNvSpPr/>
+          <p:nvPr/>
+        </p:nvSpPr>
+        <p:spPr>
+          <a:xfrm>
+            <a:off x="6446520" y="5010912"/>
+            <a:ext cx="411480" cy="411480"/>
+          </a:xfrm>
+          <a:prstGeom prst="ellipse">
+            <a:avLst/>
+          </a:prstGeom>
+          <a:solidFill>
+            <a:srgbClr val="0A9396"/>
+          </a:solidFill>
+          <a:ln>
+            <a:noFill/>
+          </a:ln>
+          <a:effectLst/>
+        </p:spPr>
+        <p:style>
+          <a:lnRef idx="1">
+            <a:schemeClr val="accent1"/>
+          </a:lnRef>
+          <a:fillRef idx="3">
+            <a:schemeClr val="accent1"/>
+          </a:fillRef>
+          <a:effectRef idx="2">
+            <a:schemeClr val="accent1"/>
+          </a:effectRef>
+          <a:fontRef idx="minor">
+            <a:schemeClr val="lt1"/>
+          </a:fontRef>
+        </p:style>
+        <p:txBody>
+          <a:bodyPr rtlCol="0" anchor="ctr"/>
+          <a:lstStyle/>
+          <a:p>
+            <a:pPr algn="ctr"/>
+          </a:p>
+        </p:txBody>
+      </p:sp>
+      <p:sp>
+        <p:nvSpPr>
+          <p:cNvPr id="25" name="TextBox 24"/>
+          <p:cNvSpPr txBox="1"/>
+          <p:nvPr/>
+        </p:nvSpPr>
+        <p:spPr>
+          <a:xfrm>
+            <a:off x="6446520" y="5010912"/>
+            <a:ext cx="411480" cy="411480"/>
+          </a:xfrm>
+          <a:prstGeom prst="rect">
+            <a:avLst/>
+          </a:prstGeom>
+          <a:noFill/>
+        </p:spPr>
+        <p:txBody>
+          <a:bodyPr wrap="square" anchor="ctr" lIns="0" rIns="0" tIns="0" bIns="0">
+            <a:spAutoFit/>
+          </a:bodyPr>
+          <a:lstStyle/>
+          <a:p>
+            <a:pPr algn="ctr"/>
+            <a:r>
+              <a:rPr sz="1400" b="1" i="0">
+                <a:solidFill>
+                  <a:srgbClr val="FFFFFF"/>
+                </a:solidFill>
+                <a:latin typeface="Calibri"/>
+              </a:rPr>
+              <a:t>D</a:t>
+            </a:r>
+          </a:p>
+        </p:txBody>
+      </p:sp>
+      <p:sp>
+        <p:nvSpPr>
+          <p:cNvPr id="26" name="TextBox 25"/>
+          <p:cNvSpPr txBox="1"/>
+          <p:nvPr/>
+        </p:nvSpPr>
+        <p:spPr>
+          <a:xfrm>
+            <a:off x="7040880" y="4782312"/>
+            <a:ext cx="3840480" cy="868680"/>
+          </a:xfrm>
+          <a:prstGeom prst="rect">
+            <a:avLst/>
+          </a:prstGeom>
+          <a:noFill/>
+        </p:spPr>
+        <p:txBody>
+          <a:bodyPr wrap="square" anchor="ctr" lIns="0" rIns="0" tIns="0" bIns="0">
+            <a:spAutoFit/>
+          </a:bodyPr>
+          <a:lstStyle/>
+          <a:p>
+            <a:pPr algn="l"/>
+            <a:r>
+              <a:rPr sz="1450" b="0" i="0">
+                <a:solidFill>
+                  <a:srgbClr val="1D2433"/>
+                </a:solidFill>
+                <a:latin typeface="Calibri"/>
+              </a:rPr>
+              <a:t>No effort at all</a:t>
+            </a:r>
+          </a:p>
+        </p:txBody>
+      </p:sp>
+      <p:sp>
+        <p:nvSpPr>
+          <p:cNvPr id="27" name="Rounded Rectangle 26"/>
+          <p:cNvSpPr/>
+          <p:nvPr/>
+        </p:nvSpPr>
+        <p:spPr>
+          <a:xfrm>
+            <a:off x="640080" y="5779008"/>
+            <a:ext cx="10881360" cy="566928"/>
+          </a:xfrm>
+          <a:prstGeom prst="roundRect">
+            <a:avLst>
+              <a:gd name="adj" fmla="val 10000"/>
+            </a:avLst>
+          </a:prstGeom>
+          <a:solidFill>
+            <a:srgbClr val="EEF2F7"/>
+          </a:solidFill>
+          <a:ln>
+            <a:noFill/>
+          </a:ln>
+          <a:effectLst/>
+        </p:spPr>
+        <p:style>
+          <a:lnRef idx="1">
+            <a:schemeClr val="accent1"/>
+          </a:lnRef>
+          <a:fillRef idx="3">
+            <a:schemeClr val="accent1"/>
+          </a:fillRef>
+          <a:effectRef idx="2">
+            <a:schemeClr val="accent1"/>
+          </a:effectRef>
+          <a:fontRef idx="minor">
+            <a:schemeClr val="lt1"/>
+          </a:fontRef>
+        </p:style>
+        <p:txBody>
+          <a:bodyPr rtlCol="0" anchor="ctr"/>
+          <a:lstStyle/>
+          <a:p>
+            <a:pPr algn="ctr"/>
+          </a:p>
+        </p:txBody>
+      </p:sp>
+      <p:sp>
+        <p:nvSpPr>
+          <p:cNvPr id="28" name="TextBox 27"/>
+          <p:cNvSpPr txBox="1"/>
+          <p:nvPr/>
+        </p:nvSpPr>
+        <p:spPr>
+          <a:xfrm>
+            <a:off x="914400" y="5779008"/>
+            <a:ext cx="10332720" cy="566928"/>
+          </a:xfrm>
+          <a:prstGeom prst="rect">
+            <a:avLst/>
+          </a:prstGeom>
+          <a:noFill/>
+        </p:spPr>
+        <p:txBody>
+          <a:bodyPr wrap="square" anchor="ctr" lIns="0" rIns="0" tIns="0" bIns="0">
+            <a:spAutoFit/>
+          </a:bodyPr>
+          <a:lstStyle/>
+          <a:p>
+            <a:pPr algn="l"/>
+            <a:r>
+              <a:rPr sz="1250" b="1" i="0">
+                <a:solidFill>
                   <a:srgbClr val="2A9D8F"/>
                 </a:solidFill>
                 <a:latin typeface="Arial"/>
               </a:rPr>
-              <a:t>WHY</a:t>
-            </a:r>
-          </a:p>
-        </p:txBody>
-      </p:sp>
-      <p:sp>
-        <p:nvSpPr>
-          <p:cNvPr id="13" name="TextBox 12"/>
-          <p:cNvSpPr txBox="1"/>
-          <p:nvPr/>
-        </p:nvSpPr>
-        <p:spPr>
-          <a:xfrm>
-            <a:off x="1005840" y="4297680"/>
-            <a:ext cx="10149840" cy="1280160"/>
-          </a:xfrm>
-          <a:prstGeom prst="rect">
-            <a:avLst/>
-          </a:prstGeom>
-          <a:noFill/>
-        </p:spPr>
-        <p:txBody>
-          <a:bodyPr wrap="square" anchor="t" lIns="0" rIns="0" tIns="0" bIns="0">
-            <a:spAutoFit/>
-          </a:bodyPr>
-          <a:lstStyle/>
-          <a:p>
-            <a:pPr algn="l">
-              <a:lnSpc>
-                <a:spcPct val="110000"/>
-              </a:lnSpc>
-            </a:pPr>
-            <a:r>
-              <a:rPr sz="1600" b="0" i="0">
+              <a:t>Why  </a:t>
+            </a:r>
+            <a:r>
+              <a:rPr sz="1200" b="0" i="0">
                 <a:solidFill>
                   <a:srgbClr val="1D2433"/>
                 </a:solidFill>
@@ -17226,7 +20382,7 @@
                 </a:solidFill>
                 <a:latin typeface="Calibri"/>
               </a:rPr>
-              <a:t>Q2 — Inclined plane MA</a:t>
+              <a:t>Q2 - Inclined plane MA</a:t>
             </a:r>
           </a:p>
         </p:txBody>
@@ -17522,7 +20678,7 @@
         <p:spPr>
           <a:xfrm>
             <a:off x="1508760" y="3749039"/>
-            <a:ext cx="4297680" cy="868680"/>
+            <a:ext cx="3840480" cy="868680"/>
           </a:xfrm>
           <a:prstGeom prst="rect">
             <a:avLst/>
@@ -17682,7 +20838,7 @@
         <p:spPr>
           <a:xfrm>
             <a:off x="7040880" y="3749039"/>
-            <a:ext cx="4297680" cy="868680"/>
+            <a:ext cx="3840480" cy="868680"/>
           </a:xfrm>
           <a:prstGeom prst="rect">
             <a:avLst/>
@@ -17842,7 +20998,7 @@
         <p:spPr>
           <a:xfrm>
             <a:off x="1508760" y="4782312"/>
-            <a:ext cx="4297680" cy="868680"/>
+            <a:ext cx="3840480" cy="868680"/>
           </a:xfrm>
           <a:prstGeom prst="rect">
             <a:avLst/>
@@ -18002,7 +21158,7 @@
         <p:spPr>
           <a:xfrm>
             <a:off x="7040880" y="4782312"/>
-            <a:ext cx="4297680" cy="868680"/>
+            <a:ext cx="3840480" cy="868680"/>
           </a:xfrm>
           <a:prstGeom prst="rect">
             <a:avLst/>
@@ -18349,7 +21505,7 @@
             <a:avLst/>
           </a:prstGeom>
           <a:solidFill>
-            <a:srgbClr val="2A9D8F"/>
+            <a:srgbClr val="0A9396"/>
           </a:solidFill>
           <a:ln>
             <a:noFill/>
@@ -18404,11 +21560,11 @@
             <a:r>
               <a:rPr sz="1300" b="1" i="0">
                 <a:solidFill>
-                  <a:srgbClr val="2A9D8F"/>
+                  <a:srgbClr val="0A9396"/>
                 </a:solidFill>
                 <a:latin typeface="Arial"/>
               </a:rPr>
-              <a:t>ANSWER REVEAL</a:t>
+              <a:t>QUIZ QUESTION</a:t>
             </a:r>
           </a:p>
         </p:txBody>
@@ -18443,7 +21599,7 @@
                 </a:solidFill>
                 <a:latin typeface="Calibri"/>
               </a:rPr>
-              <a:t>Q2 — Answer</a:t>
+              <a:t>Q2 - Inclined plane MA</a:t>
             </a:r>
           </a:p>
         </p:txBody>
@@ -18532,166 +21688,6 @@
           <a:prstGeom prst="roundRect">
             <a:avLst>
               <a:gd name="adj" fmla="val 4000"/>
-            </a:avLst>
-          </a:prstGeom>
-          <a:solidFill>
-            <a:srgbClr val="E9F5F0"/>
-          </a:solidFill>
-          <a:ln>
-            <a:noFill/>
-          </a:ln>
-          <a:effectLst/>
-        </p:spPr>
-        <p:style>
-          <a:lnRef idx="1">
-            <a:schemeClr val="accent1"/>
-          </a:lnRef>
-          <a:fillRef idx="3">
-            <a:schemeClr val="accent1"/>
-          </a:fillRef>
-          <a:effectRef idx="2">
-            <a:schemeClr val="accent1"/>
-          </a:effectRef>
-          <a:fontRef idx="minor">
-            <a:schemeClr val="lt1"/>
-          </a:fontRef>
-        </p:style>
-        <p:txBody>
-          <a:bodyPr rtlCol="0" anchor="ctr"/>
-          <a:lstStyle/>
-          <a:p>
-            <a:pPr algn="ctr"/>
-          </a:p>
-        </p:txBody>
-      </p:sp>
-      <p:sp>
-        <p:nvSpPr>
-          <p:cNvPr id="8" name="Oval 7"/>
-          <p:cNvSpPr/>
-          <p:nvPr/>
-        </p:nvSpPr>
-        <p:spPr>
-          <a:xfrm>
-            <a:off x="1005840" y="2240280"/>
-            <a:ext cx="731520" cy="731520"/>
-          </a:xfrm>
-          <a:prstGeom prst="ellipse">
-            <a:avLst/>
-          </a:prstGeom>
-          <a:solidFill>
-            <a:srgbClr val="2A9D8F"/>
-          </a:solidFill>
-          <a:ln>
-            <a:noFill/>
-          </a:ln>
-          <a:effectLst/>
-        </p:spPr>
-        <p:style>
-          <a:lnRef idx="1">
-            <a:schemeClr val="accent1"/>
-          </a:lnRef>
-          <a:fillRef idx="3">
-            <a:schemeClr val="accent1"/>
-          </a:fillRef>
-          <a:effectRef idx="2">
-            <a:schemeClr val="accent1"/>
-          </a:effectRef>
-          <a:fontRef idx="minor">
-            <a:schemeClr val="lt1"/>
-          </a:fontRef>
-        </p:style>
-        <p:txBody>
-          <a:bodyPr rtlCol="0" anchor="ctr"/>
-          <a:lstStyle/>
-          <a:p>
-            <a:pPr algn="ctr"/>
-          </a:p>
-        </p:txBody>
-      </p:sp>
-      <p:sp>
-        <p:nvSpPr>
-          <p:cNvPr id="9" name="TextBox 8"/>
-          <p:cNvSpPr txBox="1"/>
-          <p:nvPr/>
-        </p:nvSpPr>
-        <p:spPr>
-          <a:xfrm>
-            <a:off x="1005840" y="2240280"/>
-            <a:ext cx="731520" cy="731520"/>
-          </a:xfrm>
-          <a:prstGeom prst="rect">
-            <a:avLst/>
-          </a:prstGeom>
-          <a:noFill/>
-        </p:spPr>
-        <p:txBody>
-          <a:bodyPr wrap="square" anchor="ctr" lIns="0" rIns="0" tIns="0" bIns="0">
-            <a:spAutoFit/>
-          </a:bodyPr>
-          <a:lstStyle/>
-          <a:p>
-            <a:pPr algn="ctr"/>
-            <a:r>
-              <a:rPr sz="3000" b="1" i="0">
-                <a:solidFill>
-                  <a:srgbClr val="FFFFFF"/>
-                </a:solidFill>
-                <a:latin typeface="Calibri"/>
-              </a:rPr>
-              <a:t>✓</a:t>
-            </a:r>
-          </a:p>
-        </p:txBody>
-      </p:sp>
-      <p:sp>
-        <p:nvSpPr>
-          <p:cNvPr id="10" name="TextBox 9"/>
-          <p:cNvSpPr txBox="1"/>
-          <p:nvPr/>
-        </p:nvSpPr>
-        <p:spPr>
-          <a:xfrm>
-            <a:off x="1920240" y="1828800"/>
-            <a:ext cx="9326880" cy="1554480"/>
-          </a:xfrm>
-          <a:prstGeom prst="rect">
-            <a:avLst/>
-          </a:prstGeom>
-          <a:noFill/>
-        </p:spPr>
-        <p:txBody>
-          <a:bodyPr wrap="square" anchor="ctr" lIns="0" rIns="0" tIns="0" bIns="0">
-            <a:spAutoFit/>
-          </a:bodyPr>
-          <a:lstStyle/>
-          <a:p>
-            <a:pPr algn="l"/>
-            <a:r>
-              <a:rPr sz="2200" b="1" i="0">
-                <a:solidFill>
-                  <a:srgbClr val="1D2433"/>
-                </a:solidFill>
-                <a:latin typeface="Calibri"/>
-              </a:rPr>
-              <a:t>B. 3</a:t>
-            </a:r>
-          </a:p>
-        </p:txBody>
-      </p:sp>
-      <p:sp>
-        <p:nvSpPr>
-          <p:cNvPr id="11" name="Rounded Rectangle 10"/>
-          <p:cNvSpPr/>
-          <p:nvPr/>
-        </p:nvSpPr>
-        <p:spPr>
-          <a:xfrm>
-            <a:off x="640080" y="3657600"/>
-            <a:ext cx="10881360" cy="2011680"/>
-          </a:xfrm>
-          <a:prstGeom prst="roundRect">
-            <a:avLst>
-              <a:gd name="adj" fmla="val 3000"/>
             </a:avLst>
           </a:prstGeom>
           <a:solidFill>
@@ -18732,68 +21728,840 @@
       </p:sp>
       <p:sp>
         <p:nvSpPr>
+          <p:cNvPr id="8" name="TextBox 7"/>
+          <p:cNvSpPr txBox="1"/>
+          <p:nvPr/>
+        </p:nvSpPr>
+        <p:spPr>
+          <a:xfrm>
+            <a:off x="1005840" y="1828800"/>
+            <a:ext cx="10149840" cy="1554480"/>
+          </a:xfrm>
+          <a:prstGeom prst="rect">
+            <a:avLst/>
+          </a:prstGeom>
+          <a:noFill/>
+        </p:spPr>
+        <p:txBody>
+          <a:bodyPr wrap="square" anchor="ctr" lIns="0" rIns="0" tIns="0" bIns="0">
+            <a:spAutoFit/>
+          </a:bodyPr>
+          <a:lstStyle/>
+          <a:p>
+            <a:pPr algn="l"/>
+            <a:r>
+              <a:rPr sz="1900" b="1" i="0">
+                <a:solidFill>
+                  <a:srgbClr val="1D2433"/>
+                </a:solidFill>
+                <a:latin typeface="Calibri"/>
+              </a:rPr>
+              <a:t>A ramp is 6 m long and 2 m high. Its ideal mechanical advantage is:</a:t>
+            </a:r>
+          </a:p>
+        </p:txBody>
+      </p:sp>
+      <p:sp>
+        <p:nvSpPr>
+          <p:cNvPr id="9" name="Rounded Rectangle 8"/>
+          <p:cNvSpPr/>
+          <p:nvPr/>
+        </p:nvSpPr>
+        <p:spPr>
+          <a:xfrm>
+            <a:off x="640080" y="3749039"/>
+            <a:ext cx="5349240" cy="868680"/>
+          </a:xfrm>
+          <a:prstGeom prst="roundRect">
+            <a:avLst>
+              <a:gd name="adj" fmla="val 12000"/>
+            </a:avLst>
+          </a:prstGeom>
+          <a:solidFill>
+            <a:srgbClr val="EAF1F4"/>
+          </a:solidFill>
+          <a:ln>
+            <a:noFill/>
+          </a:ln>
+          <a:effectLst/>
+        </p:spPr>
+        <p:style>
+          <a:lnRef idx="1">
+            <a:schemeClr val="accent1"/>
+          </a:lnRef>
+          <a:fillRef idx="3">
+            <a:schemeClr val="accent1"/>
+          </a:fillRef>
+          <a:effectRef idx="2">
+            <a:schemeClr val="accent1"/>
+          </a:effectRef>
+          <a:fontRef idx="minor">
+            <a:schemeClr val="lt1"/>
+          </a:fontRef>
+        </p:style>
+        <p:txBody>
+          <a:bodyPr rtlCol="0" anchor="ctr"/>
+          <a:lstStyle/>
+          <a:p>
+            <a:pPr algn="ctr"/>
+          </a:p>
+        </p:txBody>
+      </p:sp>
+      <p:sp>
+        <p:nvSpPr>
+          <p:cNvPr id="10" name="Oval 9"/>
+          <p:cNvSpPr/>
+          <p:nvPr/>
+        </p:nvSpPr>
+        <p:spPr>
+          <a:xfrm>
+            <a:off x="914400" y="3977639"/>
+            <a:ext cx="411480" cy="411480"/>
+          </a:xfrm>
+          <a:prstGeom prst="ellipse">
+            <a:avLst/>
+          </a:prstGeom>
+          <a:solidFill>
+            <a:srgbClr val="0A9396"/>
+          </a:solidFill>
+          <a:ln>
+            <a:noFill/>
+          </a:ln>
+          <a:effectLst/>
+        </p:spPr>
+        <p:style>
+          <a:lnRef idx="1">
+            <a:schemeClr val="accent1"/>
+          </a:lnRef>
+          <a:fillRef idx="3">
+            <a:schemeClr val="accent1"/>
+          </a:fillRef>
+          <a:effectRef idx="2">
+            <a:schemeClr val="accent1"/>
+          </a:effectRef>
+          <a:fontRef idx="minor">
+            <a:schemeClr val="lt1"/>
+          </a:fontRef>
+        </p:style>
+        <p:txBody>
+          <a:bodyPr rtlCol="0" anchor="ctr"/>
+          <a:lstStyle/>
+          <a:p>
+            <a:pPr algn="ctr"/>
+          </a:p>
+        </p:txBody>
+      </p:sp>
+      <p:sp>
+        <p:nvSpPr>
+          <p:cNvPr id="11" name="TextBox 10"/>
+          <p:cNvSpPr txBox="1"/>
+          <p:nvPr/>
+        </p:nvSpPr>
+        <p:spPr>
+          <a:xfrm>
+            <a:off x="914400" y="3977639"/>
+            <a:ext cx="411480" cy="411480"/>
+          </a:xfrm>
+          <a:prstGeom prst="rect">
+            <a:avLst/>
+          </a:prstGeom>
+          <a:noFill/>
+        </p:spPr>
+        <p:txBody>
+          <a:bodyPr wrap="square" anchor="ctr" lIns="0" rIns="0" tIns="0" bIns="0">
+            <a:spAutoFit/>
+          </a:bodyPr>
+          <a:lstStyle/>
+          <a:p>
+            <a:pPr algn="ctr"/>
+            <a:r>
+              <a:rPr sz="1400" b="1" i="0">
+                <a:solidFill>
+                  <a:srgbClr val="FFFFFF"/>
+                </a:solidFill>
+                <a:latin typeface="Calibri"/>
+              </a:rPr>
+              <a:t>A</a:t>
+            </a:r>
+          </a:p>
+        </p:txBody>
+      </p:sp>
+      <p:sp>
+        <p:nvSpPr>
           <p:cNvPr id="12" name="TextBox 11"/>
           <p:cNvSpPr txBox="1"/>
           <p:nvPr/>
         </p:nvSpPr>
         <p:spPr>
           <a:xfrm>
-            <a:off x="1005840" y="3886200"/>
-            <a:ext cx="4572000" cy="365760"/>
-          </a:xfrm>
-          <a:prstGeom prst="rect">
-            <a:avLst/>
-          </a:prstGeom>
-          <a:noFill/>
-        </p:spPr>
-        <p:txBody>
-          <a:bodyPr wrap="square" anchor="t" lIns="0" rIns="0" tIns="0" bIns="0">
+            <a:off x="1508760" y="3749039"/>
+            <a:ext cx="3840480" cy="868680"/>
+          </a:xfrm>
+          <a:prstGeom prst="rect">
+            <a:avLst/>
+          </a:prstGeom>
+          <a:noFill/>
+        </p:spPr>
+        <p:txBody>
+          <a:bodyPr wrap="square" anchor="ctr" lIns="0" rIns="0" tIns="0" bIns="0">
             <a:spAutoFit/>
           </a:bodyPr>
           <a:lstStyle/>
           <a:p>
             <a:pPr algn="l"/>
             <a:r>
+              <a:rPr sz="1450" b="0" i="0">
+                <a:solidFill>
+                  <a:srgbClr val="1D2433"/>
+                </a:solidFill>
+                <a:latin typeface="Calibri"/>
+              </a:rPr>
+              <a:t>2</a:t>
+            </a:r>
+          </a:p>
+        </p:txBody>
+      </p:sp>
+      <p:sp>
+        <p:nvSpPr>
+          <p:cNvPr id="13" name="Rounded Rectangle 12"/>
+          <p:cNvSpPr/>
+          <p:nvPr/>
+        </p:nvSpPr>
+        <p:spPr>
+          <a:xfrm>
+            <a:off x="6172200" y="3749039"/>
+            <a:ext cx="5349240" cy="868680"/>
+          </a:xfrm>
+          <a:prstGeom prst="roundRect">
+            <a:avLst>
+              <a:gd name="adj" fmla="val 12000"/>
+            </a:avLst>
+          </a:prstGeom>
+          <a:solidFill>
+            <a:srgbClr val="E9F5F0"/>
+          </a:solidFill>
+          <a:ln w="31750">
+            <a:solidFill>
+              <a:srgbClr val="2A9D8F"/>
+            </a:solidFill>
+          </a:ln>
+          <a:effectLst/>
+        </p:spPr>
+        <p:style>
+          <a:lnRef idx="1">
+            <a:schemeClr val="accent1"/>
+          </a:lnRef>
+          <a:fillRef idx="3">
+            <a:schemeClr val="accent1"/>
+          </a:fillRef>
+          <a:effectRef idx="2">
+            <a:schemeClr val="accent1"/>
+          </a:effectRef>
+          <a:fontRef idx="minor">
+            <a:schemeClr val="lt1"/>
+          </a:fontRef>
+        </p:style>
+        <p:txBody>
+          <a:bodyPr rtlCol="0" anchor="ctr"/>
+          <a:lstStyle/>
+          <a:p>
+            <a:pPr algn="ctr"/>
+          </a:p>
+        </p:txBody>
+      </p:sp>
+      <p:sp>
+        <p:nvSpPr>
+          <p:cNvPr id="14" name="Oval 13"/>
+          <p:cNvSpPr/>
+          <p:nvPr/>
+        </p:nvSpPr>
+        <p:spPr>
+          <a:xfrm>
+            <a:off x="6446520" y="3977639"/>
+            <a:ext cx="411480" cy="411480"/>
+          </a:xfrm>
+          <a:prstGeom prst="ellipse">
+            <a:avLst/>
+          </a:prstGeom>
+          <a:solidFill>
+            <a:srgbClr val="2A9D8F"/>
+          </a:solidFill>
+          <a:ln>
+            <a:noFill/>
+          </a:ln>
+          <a:effectLst/>
+        </p:spPr>
+        <p:style>
+          <a:lnRef idx="1">
+            <a:schemeClr val="accent1"/>
+          </a:lnRef>
+          <a:fillRef idx="3">
+            <a:schemeClr val="accent1"/>
+          </a:fillRef>
+          <a:effectRef idx="2">
+            <a:schemeClr val="accent1"/>
+          </a:effectRef>
+          <a:fontRef idx="minor">
+            <a:schemeClr val="lt1"/>
+          </a:fontRef>
+        </p:style>
+        <p:txBody>
+          <a:bodyPr rtlCol="0" anchor="ctr"/>
+          <a:lstStyle/>
+          <a:p>
+            <a:pPr algn="ctr"/>
+          </a:p>
+        </p:txBody>
+      </p:sp>
+      <p:sp>
+        <p:nvSpPr>
+          <p:cNvPr id="15" name="TextBox 14"/>
+          <p:cNvSpPr txBox="1"/>
+          <p:nvPr/>
+        </p:nvSpPr>
+        <p:spPr>
+          <a:xfrm>
+            <a:off x="6446520" y="3977639"/>
+            <a:ext cx="411480" cy="411480"/>
+          </a:xfrm>
+          <a:prstGeom prst="rect">
+            <a:avLst/>
+          </a:prstGeom>
+          <a:noFill/>
+        </p:spPr>
+        <p:txBody>
+          <a:bodyPr wrap="square" anchor="ctr" lIns="0" rIns="0" tIns="0" bIns="0">
+            <a:spAutoFit/>
+          </a:bodyPr>
+          <a:lstStyle/>
+          <a:p>
+            <a:pPr algn="ctr"/>
+            <a:r>
               <a:rPr sz="1400" b="1" i="0">
                 <a:solidFill>
+                  <a:srgbClr val="FFFFFF"/>
+                </a:solidFill>
+                <a:latin typeface="Calibri"/>
+              </a:rPr>
+              <a:t>B</a:t>
+            </a:r>
+          </a:p>
+        </p:txBody>
+      </p:sp>
+      <p:sp>
+        <p:nvSpPr>
+          <p:cNvPr id="16" name="TextBox 15"/>
+          <p:cNvSpPr txBox="1"/>
+          <p:nvPr/>
+        </p:nvSpPr>
+        <p:spPr>
+          <a:xfrm>
+            <a:off x="7040880" y="3749039"/>
+            <a:ext cx="3840480" cy="868680"/>
+          </a:xfrm>
+          <a:prstGeom prst="rect">
+            <a:avLst/>
+          </a:prstGeom>
+          <a:noFill/>
+        </p:spPr>
+        <p:txBody>
+          <a:bodyPr wrap="square" anchor="ctr" lIns="0" rIns="0" tIns="0" bIns="0">
+            <a:spAutoFit/>
+          </a:bodyPr>
+          <a:lstStyle/>
+          <a:p>
+            <a:pPr algn="l"/>
+            <a:r>
+              <a:rPr sz="1450" b="1" i="0">
+                <a:solidFill>
+                  <a:srgbClr val="1D2433"/>
+                </a:solidFill>
+                <a:latin typeface="Calibri"/>
+              </a:rPr>
+              <a:t>3</a:t>
+            </a:r>
+          </a:p>
+        </p:txBody>
+      </p:sp>
+      <p:sp>
+        <p:nvSpPr>
+          <p:cNvPr id="17" name="Oval 16"/>
+          <p:cNvSpPr/>
+          <p:nvPr/>
+        </p:nvSpPr>
+        <p:spPr>
+          <a:xfrm>
+            <a:off x="10972800" y="3995927"/>
+            <a:ext cx="365760" cy="365760"/>
+          </a:xfrm>
+          <a:prstGeom prst="ellipse">
+            <a:avLst/>
+          </a:prstGeom>
+          <a:solidFill>
+            <a:srgbClr val="2A9D8F"/>
+          </a:solidFill>
+          <a:ln>
+            <a:noFill/>
+          </a:ln>
+          <a:effectLst/>
+        </p:spPr>
+        <p:style>
+          <a:lnRef idx="1">
+            <a:schemeClr val="accent1"/>
+          </a:lnRef>
+          <a:fillRef idx="3">
+            <a:schemeClr val="accent1"/>
+          </a:fillRef>
+          <a:effectRef idx="2">
+            <a:schemeClr val="accent1"/>
+          </a:effectRef>
+          <a:fontRef idx="minor">
+            <a:schemeClr val="lt1"/>
+          </a:fontRef>
+        </p:style>
+        <p:txBody>
+          <a:bodyPr rtlCol="0" anchor="ctr"/>
+          <a:lstStyle/>
+          <a:p>
+            <a:pPr algn="ctr"/>
+          </a:p>
+        </p:txBody>
+      </p:sp>
+      <p:sp>
+        <p:nvSpPr>
+          <p:cNvPr id="18" name="TextBox 17"/>
+          <p:cNvSpPr txBox="1"/>
+          <p:nvPr/>
+        </p:nvSpPr>
+        <p:spPr>
+          <a:xfrm>
+            <a:off x="10972800" y="3950207"/>
+            <a:ext cx="365760" cy="365760"/>
+          </a:xfrm>
+          <a:prstGeom prst="rect">
+            <a:avLst/>
+          </a:prstGeom>
+          <a:noFill/>
+        </p:spPr>
+        <p:txBody>
+          <a:bodyPr wrap="square" anchor="ctr" lIns="0" rIns="0" tIns="0" bIns="0">
+            <a:spAutoFit/>
+          </a:bodyPr>
+          <a:lstStyle/>
+          <a:p>
+            <a:pPr algn="ctr"/>
+            <a:r>
+              <a:rPr sz="1600" b="1" i="0">
+                <a:solidFill>
+                  <a:srgbClr val="FFFFFF"/>
+                </a:solidFill>
+                <a:latin typeface="Calibri"/>
+              </a:rPr>
+              <a:t>✓</a:t>
+            </a:r>
+          </a:p>
+        </p:txBody>
+      </p:sp>
+      <p:sp>
+        <p:nvSpPr>
+          <p:cNvPr id="19" name="Rounded Rectangle 18"/>
+          <p:cNvSpPr/>
+          <p:nvPr/>
+        </p:nvSpPr>
+        <p:spPr>
+          <a:xfrm>
+            <a:off x="640080" y="4782312"/>
+            <a:ext cx="5349240" cy="868680"/>
+          </a:xfrm>
+          <a:prstGeom prst="roundRect">
+            <a:avLst>
+              <a:gd name="adj" fmla="val 12000"/>
+            </a:avLst>
+          </a:prstGeom>
+          <a:solidFill>
+            <a:srgbClr val="EAF1F4"/>
+          </a:solidFill>
+          <a:ln>
+            <a:noFill/>
+          </a:ln>
+          <a:effectLst/>
+        </p:spPr>
+        <p:style>
+          <a:lnRef idx="1">
+            <a:schemeClr val="accent1"/>
+          </a:lnRef>
+          <a:fillRef idx="3">
+            <a:schemeClr val="accent1"/>
+          </a:fillRef>
+          <a:effectRef idx="2">
+            <a:schemeClr val="accent1"/>
+          </a:effectRef>
+          <a:fontRef idx="minor">
+            <a:schemeClr val="lt1"/>
+          </a:fontRef>
+        </p:style>
+        <p:txBody>
+          <a:bodyPr rtlCol="0" anchor="ctr"/>
+          <a:lstStyle/>
+          <a:p>
+            <a:pPr algn="ctr"/>
+          </a:p>
+        </p:txBody>
+      </p:sp>
+      <p:sp>
+        <p:nvSpPr>
+          <p:cNvPr id="20" name="Oval 19"/>
+          <p:cNvSpPr/>
+          <p:nvPr/>
+        </p:nvSpPr>
+        <p:spPr>
+          <a:xfrm>
+            <a:off x="914400" y="5010912"/>
+            <a:ext cx="411480" cy="411480"/>
+          </a:xfrm>
+          <a:prstGeom prst="ellipse">
+            <a:avLst/>
+          </a:prstGeom>
+          <a:solidFill>
+            <a:srgbClr val="0A9396"/>
+          </a:solidFill>
+          <a:ln>
+            <a:noFill/>
+          </a:ln>
+          <a:effectLst/>
+        </p:spPr>
+        <p:style>
+          <a:lnRef idx="1">
+            <a:schemeClr val="accent1"/>
+          </a:lnRef>
+          <a:fillRef idx="3">
+            <a:schemeClr val="accent1"/>
+          </a:fillRef>
+          <a:effectRef idx="2">
+            <a:schemeClr val="accent1"/>
+          </a:effectRef>
+          <a:fontRef idx="minor">
+            <a:schemeClr val="lt1"/>
+          </a:fontRef>
+        </p:style>
+        <p:txBody>
+          <a:bodyPr rtlCol="0" anchor="ctr"/>
+          <a:lstStyle/>
+          <a:p>
+            <a:pPr algn="ctr"/>
+          </a:p>
+        </p:txBody>
+      </p:sp>
+      <p:sp>
+        <p:nvSpPr>
+          <p:cNvPr id="21" name="TextBox 20"/>
+          <p:cNvSpPr txBox="1"/>
+          <p:nvPr/>
+        </p:nvSpPr>
+        <p:spPr>
+          <a:xfrm>
+            <a:off x="914400" y="5010912"/>
+            <a:ext cx="411480" cy="411480"/>
+          </a:xfrm>
+          <a:prstGeom prst="rect">
+            <a:avLst/>
+          </a:prstGeom>
+          <a:noFill/>
+        </p:spPr>
+        <p:txBody>
+          <a:bodyPr wrap="square" anchor="ctr" lIns="0" rIns="0" tIns="0" bIns="0">
+            <a:spAutoFit/>
+          </a:bodyPr>
+          <a:lstStyle/>
+          <a:p>
+            <a:pPr algn="ctr"/>
+            <a:r>
+              <a:rPr sz="1400" b="1" i="0">
+                <a:solidFill>
+                  <a:srgbClr val="FFFFFF"/>
+                </a:solidFill>
+                <a:latin typeface="Calibri"/>
+              </a:rPr>
+              <a:t>C</a:t>
+            </a:r>
+          </a:p>
+        </p:txBody>
+      </p:sp>
+      <p:sp>
+        <p:nvSpPr>
+          <p:cNvPr id="22" name="TextBox 21"/>
+          <p:cNvSpPr txBox="1"/>
+          <p:nvPr/>
+        </p:nvSpPr>
+        <p:spPr>
+          <a:xfrm>
+            <a:off x="1508760" y="4782312"/>
+            <a:ext cx="3840480" cy="868680"/>
+          </a:xfrm>
+          <a:prstGeom prst="rect">
+            <a:avLst/>
+          </a:prstGeom>
+          <a:noFill/>
+        </p:spPr>
+        <p:txBody>
+          <a:bodyPr wrap="square" anchor="ctr" lIns="0" rIns="0" tIns="0" bIns="0">
+            <a:spAutoFit/>
+          </a:bodyPr>
+          <a:lstStyle/>
+          <a:p>
+            <a:pPr algn="l"/>
+            <a:r>
+              <a:rPr sz="1450" b="0" i="0">
+                <a:solidFill>
+                  <a:srgbClr val="1D2433"/>
+                </a:solidFill>
+                <a:latin typeface="Calibri"/>
+              </a:rPr>
+              <a:t>8</a:t>
+            </a:r>
+          </a:p>
+        </p:txBody>
+      </p:sp>
+      <p:sp>
+        <p:nvSpPr>
+          <p:cNvPr id="23" name="Rounded Rectangle 22"/>
+          <p:cNvSpPr/>
+          <p:nvPr/>
+        </p:nvSpPr>
+        <p:spPr>
+          <a:xfrm>
+            <a:off x="6172200" y="4782312"/>
+            <a:ext cx="5349240" cy="868680"/>
+          </a:xfrm>
+          <a:prstGeom prst="roundRect">
+            <a:avLst>
+              <a:gd name="adj" fmla="val 12000"/>
+            </a:avLst>
+          </a:prstGeom>
+          <a:solidFill>
+            <a:srgbClr val="EAF1F4"/>
+          </a:solidFill>
+          <a:ln>
+            <a:noFill/>
+          </a:ln>
+          <a:effectLst/>
+        </p:spPr>
+        <p:style>
+          <a:lnRef idx="1">
+            <a:schemeClr val="accent1"/>
+          </a:lnRef>
+          <a:fillRef idx="3">
+            <a:schemeClr val="accent1"/>
+          </a:fillRef>
+          <a:effectRef idx="2">
+            <a:schemeClr val="accent1"/>
+          </a:effectRef>
+          <a:fontRef idx="minor">
+            <a:schemeClr val="lt1"/>
+          </a:fontRef>
+        </p:style>
+        <p:txBody>
+          <a:bodyPr rtlCol="0" anchor="ctr"/>
+          <a:lstStyle/>
+          <a:p>
+            <a:pPr algn="ctr"/>
+          </a:p>
+        </p:txBody>
+      </p:sp>
+      <p:sp>
+        <p:nvSpPr>
+          <p:cNvPr id="24" name="Oval 23"/>
+          <p:cNvSpPr/>
+          <p:nvPr/>
+        </p:nvSpPr>
+        <p:spPr>
+          <a:xfrm>
+            <a:off x="6446520" y="5010912"/>
+            <a:ext cx="411480" cy="411480"/>
+          </a:xfrm>
+          <a:prstGeom prst="ellipse">
+            <a:avLst/>
+          </a:prstGeom>
+          <a:solidFill>
+            <a:srgbClr val="0A9396"/>
+          </a:solidFill>
+          <a:ln>
+            <a:noFill/>
+          </a:ln>
+          <a:effectLst/>
+        </p:spPr>
+        <p:style>
+          <a:lnRef idx="1">
+            <a:schemeClr val="accent1"/>
+          </a:lnRef>
+          <a:fillRef idx="3">
+            <a:schemeClr val="accent1"/>
+          </a:fillRef>
+          <a:effectRef idx="2">
+            <a:schemeClr val="accent1"/>
+          </a:effectRef>
+          <a:fontRef idx="minor">
+            <a:schemeClr val="lt1"/>
+          </a:fontRef>
+        </p:style>
+        <p:txBody>
+          <a:bodyPr rtlCol="0" anchor="ctr"/>
+          <a:lstStyle/>
+          <a:p>
+            <a:pPr algn="ctr"/>
+          </a:p>
+        </p:txBody>
+      </p:sp>
+      <p:sp>
+        <p:nvSpPr>
+          <p:cNvPr id="25" name="TextBox 24"/>
+          <p:cNvSpPr txBox="1"/>
+          <p:nvPr/>
+        </p:nvSpPr>
+        <p:spPr>
+          <a:xfrm>
+            <a:off x="6446520" y="5010912"/>
+            <a:ext cx="411480" cy="411480"/>
+          </a:xfrm>
+          <a:prstGeom prst="rect">
+            <a:avLst/>
+          </a:prstGeom>
+          <a:noFill/>
+        </p:spPr>
+        <p:txBody>
+          <a:bodyPr wrap="square" anchor="ctr" lIns="0" rIns="0" tIns="0" bIns="0">
+            <a:spAutoFit/>
+          </a:bodyPr>
+          <a:lstStyle/>
+          <a:p>
+            <a:pPr algn="ctr"/>
+            <a:r>
+              <a:rPr sz="1400" b="1" i="0">
+                <a:solidFill>
+                  <a:srgbClr val="FFFFFF"/>
+                </a:solidFill>
+                <a:latin typeface="Calibri"/>
+              </a:rPr>
+              <a:t>D</a:t>
+            </a:r>
+          </a:p>
+        </p:txBody>
+      </p:sp>
+      <p:sp>
+        <p:nvSpPr>
+          <p:cNvPr id="26" name="TextBox 25"/>
+          <p:cNvSpPr txBox="1"/>
+          <p:nvPr/>
+        </p:nvSpPr>
+        <p:spPr>
+          <a:xfrm>
+            <a:off x="7040880" y="4782312"/>
+            <a:ext cx="3840480" cy="868680"/>
+          </a:xfrm>
+          <a:prstGeom prst="rect">
+            <a:avLst/>
+          </a:prstGeom>
+          <a:noFill/>
+        </p:spPr>
+        <p:txBody>
+          <a:bodyPr wrap="square" anchor="ctr" lIns="0" rIns="0" tIns="0" bIns="0">
+            <a:spAutoFit/>
+          </a:bodyPr>
+          <a:lstStyle/>
+          <a:p>
+            <a:pPr algn="l"/>
+            <a:r>
+              <a:rPr sz="1450" b="0" i="0">
+                <a:solidFill>
+                  <a:srgbClr val="1D2433"/>
+                </a:solidFill>
+                <a:latin typeface="Calibri"/>
+              </a:rPr>
+              <a:t>12</a:t>
+            </a:r>
+          </a:p>
+        </p:txBody>
+      </p:sp>
+      <p:sp>
+        <p:nvSpPr>
+          <p:cNvPr id="27" name="Rounded Rectangle 26"/>
+          <p:cNvSpPr/>
+          <p:nvPr/>
+        </p:nvSpPr>
+        <p:spPr>
+          <a:xfrm>
+            <a:off x="640080" y="5779008"/>
+            <a:ext cx="10881360" cy="566928"/>
+          </a:xfrm>
+          <a:prstGeom prst="roundRect">
+            <a:avLst>
+              <a:gd name="adj" fmla="val 10000"/>
+            </a:avLst>
+          </a:prstGeom>
+          <a:solidFill>
+            <a:srgbClr val="EEF2F7"/>
+          </a:solidFill>
+          <a:ln>
+            <a:noFill/>
+          </a:ln>
+          <a:effectLst/>
+        </p:spPr>
+        <p:style>
+          <a:lnRef idx="1">
+            <a:schemeClr val="accent1"/>
+          </a:lnRef>
+          <a:fillRef idx="3">
+            <a:schemeClr val="accent1"/>
+          </a:fillRef>
+          <a:effectRef idx="2">
+            <a:schemeClr val="accent1"/>
+          </a:effectRef>
+          <a:fontRef idx="minor">
+            <a:schemeClr val="lt1"/>
+          </a:fontRef>
+        </p:style>
+        <p:txBody>
+          <a:bodyPr rtlCol="0" anchor="ctr"/>
+          <a:lstStyle/>
+          <a:p>
+            <a:pPr algn="ctr"/>
+          </a:p>
+        </p:txBody>
+      </p:sp>
+      <p:sp>
+        <p:nvSpPr>
+          <p:cNvPr id="28" name="TextBox 27"/>
+          <p:cNvSpPr txBox="1"/>
+          <p:nvPr/>
+        </p:nvSpPr>
+        <p:spPr>
+          <a:xfrm>
+            <a:off x="914400" y="5779008"/>
+            <a:ext cx="10332720" cy="566928"/>
+          </a:xfrm>
+          <a:prstGeom prst="rect">
+            <a:avLst/>
+          </a:prstGeom>
+          <a:noFill/>
+        </p:spPr>
+        <p:txBody>
+          <a:bodyPr wrap="square" anchor="ctr" lIns="0" rIns="0" tIns="0" bIns="0">
+            <a:spAutoFit/>
+          </a:bodyPr>
+          <a:lstStyle/>
+          <a:p>
+            <a:pPr algn="l"/>
+            <a:r>
+              <a:rPr sz="1250" b="1" i="0">
+                <a:solidFill>
                   <a:srgbClr val="2A9D8F"/>
                 </a:solidFill>
                 <a:latin typeface="Arial"/>
               </a:rPr>
-              <a:t>WHY</a:t>
-            </a:r>
-          </a:p>
-        </p:txBody>
-      </p:sp>
-      <p:sp>
-        <p:nvSpPr>
-          <p:cNvPr id="13" name="TextBox 12"/>
-          <p:cNvSpPr txBox="1"/>
-          <p:nvPr/>
-        </p:nvSpPr>
-        <p:spPr>
-          <a:xfrm>
-            <a:off x="1005840" y="4297680"/>
-            <a:ext cx="10149840" cy="1280160"/>
-          </a:xfrm>
-          <a:prstGeom prst="rect">
-            <a:avLst/>
-          </a:prstGeom>
-          <a:noFill/>
-        </p:spPr>
-        <p:txBody>
-          <a:bodyPr wrap="square" anchor="t" lIns="0" rIns="0" tIns="0" bIns="0">
-            <a:spAutoFit/>
-          </a:bodyPr>
-          <a:lstStyle/>
-          <a:p>
-            <a:pPr algn="l">
-              <a:lnSpc>
-                <a:spcPct val="110000"/>
-              </a:lnSpc>
-            </a:pPr>
-            <a:r>
-              <a:rPr sz="1600" b="0" i="0">
+              <a:t>Why  </a:t>
+            </a:r>
+            <a:r>
+              <a:rPr sz="1200" b="0" i="0">
                 <a:solidFill>
                   <a:srgbClr val="1D2433"/>
                 </a:solidFill>
@@ -18939,7 +22707,7 @@
                 </a:solidFill>
                 <a:latin typeface="Calibri"/>
               </a:rPr>
-              <a:t>Q3 — Wedge</a:t>
+              <a:t>Q3 - Wedge</a:t>
             </a:r>
           </a:p>
         </p:txBody>
@@ -19235,7 +23003,7 @@
         <p:spPr>
           <a:xfrm>
             <a:off x="1508760" y="3749039"/>
-            <a:ext cx="4297680" cy="868680"/>
+            <a:ext cx="3840480" cy="868680"/>
           </a:xfrm>
           <a:prstGeom prst="rect">
             <a:avLst/>
@@ -19395,7 +23163,7 @@
         <p:spPr>
           <a:xfrm>
             <a:off x="7040880" y="3749039"/>
-            <a:ext cx="4297680" cy="868680"/>
+            <a:ext cx="3840480" cy="868680"/>
           </a:xfrm>
           <a:prstGeom prst="rect">
             <a:avLst/>
@@ -19555,7 +23323,7 @@
         <p:spPr>
           <a:xfrm>
             <a:off x="1508760" y="4782312"/>
-            <a:ext cx="4297680" cy="868680"/>
+            <a:ext cx="3840480" cy="868680"/>
           </a:xfrm>
           <a:prstGeom prst="rect">
             <a:avLst/>
@@ -19715,7 +23483,7 @@
         <p:spPr>
           <a:xfrm>
             <a:off x="7040880" y="4782312"/>
-            <a:ext cx="4297680" cy="868680"/>
+            <a:ext cx="3840480" cy="868680"/>
           </a:xfrm>
           <a:prstGeom prst="rect">
             <a:avLst/>
@@ -19782,7 +23550,7 @@
             <a:avLst/>
           </a:prstGeom>
           <a:solidFill>
-            <a:srgbClr val="2A9D8F"/>
+            <a:srgbClr val="0A9396"/>
           </a:solidFill>
           <a:ln>
             <a:noFill/>
@@ -19837,11 +23605,11 @@
             <a:r>
               <a:rPr sz="1300" b="1" i="0">
                 <a:solidFill>
-                  <a:srgbClr val="2A9D8F"/>
+                  <a:srgbClr val="0A9396"/>
                 </a:solidFill>
                 <a:latin typeface="Arial"/>
               </a:rPr>
-              <a:t>ANSWER REVEAL</a:t>
+              <a:t>QUIZ QUESTION</a:t>
             </a:r>
           </a:p>
         </p:txBody>
@@ -19876,7 +23644,7 @@
                 </a:solidFill>
                 <a:latin typeface="Calibri"/>
               </a:rPr>
-              <a:t>Q3 — Answer</a:t>
+              <a:t>Q3 - Wedge</a:t>
             </a:r>
           </a:p>
         </p:txBody>
@@ -19965,166 +23733,6 @@
           <a:prstGeom prst="roundRect">
             <a:avLst>
               <a:gd name="adj" fmla="val 4000"/>
-            </a:avLst>
-          </a:prstGeom>
-          <a:solidFill>
-            <a:srgbClr val="E9F5F0"/>
-          </a:solidFill>
-          <a:ln>
-            <a:noFill/>
-          </a:ln>
-          <a:effectLst/>
-        </p:spPr>
-        <p:style>
-          <a:lnRef idx="1">
-            <a:schemeClr val="accent1"/>
-          </a:lnRef>
-          <a:fillRef idx="3">
-            <a:schemeClr val="accent1"/>
-          </a:fillRef>
-          <a:effectRef idx="2">
-            <a:schemeClr val="accent1"/>
-          </a:effectRef>
-          <a:fontRef idx="minor">
-            <a:schemeClr val="lt1"/>
-          </a:fontRef>
-        </p:style>
-        <p:txBody>
-          <a:bodyPr rtlCol="0" anchor="ctr"/>
-          <a:lstStyle/>
-          <a:p>
-            <a:pPr algn="ctr"/>
-          </a:p>
-        </p:txBody>
-      </p:sp>
-      <p:sp>
-        <p:nvSpPr>
-          <p:cNvPr id="8" name="Oval 7"/>
-          <p:cNvSpPr/>
-          <p:nvPr/>
-        </p:nvSpPr>
-        <p:spPr>
-          <a:xfrm>
-            <a:off x="1005840" y="2240280"/>
-            <a:ext cx="731520" cy="731520"/>
-          </a:xfrm>
-          <a:prstGeom prst="ellipse">
-            <a:avLst/>
-          </a:prstGeom>
-          <a:solidFill>
-            <a:srgbClr val="2A9D8F"/>
-          </a:solidFill>
-          <a:ln>
-            <a:noFill/>
-          </a:ln>
-          <a:effectLst/>
-        </p:spPr>
-        <p:style>
-          <a:lnRef idx="1">
-            <a:schemeClr val="accent1"/>
-          </a:lnRef>
-          <a:fillRef idx="3">
-            <a:schemeClr val="accent1"/>
-          </a:fillRef>
-          <a:effectRef idx="2">
-            <a:schemeClr val="accent1"/>
-          </a:effectRef>
-          <a:fontRef idx="minor">
-            <a:schemeClr val="lt1"/>
-          </a:fontRef>
-        </p:style>
-        <p:txBody>
-          <a:bodyPr rtlCol="0" anchor="ctr"/>
-          <a:lstStyle/>
-          <a:p>
-            <a:pPr algn="ctr"/>
-          </a:p>
-        </p:txBody>
-      </p:sp>
-      <p:sp>
-        <p:nvSpPr>
-          <p:cNvPr id="9" name="TextBox 8"/>
-          <p:cNvSpPr txBox="1"/>
-          <p:nvPr/>
-        </p:nvSpPr>
-        <p:spPr>
-          <a:xfrm>
-            <a:off x="1005840" y="2240280"/>
-            <a:ext cx="731520" cy="731520"/>
-          </a:xfrm>
-          <a:prstGeom prst="rect">
-            <a:avLst/>
-          </a:prstGeom>
-          <a:noFill/>
-        </p:spPr>
-        <p:txBody>
-          <a:bodyPr wrap="square" anchor="ctr" lIns="0" rIns="0" tIns="0" bIns="0">
-            <a:spAutoFit/>
-          </a:bodyPr>
-          <a:lstStyle/>
-          <a:p>
-            <a:pPr algn="ctr"/>
-            <a:r>
-              <a:rPr sz="3000" b="1" i="0">
-                <a:solidFill>
-                  <a:srgbClr val="FFFFFF"/>
-                </a:solidFill>
-                <a:latin typeface="Calibri"/>
-              </a:rPr>
-              <a:t>✓</a:t>
-            </a:r>
-          </a:p>
-        </p:txBody>
-      </p:sp>
-      <p:sp>
-        <p:nvSpPr>
-          <p:cNvPr id="10" name="TextBox 9"/>
-          <p:cNvSpPr txBox="1"/>
-          <p:nvPr/>
-        </p:nvSpPr>
-        <p:spPr>
-          <a:xfrm>
-            <a:off x="1920240" y="1828800"/>
-            <a:ext cx="9326880" cy="1554480"/>
-          </a:xfrm>
-          <a:prstGeom prst="rect">
-            <a:avLst/>
-          </a:prstGeom>
-          <a:noFill/>
-        </p:spPr>
-        <p:txBody>
-          <a:bodyPr wrap="square" anchor="ctr" lIns="0" rIns="0" tIns="0" bIns="0">
-            <a:spAutoFit/>
-          </a:bodyPr>
-          <a:lstStyle/>
-          <a:p>
-            <a:pPr algn="l"/>
-            <a:r>
-              <a:rPr sz="2200" b="1" i="0">
-                <a:solidFill>
-                  <a:srgbClr val="1D2433"/>
-                </a:solidFill>
-                <a:latin typeface="Calibri"/>
-              </a:rPr>
-              <a:t>B. Two inclined planes joined together</a:t>
-            </a:r>
-          </a:p>
-        </p:txBody>
-      </p:sp>
-      <p:sp>
-        <p:nvSpPr>
-          <p:cNvPr id="11" name="Rounded Rectangle 10"/>
-          <p:cNvSpPr/>
-          <p:nvPr/>
-        </p:nvSpPr>
-        <p:spPr>
-          <a:xfrm>
-            <a:off x="640080" y="3657600"/>
-            <a:ext cx="10881360" cy="2011680"/>
-          </a:xfrm>
-          <a:prstGeom prst="roundRect">
-            <a:avLst>
-              <a:gd name="adj" fmla="val 3000"/>
             </a:avLst>
           </a:prstGeom>
           <a:solidFill>
@@ -20165,68 +23773,840 @@
       </p:sp>
       <p:sp>
         <p:nvSpPr>
+          <p:cNvPr id="8" name="TextBox 7"/>
+          <p:cNvSpPr txBox="1"/>
+          <p:nvPr/>
+        </p:nvSpPr>
+        <p:spPr>
+          <a:xfrm>
+            <a:off x="1005840" y="1828800"/>
+            <a:ext cx="10149840" cy="1554480"/>
+          </a:xfrm>
+          <a:prstGeom prst="rect">
+            <a:avLst/>
+          </a:prstGeom>
+          <a:noFill/>
+        </p:spPr>
+        <p:txBody>
+          <a:bodyPr wrap="square" anchor="ctr" lIns="0" rIns="0" tIns="0" bIns="0">
+            <a:spAutoFit/>
+          </a:bodyPr>
+          <a:lstStyle/>
+          <a:p>
+            <a:pPr algn="l"/>
+            <a:r>
+              <a:rPr sz="1900" b="1" i="0">
+                <a:solidFill>
+                  <a:srgbClr val="1D2433"/>
+                </a:solidFill>
+                <a:latin typeface="Calibri"/>
+              </a:rPr>
+              <a:t>A wedge is best described as:</a:t>
+            </a:r>
+          </a:p>
+        </p:txBody>
+      </p:sp>
+      <p:sp>
+        <p:nvSpPr>
+          <p:cNvPr id="9" name="Rounded Rectangle 8"/>
+          <p:cNvSpPr/>
+          <p:nvPr/>
+        </p:nvSpPr>
+        <p:spPr>
+          <a:xfrm>
+            <a:off x="640080" y="3749039"/>
+            <a:ext cx="5349240" cy="868680"/>
+          </a:xfrm>
+          <a:prstGeom prst="roundRect">
+            <a:avLst>
+              <a:gd name="adj" fmla="val 12000"/>
+            </a:avLst>
+          </a:prstGeom>
+          <a:solidFill>
+            <a:srgbClr val="EAF1F4"/>
+          </a:solidFill>
+          <a:ln>
+            <a:noFill/>
+          </a:ln>
+          <a:effectLst/>
+        </p:spPr>
+        <p:style>
+          <a:lnRef idx="1">
+            <a:schemeClr val="accent1"/>
+          </a:lnRef>
+          <a:fillRef idx="3">
+            <a:schemeClr val="accent1"/>
+          </a:fillRef>
+          <a:effectRef idx="2">
+            <a:schemeClr val="accent1"/>
+          </a:effectRef>
+          <a:fontRef idx="minor">
+            <a:schemeClr val="lt1"/>
+          </a:fontRef>
+        </p:style>
+        <p:txBody>
+          <a:bodyPr rtlCol="0" anchor="ctr"/>
+          <a:lstStyle/>
+          <a:p>
+            <a:pPr algn="ctr"/>
+          </a:p>
+        </p:txBody>
+      </p:sp>
+      <p:sp>
+        <p:nvSpPr>
+          <p:cNvPr id="10" name="Oval 9"/>
+          <p:cNvSpPr/>
+          <p:nvPr/>
+        </p:nvSpPr>
+        <p:spPr>
+          <a:xfrm>
+            <a:off x="914400" y="3977639"/>
+            <a:ext cx="411480" cy="411480"/>
+          </a:xfrm>
+          <a:prstGeom prst="ellipse">
+            <a:avLst/>
+          </a:prstGeom>
+          <a:solidFill>
+            <a:srgbClr val="0A9396"/>
+          </a:solidFill>
+          <a:ln>
+            <a:noFill/>
+          </a:ln>
+          <a:effectLst/>
+        </p:spPr>
+        <p:style>
+          <a:lnRef idx="1">
+            <a:schemeClr val="accent1"/>
+          </a:lnRef>
+          <a:fillRef idx="3">
+            <a:schemeClr val="accent1"/>
+          </a:fillRef>
+          <a:effectRef idx="2">
+            <a:schemeClr val="accent1"/>
+          </a:effectRef>
+          <a:fontRef idx="minor">
+            <a:schemeClr val="lt1"/>
+          </a:fontRef>
+        </p:style>
+        <p:txBody>
+          <a:bodyPr rtlCol="0" anchor="ctr"/>
+          <a:lstStyle/>
+          <a:p>
+            <a:pPr algn="ctr"/>
+          </a:p>
+        </p:txBody>
+      </p:sp>
+      <p:sp>
+        <p:nvSpPr>
+          <p:cNvPr id="11" name="TextBox 10"/>
+          <p:cNvSpPr txBox="1"/>
+          <p:nvPr/>
+        </p:nvSpPr>
+        <p:spPr>
+          <a:xfrm>
+            <a:off x="914400" y="3977639"/>
+            <a:ext cx="411480" cy="411480"/>
+          </a:xfrm>
+          <a:prstGeom prst="rect">
+            <a:avLst/>
+          </a:prstGeom>
+          <a:noFill/>
+        </p:spPr>
+        <p:txBody>
+          <a:bodyPr wrap="square" anchor="ctr" lIns="0" rIns="0" tIns="0" bIns="0">
+            <a:spAutoFit/>
+          </a:bodyPr>
+          <a:lstStyle/>
+          <a:p>
+            <a:pPr algn="ctr"/>
+            <a:r>
+              <a:rPr sz="1400" b="1" i="0">
+                <a:solidFill>
+                  <a:srgbClr val="FFFFFF"/>
+                </a:solidFill>
+                <a:latin typeface="Calibri"/>
+              </a:rPr>
+              <a:t>A</a:t>
+            </a:r>
+          </a:p>
+        </p:txBody>
+      </p:sp>
+      <p:sp>
+        <p:nvSpPr>
           <p:cNvPr id="12" name="TextBox 11"/>
           <p:cNvSpPr txBox="1"/>
           <p:nvPr/>
         </p:nvSpPr>
         <p:spPr>
           <a:xfrm>
-            <a:off x="1005840" y="3886200"/>
-            <a:ext cx="4572000" cy="365760"/>
-          </a:xfrm>
-          <a:prstGeom prst="rect">
-            <a:avLst/>
-          </a:prstGeom>
-          <a:noFill/>
-        </p:spPr>
-        <p:txBody>
-          <a:bodyPr wrap="square" anchor="t" lIns="0" rIns="0" tIns="0" bIns="0">
+            <a:off x="1508760" y="3749039"/>
+            <a:ext cx="3840480" cy="868680"/>
+          </a:xfrm>
+          <a:prstGeom prst="rect">
+            <a:avLst/>
+          </a:prstGeom>
+          <a:noFill/>
+        </p:spPr>
+        <p:txBody>
+          <a:bodyPr wrap="square" anchor="ctr" lIns="0" rIns="0" tIns="0" bIns="0">
             <a:spAutoFit/>
           </a:bodyPr>
           <a:lstStyle/>
           <a:p>
             <a:pPr algn="l"/>
             <a:r>
+              <a:rPr sz="1450" b="0" i="0">
+                <a:solidFill>
+                  <a:srgbClr val="1D2433"/>
+                </a:solidFill>
+                <a:latin typeface="Calibri"/>
+              </a:rPr>
+              <a:t>A wheel and a rope</a:t>
+            </a:r>
+          </a:p>
+        </p:txBody>
+      </p:sp>
+      <p:sp>
+        <p:nvSpPr>
+          <p:cNvPr id="13" name="Rounded Rectangle 12"/>
+          <p:cNvSpPr/>
+          <p:nvPr/>
+        </p:nvSpPr>
+        <p:spPr>
+          <a:xfrm>
+            <a:off x="6172200" y="3749039"/>
+            <a:ext cx="5349240" cy="868680"/>
+          </a:xfrm>
+          <a:prstGeom prst="roundRect">
+            <a:avLst>
+              <a:gd name="adj" fmla="val 12000"/>
+            </a:avLst>
+          </a:prstGeom>
+          <a:solidFill>
+            <a:srgbClr val="E9F5F0"/>
+          </a:solidFill>
+          <a:ln w="31750">
+            <a:solidFill>
+              <a:srgbClr val="2A9D8F"/>
+            </a:solidFill>
+          </a:ln>
+          <a:effectLst/>
+        </p:spPr>
+        <p:style>
+          <a:lnRef idx="1">
+            <a:schemeClr val="accent1"/>
+          </a:lnRef>
+          <a:fillRef idx="3">
+            <a:schemeClr val="accent1"/>
+          </a:fillRef>
+          <a:effectRef idx="2">
+            <a:schemeClr val="accent1"/>
+          </a:effectRef>
+          <a:fontRef idx="minor">
+            <a:schemeClr val="lt1"/>
+          </a:fontRef>
+        </p:style>
+        <p:txBody>
+          <a:bodyPr rtlCol="0" anchor="ctr"/>
+          <a:lstStyle/>
+          <a:p>
+            <a:pPr algn="ctr"/>
+          </a:p>
+        </p:txBody>
+      </p:sp>
+      <p:sp>
+        <p:nvSpPr>
+          <p:cNvPr id="14" name="Oval 13"/>
+          <p:cNvSpPr/>
+          <p:nvPr/>
+        </p:nvSpPr>
+        <p:spPr>
+          <a:xfrm>
+            <a:off x="6446520" y="3977639"/>
+            <a:ext cx="411480" cy="411480"/>
+          </a:xfrm>
+          <a:prstGeom prst="ellipse">
+            <a:avLst/>
+          </a:prstGeom>
+          <a:solidFill>
+            <a:srgbClr val="2A9D8F"/>
+          </a:solidFill>
+          <a:ln>
+            <a:noFill/>
+          </a:ln>
+          <a:effectLst/>
+        </p:spPr>
+        <p:style>
+          <a:lnRef idx="1">
+            <a:schemeClr val="accent1"/>
+          </a:lnRef>
+          <a:fillRef idx="3">
+            <a:schemeClr val="accent1"/>
+          </a:fillRef>
+          <a:effectRef idx="2">
+            <a:schemeClr val="accent1"/>
+          </a:effectRef>
+          <a:fontRef idx="minor">
+            <a:schemeClr val="lt1"/>
+          </a:fontRef>
+        </p:style>
+        <p:txBody>
+          <a:bodyPr rtlCol="0" anchor="ctr"/>
+          <a:lstStyle/>
+          <a:p>
+            <a:pPr algn="ctr"/>
+          </a:p>
+        </p:txBody>
+      </p:sp>
+      <p:sp>
+        <p:nvSpPr>
+          <p:cNvPr id="15" name="TextBox 14"/>
+          <p:cNvSpPr txBox="1"/>
+          <p:nvPr/>
+        </p:nvSpPr>
+        <p:spPr>
+          <a:xfrm>
+            <a:off x="6446520" y="3977639"/>
+            <a:ext cx="411480" cy="411480"/>
+          </a:xfrm>
+          <a:prstGeom prst="rect">
+            <a:avLst/>
+          </a:prstGeom>
+          <a:noFill/>
+        </p:spPr>
+        <p:txBody>
+          <a:bodyPr wrap="square" anchor="ctr" lIns="0" rIns="0" tIns="0" bIns="0">
+            <a:spAutoFit/>
+          </a:bodyPr>
+          <a:lstStyle/>
+          <a:p>
+            <a:pPr algn="ctr"/>
+            <a:r>
               <a:rPr sz="1400" b="1" i="0">
                 <a:solidFill>
+                  <a:srgbClr val="FFFFFF"/>
+                </a:solidFill>
+                <a:latin typeface="Calibri"/>
+              </a:rPr>
+              <a:t>B</a:t>
+            </a:r>
+          </a:p>
+        </p:txBody>
+      </p:sp>
+      <p:sp>
+        <p:nvSpPr>
+          <p:cNvPr id="16" name="TextBox 15"/>
+          <p:cNvSpPr txBox="1"/>
+          <p:nvPr/>
+        </p:nvSpPr>
+        <p:spPr>
+          <a:xfrm>
+            <a:off x="7040880" y="3749039"/>
+            <a:ext cx="3840480" cy="868680"/>
+          </a:xfrm>
+          <a:prstGeom prst="rect">
+            <a:avLst/>
+          </a:prstGeom>
+          <a:noFill/>
+        </p:spPr>
+        <p:txBody>
+          <a:bodyPr wrap="square" anchor="ctr" lIns="0" rIns="0" tIns="0" bIns="0">
+            <a:spAutoFit/>
+          </a:bodyPr>
+          <a:lstStyle/>
+          <a:p>
+            <a:pPr algn="l"/>
+            <a:r>
+              <a:rPr sz="1450" b="1" i="0">
+                <a:solidFill>
+                  <a:srgbClr val="1D2433"/>
+                </a:solidFill>
+                <a:latin typeface="Calibri"/>
+              </a:rPr>
+              <a:t>Two inclined planes joined together</a:t>
+            </a:r>
+          </a:p>
+        </p:txBody>
+      </p:sp>
+      <p:sp>
+        <p:nvSpPr>
+          <p:cNvPr id="17" name="Oval 16"/>
+          <p:cNvSpPr/>
+          <p:nvPr/>
+        </p:nvSpPr>
+        <p:spPr>
+          <a:xfrm>
+            <a:off x="10972800" y="3995927"/>
+            <a:ext cx="365760" cy="365760"/>
+          </a:xfrm>
+          <a:prstGeom prst="ellipse">
+            <a:avLst/>
+          </a:prstGeom>
+          <a:solidFill>
+            <a:srgbClr val="2A9D8F"/>
+          </a:solidFill>
+          <a:ln>
+            <a:noFill/>
+          </a:ln>
+          <a:effectLst/>
+        </p:spPr>
+        <p:style>
+          <a:lnRef idx="1">
+            <a:schemeClr val="accent1"/>
+          </a:lnRef>
+          <a:fillRef idx="3">
+            <a:schemeClr val="accent1"/>
+          </a:fillRef>
+          <a:effectRef idx="2">
+            <a:schemeClr val="accent1"/>
+          </a:effectRef>
+          <a:fontRef idx="minor">
+            <a:schemeClr val="lt1"/>
+          </a:fontRef>
+        </p:style>
+        <p:txBody>
+          <a:bodyPr rtlCol="0" anchor="ctr"/>
+          <a:lstStyle/>
+          <a:p>
+            <a:pPr algn="ctr"/>
+          </a:p>
+        </p:txBody>
+      </p:sp>
+      <p:sp>
+        <p:nvSpPr>
+          <p:cNvPr id="18" name="TextBox 17"/>
+          <p:cNvSpPr txBox="1"/>
+          <p:nvPr/>
+        </p:nvSpPr>
+        <p:spPr>
+          <a:xfrm>
+            <a:off x="10972800" y="3950207"/>
+            <a:ext cx="365760" cy="365760"/>
+          </a:xfrm>
+          <a:prstGeom prst="rect">
+            <a:avLst/>
+          </a:prstGeom>
+          <a:noFill/>
+        </p:spPr>
+        <p:txBody>
+          <a:bodyPr wrap="square" anchor="ctr" lIns="0" rIns="0" tIns="0" bIns="0">
+            <a:spAutoFit/>
+          </a:bodyPr>
+          <a:lstStyle/>
+          <a:p>
+            <a:pPr algn="ctr"/>
+            <a:r>
+              <a:rPr sz="1600" b="1" i="0">
+                <a:solidFill>
+                  <a:srgbClr val="FFFFFF"/>
+                </a:solidFill>
+                <a:latin typeface="Calibri"/>
+              </a:rPr>
+              <a:t>✓</a:t>
+            </a:r>
+          </a:p>
+        </p:txBody>
+      </p:sp>
+      <p:sp>
+        <p:nvSpPr>
+          <p:cNvPr id="19" name="Rounded Rectangle 18"/>
+          <p:cNvSpPr/>
+          <p:nvPr/>
+        </p:nvSpPr>
+        <p:spPr>
+          <a:xfrm>
+            <a:off x="640080" y="4782312"/>
+            <a:ext cx="5349240" cy="868680"/>
+          </a:xfrm>
+          <a:prstGeom prst="roundRect">
+            <a:avLst>
+              <a:gd name="adj" fmla="val 12000"/>
+            </a:avLst>
+          </a:prstGeom>
+          <a:solidFill>
+            <a:srgbClr val="EAF1F4"/>
+          </a:solidFill>
+          <a:ln>
+            <a:noFill/>
+          </a:ln>
+          <a:effectLst/>
+        </p:spPr>
+        <p:style>
+          <a:lnRef idx="1">
+            <a:schemeClr val="accent1"/>
+          </a:lnRef>
+          <a:fillRef idx="3">
+            <a:schemeClr val="accent1"/>
+          </a:fillRef>
+          <a:effectRef idx="2">
+            <a:schemeClr val="accent1"/>
+          </a:effectRef>
+          <a:fontRef idx="minor">
+            <a:schemeClr val="lt1"/>
+          </a:fontRef>
+        </p:style>
+        <p:txBody>
+          <a:bodyPr rtlCol="0" anchor="ctr"/>
+          <a:lstStyle/>
+          <a:p>
+            <a:pPr algn="ctr"/>
+          </a:p>
+        </p:txBody>
+      </p:sp>
+      <p:sp>
+        <p:nvSpPr>
+          <p:cNvPr id="20" name="Oval 19"/>
+          <p:cNvSpPr/>
+          <p:nvPr/>
+        </p:nvSpPr>
+        <p:spPr>
+          <a:xfrm>
+            <a:off x="914400" y="5010912"/>
+            <a:ext cx="411480" cy="411480"/>
+          </a:xfrm>
+          <a:prstGeom prst="ellipse">
+            <a:avLst/>
+          </a:prstGeom>
+          <a:solidFill>
+            <a:srgbClr val="0A9396"/>
+          </a:solidFill>
+          <a:ln>
+            <a:noFill/>
+          </a:ln>
+          <a:effectLst/>
+        </p:spPr>
+        <p:style>
+          <a:lnRef idx="1">
+            <a:schemeClr val="accent1"/>
+          </a:lnRef>
+          <a:fillRef idx="3">
+            <a:schemeClr val="accent1"/>
+          </a:fillRef>
+          <a:effectRef idx="2">
+            <a:schemeClr val="accent1"/>
+          </a:effectRef>
+          <a:fontRef idx="minor">
+            <a:schemeClr val="lt1"/>
+          </a:fontRef>
+        </p:style>
+        <p:txBody>
+          <a:bodyPr rtlCol="0" anchor="ctr"/>
+          <a:lstStyle/>
+          <a:p>
+            <a:pPr algn="ctr"/>
+          </a:p>
+        </p:txBody>
+      </p:sp>
+      <p:sp>
+        <p:nvSpPr>
+          <p:cNvPr id="21" name="TextBox 20"/>
+          <p:cNvSpPr txBox="1"/>
+          <p:nvPr/>
+        </p:nvSpPr>
+        <p:spPr>
+          <a:xfrm>
+            <a:off x="914400" y="5010912"/>
+            <a:ext cx="411480" cy="411480"/>
+          </a:xfrm>
+          <a:prstGeom prst="rect">
+            <a:avLst/>
+          </a:prstGeom>
+          <a:noFill/>
+        </p:spPr>
+        <p:txBody>
+          <a:bodyPr wrap="square" anchor="ctr" lIns="0" rIns="0" tIns="0" bIns="0">
+            <a:spAutoFit/>
+          </a:bodyPr>
+          <a:lstStyle/>
+          <a:p>
+            <a:pPr algn="ctr"/>
+            <a:r>
+              <a:rPr sz="1400" b="1" i="0">
+                <a:solidFill>
+                  <a:srgbClr val="FFFFFF"/>
+                </a:solidFill>
+                <a:latin typeface="Calibri"/>
+              </a:rPr>
+              <a:t>C</a:t>
+            </a:r>
+          </a:p>
+        </p:txBody>
+      </p:sp>
+      <p:sp>
+        <p:nvSpPr>
+          <p:cNvPr id="22" name="TextBox 21"/>
+          <p:cNvSpPr txBox="1"/>
+          <p:nvPr/>
+        </p:nvSpPr>
+        <p:spPr>
+          <a:xfrm>
+            <a:off x="1508760" y="4782312"/>
+            <a:ext cx="3840480" cy="868680"/>
+          </a:xfrm>
+          <a:prstGeom prst="rect">
+            <a:avLst/>
+          </a:prstGeom>
+          <a:noFill/>
+        </p:spPr>
+        <p:txBody>
+          <a:bodyPr wrap="square" anchor="ctr" lIns="0" rIns="0" tIns="0" bIns="0">
+            <a:spAutoFit/>
+          </a:bodyPr>
+          <a:lstStyle/>
+          <a:p>
+            <a:pPr algn="l"/>
+            <a:r>
+              <a:rPr sz="1450" b="0" i="0">
+                <a:solidFill>
+                  <a:srgbClr val="1D2433"/>
+                </a:solidFill>
+                <a:latin typeface="Calibri"/>
+              </a:rPr>
+              <a:t>A bar turning about a fulcrum</a:t>
+            </a:r>
+          </a:p>
+        </p:txBody>
+      </p:sp>
+      <p:sp>
+        <p:nvSpPr>
+          <p:cNvPr id="23" name="Rounded Rectangle 22"/>
+          <p:cNvSpPr/>
+          <p:nvPr/>
+        </p:nvSpPr>
+        <p:spPr>
+          <a:xfrm>
+            <a:off x="6172200" y="4782312"/>
+            <a:ext cx="5349240" cy="868680"/>
+          </a:xfrm>
+          <a:prstGeom prst="roundRect">
+            <a:avLst>
+              <a:gd name="adj" fmla="val 12000"/>
+            </a:avLst>
+          </a:prstGeom>
+          <a:solidFill>
+            <a:srgbClr val="EAF1F4"/>
+          </a:solidFill>
+          <a:ln>
+            <a:noFill/>
+          </a:ln>
+          <a:effectLst/>
+        </p:spPr>
+        <p:style>
+          <a:lnRef idx="1">
+            <a:schemeClr val="accent1"/>
+          </a:lnRef>
+          <a:fillRef idx="3">
+            <a:schemeClr val="accent1"/>
+          </a:fillRef>
+          <a:effectRef idx="2">
+            <a:schemeClr val="accent1"/>
+          </a:effectRef>
+          <a:fontRef idx="minor">
+            <a:schemeClr val="lt1"/>
+          </a:fontRef>
+        </p:style>
+        <p:txBody>
+          <a:bodyPr rtlCol="0" anchor="ctr"/>
+          <a:lstStyle/>
+          <a:p>
+            <a:pPr algn="ctr"/>
+          </a:p>
+        </p:txBody>
+      </p:sp>
+      <p:sp>
+        <p:nvSpPr>
+          <p:cNvPr id="24" name="Oval 23"/>
+          <p:cNvSpPr/>
+          <p:nvPr/>
+        </p:nvSpPr>
+        <p:spPr>
+          <a:xfrm>
+            <a:off x="6446520" y="5010912"/>
+            <a:ext cx="411480" cy="411480"/>
+          </a:xfrm>
+          <a:prstGeom prst="ellipse">
+            <a:avLst/>
+          </a:prstGeom>
+          <a:solidFill>
+            <a:srgbClr val="0A9396"/>
+          </a:solidFill>
+          <a:ln>
+            <a:noFill/>
+          </a:ln>
+          <a:effectLst/>
+        </p:spPr>
+        <p:style>
+          <a:lnRef idx="1">
+            <a:schemeClr val="accent1"/>
+          </a:lnRef>
+          <a:fillRef idx="3">
+            <a:schemeClr val="accent1"/>
+          </a:fillRef>
+          <a:effectRef idx="2">
+            <a:schemeClr val="accent1"/>
+          </a:effectRef>
+          <a:fontRef idx="minor">
+            <a:schemeClr val="lt1"/>
+          </a:fontRef>
+        </p:style>
+        <p:txBody>
+          <a:bodyPr rtlCol="0" anchor="ctr"/>
+          <a:lstStyle/>
+          <a:p>
+            <a:pPr algn="ctr"/>
+          </a:p>
+        </p:txBody>
+      </p:sp>
+      <p:sp>
+        <p:nvSpPr>
+          <p:cNvPr id="25" name="TextBox 24"/>
+          <p:cNvSpPr txBox="1"/>
+          <p:nvPr/>
+        </p:nvSpPr>
+        <p:spPr>
+          <a:xfrm>
+            <a:off x="6446520" y="5010912"/>
+            <a:ext cx="411480" cy="411480"/>
+          </a:xfrm>
+          <a:prstGeom prst="rect">
+            <a:avLst/>
+          </a:prstGeom>
+          <a:noFill/>
+        </p:spPr>
+        <p:txBody>
+          <a:bodyPr wrap="square" anchor="ctr" lIns="0" rIns="0" tIns="0" bIns="0">
+            <a:spAutoFit/>
+          </a:bodyPr>
+          <a:lstStyle/>
+          <a:p>
+            <a:pPr algn="ctr"/>
+            <a:r>
+              <a:rPr sz="1400" b="1" i="0">
+                <a:solidFill>
+                  <a:srgbClr val="FFFFFF"/>
+                </a:solidFill>
+                <a:latin typeface="Calibri"/>
+              </a:rPr>
+              <a:t>D</a:t>
+            </a:r>
+          </a:p>
+        </p:txBody>
+      </p:sp>
+      <p:sp>
+        <p:nvSpPr>
+          <p:cNvPr id="26" name="TextBox 25"/>
+          <p:cNvSpPr txBox="1"/>
+          <p:nvPr/>
+        </p:nvSpPr>
+        <p:spPr>
+          <a:xfrm>
+            <a:off x="7040880" y="4782312"/>
+            <a:ext cx="3840480" cy="868680"/>
+          </a:xfrm>
+          <a:prstGeom prst="rect">
+            <a:avLst/>
+          </a:prstGeom>
+          <a:noFill/>
+        </p:spPr>
+        <p:txBody>
+          <a:bodyPr wrap="square" anchor="ctr" lIns="0" rIns="0" tIns="0" bIns="0">
+            <a:spAutoFit/>
+          </a:bodyPr>
+          <a:lstStyle/>
+          <a:p>
+            <a:pPr algn="l"/>
+            <a:r>
+              <a:rPr sz="1450" b="0" i="0">
+                <a:solidFill>
+                  <a:srgbClr val="1D2433"/>
+                </a:solidFill>
+                <a:latin typeface="Calibri"/>
+              </a:rPr>
+              <a:t>A grooved wheel</a:t>
+            </a:r>
+          </a:p>
+        </p:txBody>
+      </p:sp>
+      <p:sp>
+        <p:nvSpPr>
+          <p:cNvPr id="27" name="Rounded Rectangle 26"/>
+          <p:cNvSpPr/>
+          <p:nvPr/>
+        </p:nvSpPr>
+        <p:spPr>
+          <a:xfrm>
+            <a:off x="640080" y="5779008"/>
+            <a:ext cx="10881360" cy="566928"/>
+          </a:xfrm>
+          <a:prstGeom prst="roundRect">
+            <a:avLst>
+              <a:gd name="adj" fmla="val 10000"/>
+            </a:avLst>
+          </a:prstGeom>
+          <a:solidFill>
+            <a:srgbClr val="EEF2F7"/>
+          </a:solidFill>
+          <a:ln>
+            <a:noFill/>
+          </a:ln>
+          <a:effectLst/>
+        </p:spPr>
+        <p:style>
+          <a:lnRef idx="1">
+            <a:schemeClr val="accent1"/>
+          </a:lnRef>
+          <a:fillRef idx="3">
+            <a:schemeClr val="accent1"/>
+          </a:fillRef>
+          <a:effectRef idx="2">
+            <a:schemeClr val="accent1"/>
+          </a:effectRef>
+          <a:fontRef idx="minor">
+            <a:schemeClr val="lt1"/>
+          </a:fontRef>
+        </p:style>
+        <p:txBody>
+          <a:bodyPr rtlCol="0" anchor="ctr"/>
+          <a:lstStyle/>
+          <a:p>
+            <a:pPr algn="ctr"/>
+          </a:p>
+        </p:txBody>
+      </p:sp>
+      <p:sp>
+        <p:nvSpPr>
+          <p:cNvPr id="28" name="TextBox 27"/>
+          <p:cNvSpPr txBox="1"/>
+          <p:nvPr/>
+        </p:nvSpPr>
+        <p:spPr>
+          <a:xfrm>
+            <a:off x="914400" y="5779008"/>
+            <a:ext cx="10332720" cy="566928"/>
+          </a:xfrm>
+          <a:prstGeom prst="rect">
+            <a:avLst/>
+          </a:prstGeom>
+          <a:noFill/>
+        </p:spPr>
+        <p:txBody>
+          <a:bodyPr wrap="square" anchor="ctr" lIns="0" rIns="0" tIns="0" bIns="0">
+            <a:spAutoFit/>
+          </a:bodyPr>
+          <a:lstStyle/>
+          <a:p>
+            <a:pPr algn="l"/>
+            <a:r>
+              <a:rPr sz="1250" b="1" i="0">
+                <a:solidFill>
                   <a:srgbClr val="2A9D8F"/>
                 </a:solidFill>
                 <a:latin typeface="Arial"/>
               </a:rPr>
-              <a:t>WHY</a:t>
-            </a:r>
-          </a:p>
-        </p:txBody>
-      </p:sp>
-      <p:sp>
-        <p:nvSpPr>
-          <p:cNvPr id="13" name="TextBox 12"/>
-          <p:cNvSpPr txBox="1"/>
-          <p:nvPr/>
-        </p:nvSpPr>
-        <p:spPr>
-          <a:xfrm>
-            <a:off x="1005840" y="4297680"/>
-            <a:ext cx="10149840" cy="1280160"/>
-          </a:xfrm>
-          <a:prstGeom prst="rect">
-            <a:avLst/>
-          </a:prstGeom>
-          <a:noFill/>
-        </p:spPr>
-        <p:txBody>
-          <a:bodyPr wrap="square" anchor="t" lIns="0" rIns="0" tIns="0" bIns="0">
-            <a:spAutoFit/>
-          </a:bodyPr>
-          <a:lstStyle/>
-          <a:p>
-            <a:pPr algn="l">
-              <a:lnSpc>
-                <a:spcPct val="110000"/>
-              </a:lnSpc>
-            </a:pPr>
-            <a:r>
-              <a:rPr sz="1600" b="0" i="0">
+              <a:t>Why  </a:t>
+            </a:r>
+            <a:r>
+              <a:rPr sz="1200" b="0" i="0">
                 <a:solidFill>
                   <a:srgbClr val="1D2433"/>
                 </a:solidFill>
@@ -20372,7 +24752,7 @@
                 </a:solidFill>
                 <a:latin typeface="Calibri"/>
               </a:rPr>
-              <a:t>Q4 — Screw</a:t>
+              <a:t>Q4 - Screw</a:t>
             </a:r>
           </a:p>
         </p:txBody>
@@ -20668,7 +25048,7 @@
         <p:spPr>
           <a:xfrm>
             <a:off x="1508760" y="3749039"/>
-            <a:ext cx="4297680" cy="868680"/>
+            <a:ext cx="3840480" cy="868680"/>
           </a:xfrm>
           <a:prstGeom prst="rect">
             <a:avLst/>
@@ -20828,7 +25208,7 @@
         <p:spPr>
           <a:xfrm>
             <a:off x="7040880" y="3749039"/>
-            <a:ext cx="4297680" cy="868680"/>
+            <a:ext cx="3840480" cy="868680"/>
           </a:xfrm>
           <a:prstGeom prst="rect">
             <a:avLst/>
@@ -20988,7 +25368,7 @@
         <p:spPr>
           <a:xfrm>
             <a:off x="1508760" y="4782312"/>
-            <a:ext cx="4297680" cy="868680"/>
+            <a:ext cx="3840480" cy="868680"/>
           </a:xfrm>
           <a:prstGeom prst="rect">
             <a:avLst/>
@@ -21148,7 +25528,7 @@
         <p:spPr>
           <a:xfrm>
             <a:off x="7040880" y="4782312"/>
-            <a:ext cx="4297680" cy="868680"/>
+            <a:ext cx="3840480" cy="868680"/>
           </a:xfrm>
           <a:prstGeom prst="rect">
             <a:avLst/>
@@ -21215,7 +25595,7 @@
             <a:avLst/>
           </a:prstGeom>
           <a:solidFill>
-            <a:srgbClr val="2A9D8F"/>
+            <a:srgbClr val="0A9396"/>
           </a:solidFill>
           <a:ln>
             <a:noFill/>
@@ -21270,11 +25650,11 @@
             <a:r>
               <a:rPr sz="1300" b="1" i="0">
                 <a:solidFill>
-                  <a:srgbClr val="2A9D8F"/>
+                  <a:srgbClr val="0A9396"/>
                 </a:solidFill>
                 <a:latin typeface="Arial"/>
               </a:rPr>
-              <a:t>ANSWER REVEAL</a:t>
+              <a:t>QUIZ QUESTION</a:t>
             </a:r>
           </a:p>
         </p:txBody>
@@ -21309,7 +25689,7 @@
                 </a:solidFill>
                 <a:latin typeface="Calibri"/>
               </a:rPr>
-              <a:t>Q4 — Answer</a:t>
+              <a:t>Q4 - Screw</a:t>
             </a:r>
           </a:p>
         </p:txBody>
@@ -21398,166 +25778,6 @@
           <a:prstGeom prst="roundRect">
             <a:avLst>
               <a:gd name="adj" fmla="val 4000"/>
-            </a:avLst>
-          </a:prstGeom>
-          <a:solidFill>
-            <a:srgbClr val="E9F5F0"/>
-          </a:solidFill>
-          <a:ln>
-            <a:noFill/>
-          </a:ln>
-          <a:effectLst/>
-        </p:spPr>
-        <p:style>
-          <a:lnRef idx="1">
-            <a:schemeClr val="accent1"/>
-          </a:lnRef>
-          <a:fillRef idx="3">
-            <a:schemeClr val="accent1"/>
-          </a:fillRef>
-          <a:effectRef idx="2">
-            <a:schemeClr val="accent1"/>
-          </a:effectRef>
-          <a:fontRef idx="minor">
-            <a:schemeClr val="lt1"/>
-          </a:fontRef>
-        </p:style>
-        <p:txBody>
-          <a:bodyPr rtlCol="0" anchor="ctr"/>
-          <a:lstStyle/>
-          <a:p>
-            <a:pPr algn="ctr"/>
-          </a:p>
-        </p:txBody>
-      </p:sp>
-      <p:sp>
-        <p:nvSpPr>
-          <p:cNvPr id="8" name="Oval 7"/>
-          <p:cNvSpPr/>
-          <p:nvPr/>
-        </p:nvSpPr>
-        <p:spPr>
-          <a:xfrm>
-            <a:off x="1005840" y="2240280"/>
-            <a:ext cx="731520" cy="731520"/>
-          </a:xfrm>
-          <a:prstGeom prst="ellipse">
-            <a:avLst/>
-          </a:prstGeom>
-          <a:solidFill>
-            <a:srgbClr val="2A9D8F"/>
-          </a:solidFill>
-          <a:ln>
-            <a:noFill/>
-          </a:ln>
-          <a:effectLst/>
-        </p:spPr>
-        <p:style>
-          <a:lnRef idx="1">
-            <a:schemeClr val="accent1"/>
-          </a:lnRef>
-          <a:fillRef idx="3">
-            <a:schemeClr val="accent1"/>
-          </a:fillRef>
-          <a:effectRef idx="2">
-            <a:schemeClr val="accent1"/>
-          </a:effectRef>
-          <a:fontRef idx="minor">
-            <a:schemeClr val="lt1"/>
-          </a:fontRef>
-        </p:style>
-        <p:txBody>
-          <a:bodyPr rtlCol="0" anchor="ctr"/>
-          <a:lstStyle/>
-          <a:p>
-            <a:pPr algn="ctr"/>
-          </a:p>
-        </p:txBody>
-      </p:sp>
-      <p:sp>
-        <p:nvSpPr>
-          <p:cNvPr id="9" name="TextBox 8"/>
-          <p:cNvSpPr txBox="1"/>
-          <p:nvPr/>
-        </p:nvSpPr>
-        <p:spPr>
-          <a:xfrm>
-            <a:off x="1005840" y="2240280"/>
-            <a:ext cx="731520" cy="731520"/>
-          </a:xfrm>
-          <a:prstGeom prst="rect">
-            <a:avLst/>
-          </a:prstGeom>
-          <a:noFill/>
-        </p:spPr>
-        <p:txBody>
-          <a:bodyPr wrap="square" anchor="ctr" lIns="0" rIns="0" tIns="0" bIns="0">
-            <a:spAutoFit/>
-          </a:bodyPr>
-          <a:lstStyle/>
-          <a:p>
-            <a:pPr algn="ctr"/>
-            <a:r>
-              <a:rPr sz="3000" b="1" i="0">
-                <a:solidFill>
-                  <a:srgbClr val="FFFFFF"/>
-                </a:solidFill>
-                <a:latin typeface="Calibri"/>
-              </a:rPr>
-              <a:t>✓</a:t>
-            </a:r>
-          </a:p>
-        </p:txBody>
-      </p:sp>
-      <p:sp>
-        <p:nvSpPr>
-          <p:cNvPr id="10" name="TextBox 9"/>
-          <p:cNvSpPr txBox="1"/>
-          <p:nvPr/>
-        </p:nvSpPr>
-        <p:spPr>
-          <a:xfrm>
-            <a:off x="1920240" y="1828800"/>
-            <a:ext cx="9326880" cy="1554480"/>
-          </a:xfrm>
-          <a:prstGeom prst="rect">
-            <a:avLst/>
-          </a:prstGeom>
-          <a:noFill/>
-        </p:spPr>
-        <p:txBody>
-          <a:bodyPr wrap="square" anchor="ctr" lIns="0" rIns="0" tIns="0" bIns="0">
-            <a:spAutoFit/>
-          </a:bodyPr>
-          <a:lstStyle/>
-          <a:p>
-            <a:pPr algn="l"/>
-            <a:r>
-              <a:rPr sz="2200" b="1" i="0">
-                <a:solidFill>
-                  <a:srgbClr val="1D2433"/>
-                </a:solidFill>
-                <a:latin typeface="Calibri"/>
-              </a:rPr>
-              <a:t>C. An inclined plane wrapped around a cylinder</a:t>
-            </a:r>
-          </a:p>
-        </p:txBody>
-      </p:sp>
-      <p:sp>
-        <p:nvSpPr>
-          <p:cNvPr id="11" name="Rounded Rectangle 10"/>
-          <p:cNvSpPr/>
-          <p:nvPr/>
-        </p:nvSpPr>
-        <p:spPr>
-          <a:xfrm>
-            <a:off x="640080" y="3657600"/>
-            <a:ext cx="10881360" cy="2011680"/>
-          </a:xfrm>
-          <a:prstGeom prst="roundRect">
-            <a:avLst>
-              <a:gd name="adj" fmla="val 3000"/>
             </a:avLst>
           </a:prstGeom>
           <a:solidFill>
@@ -21598,68 +25818,840 @@
       </p:sp>
       <p:sp>
         <p:nvSpPr>
+          <p:cNvPr id="8" name="TextBox 7"/>
+          <p:cNvSpPr txBox="1"/>
+          <p:nvPr/>
+        </p:nvSpPr>
+        <p:spPr>
+          <a:xfrm>
+            <a:off x="1005840" y="1828800"/>
+            <a:ext cx="10149840" cy="1554480"/>
+          </a:xfrm>
+          <a:prstGeom prst="rect">
+            <a:avLst/>
+          </a:prstGeom>
+          <a:noFill/>
+        </p:spPr>
+        <p:txBody>
+          <a:bodyPr wrap="square" anchor="ctr" lIns="0" rIns="0" tIns="0" bIns="0">
+            <a:spAutoFit/>
+          </a:bodyPr>
+          <a:lstStyle/>
+          <a:p>
+            <a:pPr algn="l"/>
+            <a:r>
+              <a:rPr sz="1900" b="1" i="0">
+                <a:solidFill>
+                  <a:srgbClr val="1D2433"/>
+                </a:solidFill>
+                <a:latin typeface="Calibri"/>
+              </a:rPr>
+              <a:t>A screw is really which simple machine in disguise?</a:t>
+            </a:r>
+          </a:p>
+        </p:txBody>
+      </p:sp>
+      <p:sp>
+        <p:nvSpPr>
+          <p:cNvPr id="9" name="Rounded Rectangle 8"/>
+          <p:cNvSpPr/>
+          <p:nvPr/>
+        </p:nvSpPr>
+        <p:spPr>
+          <a:xfrm>
+            <a:off x="640080" y="3749039"/>
+            <a:ext cx="5349240" cy="868680"/>
+          </a:xfrm>
+          <a:prstGeom prst="roundRect">
+            <a:avLst>
+              <a:gd name="adj" fmla="val 12000"/>
+            </a:avLst>
+          </a:prstGeom>
+          <a:solidFill>
+            <a:srgbClr val="EAF1F4"/>
+          </a:solidFill>
+          <a:ln>
+            <a:noFill/>
+          </a:ln>
+          <a:effectLst/>
+        </p:spPr>
+        <p:style>
+          <a:lnRef idx="1">
+            <a:schemeClr val="accent1"/>
+          </a:lnRef>
+          <a:fillRef idx="3">
+            <a:schemeClr val="accent1"/>
+          </a:fillRef>
+          <a:effectRef idx="2">
+            <a:schemeClr val="accent1"/>
+          </a:effectRef>
+          <a:fontRef idx="minor">
+            <a:schemeClr val="lt1"/>
+          </a:fontRef>
+        </p:style>
+        <p:txBody>
+          <a:bodyPr rtlCol="0" anchor="ctr"/>
+          <a:lstStyle/>
+          <a:p>
+            <a:pPr algn="ctr"/>
+          </a:p>
+        </p:txBody>
+      </p:sp>
+      <p:sp>
+        <p:nvSpPr>
+          <p:cNvPr id="10" name="Oval 9"/>
+          <p:cNvSpPr/>
+          <p:nvPr/>
+        </p:nvSpPr>
+        <p:spPr>
+          <a:xfrm>
+            <a:off x="914400" y="3977639"/>
+            <a:ext cx="411480" cy="411480"/>
+          </a:xfrm>
+          <a:prstGeom prst="ellipse">
+            <a:avLst/>
+          </a:prstGeom>
+          <a:solidFill>
+            <a:srgbClr val="0A9396"/>
+          </a:solidFill>
+          <a:ln>
+            <a:noFill/>
+          </a:ln>
+          <a:effectLst/>
+        </p:spPr>
+        <p:style>
+          <a:lnRef idx="1">
+            <a:schemeClr val="accent1"/>
+          </a:lnRef>
+          <a:fillRef idx="3">
+            <a:schemeClr val="accent1"/>
+          </a:fillRef>
+          <a:effectRef idx="2">
+            <a:schemeClr val="accent1"/>
+          </a:effectRef>
+          <a:fontRef idx="minor">
+            <a:schemeClr val="lt1"/>
+          </a:fontRef>
+        </p:style>
+        <p:txBody>
+          <a:bodyPr rtlCol="0" anchor="ctr"/>
+          <a:lstStyle/>
+          <a:p>
+            <a:pPr algn="ctr"/>
+          </a:p>
+        </p:txBody>
+      </p:sp>
+      <p:sp>
+        <p:nvSpPr>
+          <p:cNvPr id="11" name="TextBox 10"/>
+          <p:cNvSpPr txBox="1"/>
+          <p:nvPr/>
+        </p:nvSpPr>
+        <p:spPr>
+          <a:xfrm>
+            <a:off x="914400" y="3977639"/>
+            <a:ext cx="411480" cy="411480"/>
+          </a:xfrm>
+          <a:prstGeom prst="rect">
+            <a:avLst/>
+          </a:prstGeom>
+          <a:noFill/>
+        </p:spPr>
+        <p:txBody>
+          <a:bodyPr wrap="square" anchor="ctr" lIns="0" rIns="0" tIns="0" bIns="0">
+            <a:spAutoFit/>
+          </a:bodyPr>
+          <a:lstStyle/>
+          <a:p>
+            <a:pPr algn="ctr"/>
+            <a:r>
+              <a:rPr sz="1400" b="1" i="0">
+                <a:solidFill>
+                  <a:srgbClr val="FFFFFF"/>
+                </a:solidFill>
+                <a:latin typeface="Calibri"/>
+              </a:rPr>
+              <a:t>A</a:t>
+            </a:r>
+          </a:p>
+        </p:txBody>
+      </p:sp>
+      <p:sp>
+        <p:nvSpPr>
           <p:cNvPr id="12" name="TextBox 11"/>
           <p:cNvSpPr txBox="1"/>
           <p:nvPr/>
         </p:nvSpPr>
         <p:spPr>
           <a:xfrm>
-            <a:off x="1005840" y="3886200"/>
-            <a:ext cx="4572000" cy="365760"/>
-          </a:xfrm>
-          <a:prstGeom prst="rect">
-            <a:avLst/>
-          </a:prstGeom>
-          <a:noFill/>
-        </p:spPr>
-        <p:txBody>
-          <a:bodyPr wrap="square" anchor="t" lIns="0" rIns="0" tIns="0" bIns="0">
+            <a:off x="1508760" y="3749039"/>
+            <a:ext cx="3840480" cy="868680"/>
+          </a:xfrm>
+          <a:prstGeom prst="rect">
+            <a:avLst/>
+          </a:prstGeom>
+          <a:noFill/>
+        </p:spPr>
+        <p:txBody>
+          <a:bodyPr wrap="square" anchor="ctr" lIns="0" rIns="0" tIns="0" bIns="0">
             <a:spAutoFit/>
           </a:bodyPr>
           <a:lstStyle/>
           <a:p>
             <a:pPr algn="l"/>
             <a:r>
+              <a:rPr sz="1450" b="0" i="0">
+                <a:solidFill>
+                  <a:srgbClr val="1D2433"/>
+                </a:solidFill>
+                <a:latin typeface="Calibri"/>
+              </a:rPr>
+              <a:t>A lever</a:t>
+            </a:r>
+          </a:p>
+        </p:txBody>
+      </p:sp>
+      <p:sp>
+        <p:nvSpPr>
+          <p:cNvPr id="13" name="Rounded Rectangle 12"/>
+          <p:cNvSpPr/>
+          <p:nvPr/>
+        </p:nvSpPr>
+        <p:spPr>
+          <a:xfrm>
+            <a:off x="6172200" y="3749039"/>
+            <a:ext cx="5349240" cy="868680"/>
+          </a:xfrm>
+          <a:prstGeom prst="roundRect">
+            <a:avLst>
+              <a:gd name="adj" fmla="val 12000"/>
+            </a:avLst>
+          </a:prstGeom>
+          <a:solidFill>
+            <a:srgbClr val="EAF1F4"/>
+          </a:solidFill>
+          <a:ln>
+            <a:noFill/>
+          </a:ln>
+          <a:effectLst/>
+        </p:spPr>
+        <p:style>
+          <a:lnRef idx="1">
+            <a:schemeClr val="accent1"/>
+          </a:lnRef>
+          <a:fillRef idx="3">
+            <a:schemeClr val="accent1"/>
+          </a:fillRef>
+          <a:effectRef idx="2">
+            <a:schemeClr val="accent1"/>
+          </a:effectRef>
+          <a:fontRef idx="minor">
+            <a:schemeClr val="lt1"/>
+          </a:fontRef>
+        </p:style>
+        <p:txBody>
+          <a:bodyPr rtlCol="0" anchor="ctr"/>
+          <a:lstStyle/>
+          <a:p>
+            <a:pPr algn="ctr"/>
+          </a:p>
+        </p:txBody>
+      </p:sp>
+      <p:sp>
+        <p:nvSpPr>
+          <p:cNvPr id="14" name="Oval 13"/>
+          <p:cNvSpPr/>
+          <p:nvPr/>
+        </p:nvSpPr>
+        <p:spPr>
+          <a:xfrm>
+            <a:off x="6446520" y="3977639"/>
+            <a:ext cx="411480" cy="411480"/>
+          </a:xfrm>
+          <a:prstGeom prst="ellipse">
+            <a:avLst/>
+          </a:prstGeom>
+          <a:solidFill>
+            <a:srgbClr val="0A9396"/>
+          </a:solidFill>
+          <a:ln>
+            <a:noFill/>
+          </a:ln>
+          <a:effectLst/>
+        </p:spPr>
+        <p:style>
+          <a:lnRef idx="1">
+            <a:schemeClr val="accent1"/>
+          </a:lnRef>
+          <a:fillRef idx="3">
+            <a:schemeClr val="accent1"/>
+          </a:fillRef>
+          <a:effectRef idx="2">
+            <a:schemeClr val="accent1"/>
+          </a:effectRef>
+          <a:fontRef idx="minor">
+            <a:schemeClr val="lt1"/>
+          </a:fontRef>
+        </p:style>
+        <p:txBody>
+          <a:bodyPr rtlCol="0" anchor="ctr"/>
+          <a:lstStyle/>
+          <a:p>
+            <a:pPr algn="ctr"/>
+          </a:p>
+        </p:txBody>
+      </p:sp>
+      <p:sp>
+        <p:nvSpPr>
+          <p:cNvPr id="15" name="TextBox 14"/>
+          <p:cNvSpPr txBox="1"/>
+          <p:nvPr/>
+        </p:nvSpPr>
+        <p:spPr>
+          <a:xfrm>
+            <a:off x="6446520" y="3977639"/>
+            <a:ext cx="411480" cy="411480"/>
+          </a:xfrm>
+          <a:prstGeom prst="rect">
+            <a:avLst/>
+          </a:prstGeom>
+          <a:noFill/>
+        </p:spPr>
+        <p:txBody>
+          <a:bodyPr wrap="square" anchor="ctr" lIns="0" rIns="0" tIns="0" bIns="0">
+            <a:spAutoFit/>
+          </a:bodyPr>
+          <a:lstStyle/>
+          <a:p>
+            <a:pPr algn="ctr"/>
+            <a:r>
               <a:rPr sz="1400" b="1" i="0">
                 <a:solidFill>
+                  <a:srgbClr val="FFFFFF"/>
+                </a:solidFill>
+                <a:latin typeface="Calibri"/>
+              </a:rPr>
+              <a:t>B</a:t>
+            </a:r>
+          </a:p>
+        </p:txBody>
+      </p:sp>
+      <p:sp>
+        <p:nvSpPr>
+          <p:cNvPr id="16" name="TextBox 15"/>
+          <p:cNvSpPr txBox="1"/>
+          <p:nvPr/>
+        </p:nvSpPr>
+        <p:spPr>
+          <a:xfrm>
+            <a:off x="7040880" y="3749039"/>
+            <a:ext cx="3840480" cy="868680"/>
+          </a:xfrm>
+          <a:prstGeom prst="rect">
+            <a:avLst/>
+          </a:prstGeom>
+          <a:noFill/>
+        </p:spPr>
+        <p:txBody>
+          <a:bodyPr wrap="square" anchor="ctr" lIns="0" rIns="0" tIns="0" bIns="0">
+            <a:spAutoFit/>
+          </a:bodyPr>
+          <a:lstStyle/>
+          <a:p>
+            <a:pPr algn="l"/>
+            <a:r>
+              <a:rPr sz="1450" b="0" i="0">
+                <a:solidFill>
+                  <a:srgbClr val="1D2433"/>
+                </a:solidFill>
+                <a:latin typeface="Calibri"/>
+              </a:rPr>
+              <a:t>A pulley</a:t>
+            </a:r>
+          </a:p>
+        </p:txBody>
+      </p:sp>
+      <p:sp>
+        <p:nvSpPr>
+          <p:cNvPr id="17" name="Rounded Rectangle 16"/>
+          <p:cNvSpPr/>
+          <p:nvPr/>
+        </p:nvSpPr>
+        <p:spPr>
+          <a:xfrm>
+            <a:off x="640080" y="4782312"/>
+            <a:ext cx="5349240" cy="868680"/>
+          </a:xfrm>
+          <a:prstGeom prst="roundRect">
+            <a:avLst>
+              <a:gd name="adj" fmla="val 12000"/>
+            </a:avLst>
+          </a:prstGeom>
+          <a:solidFill>
+            <a:srgbClr val="E9F5F0"/>
+          </a:solidFill>
+          <a:ln w="31750">
+            <a:solidFill>
+              <a:srgbClr val="2A9D8F"/>
+            </a:solidFill>
+          </a:ln>
+          <a:effectLst/>
+        </p:spPr>
+        <p:style>
+          <a:lnRef idx="1">
+            <a:schemeClr val="accent1"/>
+          </a:lnRef>
+          <a:fillRef idx="3">
+            <a:schemeClr val="accent1"/>
+          </a:fillRef>
+          <a:effectRef idx="2">
+            <a:schemeClr val="accent1"/>
+          </a:effectRef>
+          <a:fontRef idx="minor">
+            <a:schemeClr val="lt1"/>
+          </a:fontRef>
+        </p:style>
+        <p:txBody>
+          <a:bodyPr rtlCol="0" anchor="ctr"/>
+          <a:lstStyle/>
+          <a:p>
+            <a:pPr algn="ctr"/>
+          </a:p>
+        </p:txBody>
+      </p:sp>
+      <p:sp>
+        <p:nvSpPr>
+          <p:cNvPr id="18" name="Oval 17"/>
+          <p:cNvSpPr/>
+          <p:nvPr/>
+        </p:nvSpPr>
+        <p:spPr>
+          <a:xfrm>
+            <a:off x="914400" y="5010912"/>
+            <a:ext cx="411480" cy="411480"/>
+          </a:xfrm>
+          <a:prstGeom prst="ellipse">
+            <a:avLst/>
+          </a:prstGeom>
+          <a:solidFill>
+            <a:srgbClr val="2A9D8F"/>
+          </a:solidFill>
+          <a:ln>
+            <a:noFill/>
+          </a:ln>
+          <a:effectLst/>
+        </p:spPr>
+        <p:style>
+          <a:lnRef idx="1">
+            <a:schemeClr val="accent1"/>
+          </a:lnRef>
+          <a:fillRef idx="3">
+            <a:schemeClr val="accent1"/>
+          </a:fillRef>
+          <a:effectRef idx="2">
+            <a:schemeClr val="accent1"/>
+          </a:effectRef>
+          <a:fontRef idx="minor">
+            <a:schemeClr val="lt1"/>
+          </a:fontRef>
+        </p:style>
+        <p:txBody>
+          <a:bodyPr rtlCol="0" anchor="ctr"/>
+          <a:lstStyle/>
+          <a:p>
+            <a:pPr algn="ctr"/>
+          </a:p>
+        </p:txBody>
+      </p:sp>
+      <p:sp>
+        <p:nvSpPr>
+          <p:cNvPr id="19" name="TextBox 18"/>
+          <p:cNvSpPr txBox="1"/>
+          <p:nvPr/>
+        </p:nvSpPr>
+        <p:spPr>
+          <a:xfrm>
+            <a:off x="914400" y="5010912"/>
+            <a:ext cx="411480" cy="411480"/>
+          </a:xfrm>
+          <a:prstGeom prst="rect">
+            <a:avLst/>
+          </a:prstGeom>
+          <a:noFill/>
+        </p:spPr>
+        <p:txBody>
+          <a:bodyPr wrap="square" anchor="ctr" lIns="0" rIns="0" tIns="0" bIns="0">
+            <a:spAutoFit/>
+          </a:bodyPr>
+          <a:lstStyle/>
+          <a:p>
+            <a:pPr algn="ctr"/>
+            <a:r>
+              <a:rPr sz="1400" b="1" i="0">
+                <a:solidFill>
+                  <a:srgbClr val="FFFFFF"/>
+                </a:solidFill>
+                <a:latin typeface="Calibri"/>
+              </a:rPr>
+              <a:t>C</a:t>
+            </a:r>
+          </a:p>
+        </p:txBody>
+      </p:sp>
+      <p:sp>
+        <p:nvSpPr>
+          <p:cNvPr id="20" name="TextBox 19"/>
+          <p:cNvSpPr txBox="1"/>
+          <p:nvPr/>
+        </p:nvSpPr>
+        <p:spPr>
+          <a:xfrm>
+            <a:off x="1508760" y="4782312"/>
+            <a:ext cx="3840480" cy="868680"/>
+          </a:xfrm>
+          <a:prstGeom prst="rect">
+            <a:avLst/>
+          </a:prstGeom>
+          <a:noFill/>
+        </p:spPr>
+        <p:txBody>
+          <a:bodyPr wrap="square" anchor="ctr" lIns="0" rIns="0" tIns="0" bIns="0">
+            <a:spAutoFit/>
+          </a:bodyPr>
+          <a:lstStyle/>
+          <a:p>
+            <a:pPr algn="l"/>
+            <a:r>
+              <a:rPr sz="1450" b="1" i="0">
+                <a:solidFill>
+                  <a:srgbClr val="1D2433"/>
+                </a:solidFill>
+                <a:latin typeface="Calibri"/>
+              </a:rPr>
+              <a:t>An inclined plane wrapped around a cylinder</a:t>
+            </a:r>
+          </a:p>
+        </p:txBody>
+      </p:sp>
+      <p:sp>
+        <p:nvSpPr>
+          <p:cNvPr id="21" name="Oval 20"/>
+          <p:cNvSpPr/>
+          <p:nvPr/>
+        </p:nvSpPr>
+        <p:spPr>
+          <a:xfrm>
+            <a:off x="5440680" y="5029200"/>
+            <a:ext cx="365760" cy="365760"/>
+          </a:xfrm>
+          <a:prstGeom prst="ellipse">
+            <a:avLst/>
+          </a:prstGeom>
+          <a:solidFill>
+            <a:srgbClr val="2A9D8F"/>
+          </a:solidFill>
+          <a:ln>
+            <a:noFill/>
+          </a:ln>
+          <a:effectLst/>
+        </p:spPr>
+        <p:style>
+          <a:lnRef idx="1">
+            <a:schemeClr val="accent1"/>
+          </a:lnRef>
+          <a:fillRef idx="3">
+            <a:schemeClr val="accent1"/>
+          </a:fillRef>
+          <a:effectRef idx="2">
+            <a:schemeClr val="accent1"/>
+          </a:effectRef>
+          <a:fontRef idx="minor">
+            <a:schemeClr val="lt1"/>
+          </a:fontRef>
+        </p:style>
+        <p:txBody>
+          <a:bodyPr rtlCol="0" anchor="ctr"/>
+          <a:lstStyle/>
+          <a:p>
+            <a:pPr algn="ctr"/>
+          </a:p>
+        </p:txBody>
+      </p:sp>
+      <p:sp>
+        <p:nvSpPr>
+          <p:cNvPr id="22" name="TextBox 21"/>
+          <p:cNvSpPr txBox="1"/>
+          <p:nvPr/>
+        </p:nvSpPr>
+        <p:spPr>
+          <a:xfrm>
+            <a:off x="5440680" y="4983479"/>
+            <a:ext cx="365760" cy="365760"/>
+          </a:xfrm>
+          <a:prstGeom prst="rect">
+            <a:avLst/>
+          </a:prstGeom>
+          <a:noFill/>
+        </p:spPr>
+        <p:txBody>
+          <a:bodyPr wrap="square" anchor="ctr" lIns="0" rIns="0" tIns="0" bIns="0">
+            <a:spAutoFit/>
+          </a:bodyPr>
+          <a:lstStyle/>
+          <a:p>
+            <a:pPr algn="ctr"/>
+            <a:r>
+              <a:rPr sz="1600" b="1" i="0">
+                <a:solidFill>
+                  <a:srgbClr val="FFFFFF"/>
+                </a:solidFill>
+                <a:latin typeface="Calibri"/>
+              </a:rPr>
+              <a:t>✓</a:t>
+            </a:r>
+          </a:p>
+        </p:txBody>
+      </p:sp>
+      <p:sp>
+        <p:nvSpPr>
+          <p:cNvPr id="23" name="Rounded Rectangle 22"/>
+          <p:cNvSpPr/>
+          <p:nvPr/>
+        </p:nvSpPr>
+        <p:spPr>
+          <a:xfrm>
+            <a:off x="6172200" y="4782312"/>
+            <a:ext cx="5349240" cy="868680"/>
+          </a:xfrm>
+          <a:prstGeom prst="roundRect">
+            <a:avLst>
+              <a:gd name="adj" fmla="val 12000"/>
+            </a:avLst>
+          </a:prstGeom>
+          <a:solidFill>
+            <a:srgbClr val="EAF1F4"/>
+          </a:solidFill>
+          <a:ln>
+            <a:noFill/>
+          </a:ln>
+          <a:effectLst/>
+        </p:spPr>
+        <p:style>
+          <a:lnRef idx="1">
+            <a:schemeClr val="accent1"/>
+          </a:lnRef>
+          <a:fillRef idx="3">
+            <a:schemeClr val="accent1"/>
+          </a:fillRef>
+          <a:effectRef idx="2">
+            <a:schemeClr val="accent1"/>
+          </a:effectRef>
+          <a:fontRef idx="minor">
+            <a:schemeClr val="lt1"/>
+          </a:fontRef>
+        </p:style>
+        <p:txBody>
+          <a:bodyPr rtlCol="0" anchor="ctr"/>
+          <a:lstStyle/>
+          <a:p>
+            <a:pPr algn="ctr"/>
+          </a:p>
+        </p:txBody>
+      </p:sp>
+      <p:sp>
+        <p:nvSpPr>
+          <p:cNvPr id="24" name="Oval 23"/>
+          <p:cNvSpPr/>
+          <p:nvPr/>
+        </p:nvSpPr>
+        <p:spPr>
+          <a:xfrm>
+            <a:off x="6446520" y="5010912"/>
+            <a:ext cx="411480" cy="411480"/>
+          </a:xfrm>
+          <a:prstGeom prst="ellipse">
+            <a:avLst/>
+          </a:prstGeom>
+          <a:solidFill>
+            <a:srgbClr val="0A9396"/>
+          </a:solidFill>
+          <a:ln>
+            <a:noFill/>
+          </a:ln>
+          <a:effectLst/>
+        </p:spPr>
+        <p:style>
+          <a:lnRef idx="1">
+            <a:schemeClr val="accent1"/>
+          </a:lnRef>
+          <a:fillRef idx="3">
+            <a:schemeClr val="accent1"/>
+          </a:fillRef>
+          <a:effectRef idx="2">
+            <a:schemeClr val="accent1"/>
+          </a:effectRef>
+          <a:fontRef idx="minor">
+            <a:schemeClr val="lt1"/>
+          </a:fontRef>
+        </p:style>
+        <p:txBody>
+          <a:bodyPr rtlCol="0" anchor="ctr"/>
+          <a:lstStyle/>
+          <a:p>
+            <a:pPr algn="ctr"/>
+          </a:p>
+        </p:txBody>
+      </p:sp>
+      <p:sp>
+        <p:nvSpPr>
+          <p:cNvPr id="25" name="TextBox 24"/>
+          <p:cNvSpPr txBox="1"/>
+          <p:nvPr/>
+        </p:nvSpPr>
+        <p:spPr>
+          <a:xfrm>
+            <a:off x="6446520" y="5010912"/>
+            <a:ext cx="411480" cy="411480"/>
+          </a:xfrm>
+          <a:prstGeom prst="rect">
+            <a:avLst/>
+          </a:prstGeom>
+          <a:noFill/>
+        </p:spPr>
+        <p:txBody>
+          <a:bodyPr wrap="square" anchor="ctr" lIns="0" rIns="0" tIns="0" bIns="0">
+            <a:spAutoFit/>
+          </a:bodyPr>
+          <a:lstStyle/>
+          <a:p>
+            <a:pPr algn="ctr"/>
+            <a:r>
+              <a:rPr sz="1400" b="1" i="0">
+                <a:solidFill>
+                  <a:srgbClr val="FFFFFF"/>
+                </a:solidFill>
+                <a:latin typeface="Calibri"/>
+              </a:rPr>
+              <a:t>D</a:t>
+            </a:r>
+          </a:p>
+        </p:txBody>
+      </p:sp>
+      <p:sp>
+        <p:nvSpPr>
+          <p:cNvPr id="26" name="TextBox 25"/>
+          <p:cNvSpPr txBox="1"/>
+          <p:nvPr/>
+        </p:nvSpPr>
+        <p:spPr>
+          <a:xfrm>
+            <a:off x="7040880" y="4782312"/>
+            <a:ext cx="3840480" cy="868680"/>
+          </a:xfrm>
+          <a:prstGeom prst="rect">
+            <a:avLst/>
+          </a:prstGeom>
+          <a:noFill/>
+        </p:spPr>
+        <p:txBody>
+          <a:bodyPr wrap="square" anchor="ctr" lIns="0" rIns="0" tIns="0" bIns="0">
+            <a:spAutoFit/>
+          </a:bodyPr>
+          <a:lstStyle/>
+          <a:p>
+            <a:pPr algn="l"/>
+            <a:r>
+              <a:rPr sz="1450" b="0" i="0">
+                <a:solidFill>
+                  <a:srgbClr val="1D2433"/>
+                </a:solidFill>
+                <a:latin typeface="Calibri"/>
+              </a:rPr>
+              <a:t>A wheel and axle</a:t>
+            </a:r>
+          </a:p>
+        </p:txBody>
+      </p:sp>
+      <p:sp>
+        <p:nvSpPr>
+          <p:cNvPr id="27" name="Rounded Rectangle 26"/>
+          <p:cNvSpPr/>
+          <p:nvPr/>
+        </p:nvSpPr>
+        <p:spPr>
+          <a:xfrm>
+            <a:off x="640080" y="5779008"/>
+            <a:ext cx="10881360" cy="566928"/>
+          </a:xfrm>
+          <a:prstGeom prst="roundRect">
+            <a:avLst>
+              <a:gd name="adj" fmla="val 10000"/>
+            </a:avLst>
+          </a:prstGeom>
+          <a:solidFill>
+            <a:srgbClr val="EEF2F7"/>
+          </a:solidFill>
+          <a:ln>
+            <a:noFill/>
+          </a:ln>
+          <a:effectLst/>
+        </p:spPr>
+        <p:style>
+          <a:lnRef idx="1">
+            <a:schemeClr val="accent1"/>
+          </a:lnRef>
+          <a:fillRef idx="3">
+            <a:schemeClr val="accent1"/>
+          </a:fillRef>
+          <a:effectRef idx="2">
+            <a:schemeClr val="accent1"/>
+          </a:effectRef>
+          <a:fontRef idx="minor">
+            <a:schemeClr val="lt1"/>
+          </a:fontRef>
+        </p:style>
+        <p:txBody>
+          <a:bodyPr rtlCol="0" anchor="ctr"/>
+          <a:lstStyle/>
+          <a:p>
+            <a:pPr algn="ctr"/>
+          </a:p>
+        </p:txBody>
+      </p:sp>
+      <p:sp>
+        <p:nvSpPr>
+          <p:cNvPr id="28" name="TextBox 27"/>
+          <p:cNvSpPr txBox="1"/>
+          <p:nvPr/>
+        </p:nvSpPr>
+        <p:spPr>
+          <a:xfrm>
+            <a:off x="914400" y="5779008"/>
+            <a:ext cx="10332720" cy="566928"/>
+          </a:xfrm>
+          <a:prstGeom prst="rect">
+            <a:avLst/>
+          </a:prstGeom>
+          <a:noFill/>
+        </p:spPr>
+        <p:txBody>
+          <a:bodyPr wrap="square" anchor="ctr" lIns="0" rIns="0" tIns="0" bIns="0">
+            <a:spAutoFit/>
+          </a:bodyPr>
+          <a:lstStyle/>
+          <a:p>
+            <a:pPr algn="l"/>
+            <a:r>
+              <a:rPr sz="1250" b="1" i="0">
+                <a:solidFill>
                   <a:srgbClr val="2A9D8F"/>
                 </a:solidFill>
                 <a:latin typeface="Arial"/>
               </a:rPr>
-              <a:t>WHY</a:t>
-            </a:r>
-          </a:p>
-        </p:txBody>
-      </p:sp>
-      <p:sp>
-        <p:nvSpPr>
-          <p:cNvPr id="13" name="TextBox 12"/>
-          <p:cNvSpPr txBox="1"/>
-          <p:nvPr/>
-        </p:nvSpPr>
-        <p:spPr>
-          <a:xfrm>
-            <a:off x="1005840" y="4297680"/>
-            <a:ext cx="10149840" cy="1280160"/>
-          </a:xfrm>
-          <a:prstGeom prst="rect">
-            <a:avLst/>
-          </a:prstGeom>
-          <a:noFill/>
-        </p:spPr>
-        <p:txBody>
-          <a:bodyPr wrap="square" anchor="t" lIns="0" rIns="0" tIns="0" bIns="0">
-            <a:spAutoFit/>
-          </a:bodyPr>
-          <a:lstStyle/>
-          <a:p>
-            <a:pPr algn="l">
-              <a:lnSpc>
-                <a:spcPct val="110000"/>
-              </a:lnSpc>
-            </a:pPr>
-            <a:r>
-              <a:rPr sz="1600" b="0" i="0">
+              <a:t>Why  </a:t>
+            </a:r>
+            <a:r>
+              <a:rPr sz="1200" b="0" i="0">
                 <a:solidFill>
                   <a:srgbClr val="1D2433"/>
                 </a:solidFill>
@@ -22688,9 +27680,33 @@
           </a:p>
         </p:txBody>
       </p:sp>
-      <p:sp>
-        <p:nvSpPr>
-          <p:cNvPr id="9" name="TextBox 8"/>
+      <p:pic>
+        <p:nvPicPr>
+          <p:cNvPr id="9" name="Picture 8" descr="icon_wheel.png"/>
+          <p:cNvPicPr>
+            <a:picLocks noChangeAspect="1"/>
+          </p:cNvPicPr>
+          <p:nvPr/>
+        </p:nvPicPr>
+        <p:blipFill>
+          <a:blip r:embed="rId2"/>
+          <a:stretch>
+            <a:fillRect/>
+          </a:stretch>
+        </p:blipFill>
+        <p:spPr>
+          <a:xfrm>
+            <a:off x="1051560" y="2304288"/>
+            <a:ext cx="320040" cy="320040"/>
+          </a:xfrm>
+          <a:prstGeom prst="rect">
+            <a:avLst/>
+          </a:prstGeom>
+        </p:spPr>
+      </p:pic>
+      <p:sp>
+        <p:nvSpPr>
+          <p:cNvPr id="10" name="TextBox 9"/>
           <p:cNvSpPr txBox="1"/>
           <p:nvPr/>
         </p:nvSpPr>
@@ -22725,7 +27741,7 @@
       </p:sp>
       <p:sp>
         <p:nvSpPr>
-          <p:cNvPr id="10" name="TextBox 9"/>
+          <p:cNvPr id="11" name="TextBox 10"/>
           <p:cNvSpPr txBox="1"/>
           <p:nvPr/>
         </p:nvSpPr>
@@ -22760,7 +27776,7 @@
       </p:sp>
       <p:sp>
         <p:nvSpPr>
-          <p:cNvPr id="11" name="Rounded Rectangle 10"/>
+          <p:cNvPr id="12" name="Rounded Rectangle 11"/>
           <p:cNvSpPr/>
           <p:nvPr/>
         </p:nvSpPr>
@@ -22812,7 +27828,7 @@
       </p:sp>
       <p:sp>
         <p:nvSpPr>
-          <p:cNvPr id="12" name="Rounded Rectangle 11"/>
+          <p:cNvPr id="13" name="Rounded Rectangle 12"/>
           <p:cNvSpPr/>
           <p:nvPr/>
         </p:nvSpPr>
@@ -22856,9 +27872,33 @@
           </a:p>
         </p:txBody>
       </p:sp>
-      <p:sp>
-        <p:nvSpPr>
-          <p:cNvPr id="13" name="TextBox 12"/>
+      <p:pic>
+        <p:nvPicPr>
+          <p:cNvPr id="14" name="Picture 13" descr="icon_force.png"/>
+          <p:cNvPicPr>
+            <a:picLocks noChangeAspect="1"/>
+          </p:cNvPicPr>
+          <p:nvPr/>
+        </p:nvPicPr>
+        <p:blipFill>
+          <a:blip r:embed="rId3"/>
+          <a:stretch>
+            <a:fillRect/>
+          </a:stretch>
+        </p:blipFill>
+        <p:spPr>
+          <a:xfrm>
+            <a:off x="6629400" y="2304288"/>
+            <a:ext cx="320040" cy="320040"/>
+          </a:xfrm>
+          <a:prstGeom prst="rect">
+            <a:avLst/>
+          </a:prstGeom>
+        </p:spPr>
+      </p:pic>
+      <p:sp>
+        <p:nvSpPr>
+          <p:cNvPr id="15" name="TextBox 14"/>
           <p:cNvSpPr txBox="1"/>
           <p:nvPr/>
         </p:nvSpPr>
@@ -22893,7 +27933,7 @@
       </p:sp>
       <p:sp>
         <p:nvSpPr>
-          <p:cNvPr id="14" name="TextBox 13"/>
+          <p:cNvPr id="16" name="TextBox 15"/>
           <p:cNvSpPr txBox="1"/>
           <p:nvPr/>
         </p:nvSpPr>
@@ -22928,7 +27968,7 @@
       </p:sp>
       <p:sp>
         <p:nvSpPr>
-          <p:cNvPr id="15" name="Rounded Rectangle 14"/>
+          <p:cNvPr id="17" name="Rounded Rectangle 16"/>
           <p:cNvSpPr/>
           <p:nvPr/>
         </p:nvSpPr>
@@ -22980,7 +28020,7 @@
       </p:sp>
       <p:sp>
         <p:nvSpPr>
-          <p:cNvPr id="16" name="Rounded Rectangle 15"/>
+          <p:cNvPr id="18" name="Rounded Rectangle 17"/>
           <p:cNvSpPr/>
           <p:nvPr/>
         </p:nvSpPr>
@@ -23024,9 +28064,33 @@
           </a:p>
         </p:txBody>
       </p:sp>
-      <p:sp>
-        <p:nvSpPr>
-          <p:cNvPr id="17" name="TextBox 16"/>
+      <p:pic>
+        <p:nvPicPr>
+          <p:cNvPr id="19" name="Picture 18" descr="icon_compass.png"/>
+          <p:cNvPicPr>
+            <a:picLocks noChangeAspect="1"/>
+          </p:cNvPicPr>
+          <p:nvPr/>
+        </p:nvPicPr>
+        <p:blipFill>
+          <a:blip r:embed="rId4"/>
+          <a:stretch>
+            <a:fillRect/>
+          </a:stretch>
+        </p:blipFill>
+        <p:spPr>
+          <a:xfrm>
+            <a:off x="1051560" y="4133087"/>
+            <a:ext cx="320040" cy="320040"/>
+          </a:xfrm>
+          <a:prstGeom prst="rect">
+            <a:avLst/>
+          </a:prstGeom>
+        </p:spPr>
+      </p:pic>
+      <p:sp>
+        <p:nvSpPr>
+          <p:cNvPr id="20" name="TextBox 19"/>
           <p:cNvSpPr txBox="1"/>
           <p:nvPr/>
         </p:nvSpPr>
@@ -23061,7 +28125,7 @@
       </p:sp>
       <p:sp>
         <p:nvSpPr>
-          <p:cNvPr id="18" name="TextBox 17"/>
+          <p:cNvPr id="21" name="TextBox 20"/>
           <p:cNvSpPr txBox="1"/>
           <p:nvPr/>
         </p:nvSpPr>
@@ -23096,7 +28160,7 @@
       </p:sp>
       <p:sp>
         <p:nvSpPr>
-          <p:cNvPr id="19" name="Rounded Rectangle 18"/>
+          <p:cNvPr id="22" name="Rounded Rectangle 21"/>
           <p:cNvSpPr/>
           <p:nvPr/>
         </p:nvSpPr>
@@ -23148,7 +28212,7 @@
       </p:sp>
       <p:sp>
         <p:nvSpPr>
-          <p:cNvPr id="20" name="Rounded Rectangle 19"/>
+          <p:cNvPr id="23" name="Rounded Rectangle 22"/>
           <p:cNvSpPr/>
           <p:nvPr/>
         </p:nvSpPr>
@@ -23192,9 +28256,33 @@
           </a:p>
         </p:txBody>
       </p:sp>
-      <p:sp>
-        <p:nvSpPr>
-          <p:cNvPr id="21" name="TextBox 20"/>
+      <p:pic>
+        <p:nvPicPr>
+          <p:cNvPr id="24" name="Picture 23" descr="icon_drop.png"/>
+          <p:cNvPicPr>
+            <a:picLocks noChangeAspect="1"/>
+          </p:cNvPicPr>
+          <p:nvPr/>
+        </p:nvPicPr>
+        <p:blipFill>
+          <a:blip r:embed="rId5"/>
+          <a:stretch>
+            <a:fillRect/>
+          </a:stretch>
+        </p:blipFill>
+        <p:spPr>
+          <a:xfrm>
+            <a:off x="6629400" y="4133087"/>
+            <a:ext cx="320040" cy="320040"/>
+          </a:xfrm>
+          <a:prstGeom prst="rect">
+            <a:avLst/>
+          </a:prstGeom>
+        </p:spPr>
+      </p:pic>
+      <p:sp>
+        <p:nvSpPr>
+          <p:cNvPr id="25" name="TextBox 24"/>
           <p:cNvSpPr txBox="1"/>
           <p:nvPr/>
         </p:nvSpPr>
@@ -23229,7 +28317,7 @@
       </p:sp>
       <p:sp>
         <p:nvSpPr>
-          <p:cNvPr id="22" name="TextBox 21"/>
+          <p:cNvPr id="26" name="TextBox 25"/>
           <p:cNvSpPr txBox="1"/>
           <p:nvPr/>
         </p:nvSpPr>
